--- a/docs/教学/实习/汇报课-二年级下-数独游戏/数独游戏.pptx
+++ b/docs/教学/实习/汇报课-二年级下-数独游戏/数独游戏.pptx
@@ -909,10 +909,10 @@
         </p:nvGrpSpPr>
         <p:grpSpPr>
           <a:xfrm>
-            <a:off x="0" y="0"/>
-            <a:ext cx="10243130" cy="2843443"/>
+            <a:off x="2135560" y="1636847"/>
+            <a:ext cx="8107570" cy="1206596"/>
             <a:chOff x="0" y="0"/>
-            <a:chExt cx="10243130" cy="2843443"/>
+            <a:chExt cx="8107570" cy="1206596"/>
           </a:xfrm>
         </p:grpSpPr>
         <p:sp>
@@ -923,7 +923,7 @@
           </p:nvSpPr>
           <p:spPr>
             <a:xfrm>
-              <a:off x="3134432" y="1729613"/>
+              <a:off x="998872" y="92766"/>
               <a:ext cx="7108698" cy="1113830"/>
             </a:xfrm>
             <a:prstGeom prst="rect">
@@ -2621,7 +2621,7 @@
         </p:sp>
         <p:sp>
           <p:nvSpPr>
-            <p:cNvPr id="20" name="文本9"/>
+            <p:cNvPr id="20" name="文本6"/>
             <p:cNvSpPr txBox="1"/>
             <p:nvPr/>
           </p:nvSpPr>
@@ -3043,7 +3043,7 @@
         <p:spPr>
           <a:xfrm>
             <a:off x="716823" y="980323"/>
-            <a:ext cx="6395228" cy="2548060"/>
+            <a:ext cx="6395228" cy="2534249"/>
           </a:xfrm>
           <a:prstGeom prst="rect">
             <a:avLst/>
@@ -3093,31 +3093,7 @@
                 <a:latin typeface="楷体"/>
                 <a:ea typeface="楷体"/>
               </a:rPr>
-              <a:t>填满右边的的方格，要使每行、每列以及每个</a:t>
-            </a:r>
-            <a:r>
-              <a:rPr lang="zh-CN" altLang="en-US" sz="3399" b="1" i="0" dirty="0">
-                <a:solidFill>
-                  <a:srgbClr val="231F20">
-                    <a:alpha val="100000"/>
-                  </a:srgbClr>
-                </a:solidFill>
-                <a:latin typeface="Times New Roman"/>
-                <a:ea typeface="Times New Roman"/>
-              </a:rPr>
-              <a:t>   </a:t>
-            </a:r>
-            <a:r>
-              <a:rPr lang="zh-CN" altLang="en-US" sz="3399" b="1" i="0" dirty="0">
-                <a:solidFill>
-                  <a:srgbClr val="231F20">
-                    <a:alpha val="100000"/>
-                  </a:srgbClr>
-                </a:solidFill>
-                <a:latin typeface="楷体"/>
-                <a:ea typeface="楷体"/>
-              </a:rPr>
-              <a:t>都要用到</a:t>
+              <a:t>填满右边的的方格，要使每行、每列以及都要用到</a:t>
             </a:r>
             <a:r>
               <a:rPr lang="zh-CN" altLang="en-US" sz="3399" b="1" i="0" dirty="0">
@@ -6068,23 +6044,7 @@
                     <a:bodyPr anchor="ctr"/>
                     <a:lstStyle/>
                     <a:p>
-                      <a:pPr marL="0" algn="ctr">
-                        <a:lnSpc>
-                          <a:spcPts val="4300"/>
-                        </a:lnSpc>
-                      </a:pPr>
-                      <a:r>
-                        <a:rPr lang="zh-CN" altLang="en-US" sz="3600" b="1" i="0" dirty="0">
-                          <a:solidFill>
-                            <a:srgbClr val="000000">
-                              <a:alpha val="100000"/>
-                            </a:srgbClr>
-                          </a:solidFill>
-                          <a:latin typeface="Times New Roman"/>
-                          <a:ea typeface="Times New Roman"/>
-                        </a:rPr>
-                        <a:t>2</a:t>
-                      </a:r>
+                      <a:pPr marL="0" algn="ctr"/>
                     </a:p>
                   </a:txBody>
                   <a:tcPr anchor="ctr">
@@ -6135,47 +6095,7 @@
       </p:graphicFrame>
       <p:sp>
         <p:nvSpPr>
-          <p:cNvPr id="16" name="文本3"/>
-          <p:cNvSpPr txBox="1"/>
-          <p:nvPr/>
-        </p:nvSpPr>
-        <p:spPr>
-          <a:xfrm>
-            <a:off x="10426492" y="4106768"/>
-            <a:ext cx="838434" cy="836831"/>
-          </a:xfrm>
-          <a:prstGeom prst="rect">
-            <a:avLst/>
-          </a:prstGeom>
-          <a:noFill/>
-        </p:spPr>
-        <p:txBody>
-          <a:bodyPr anchor="t"/>
-          <a:lstStyle/>
-          <a:p>
-            <a:pPr marL="0" algn="l">
-              <a:lnSpc>
-                <a:spcPts val="4300"/>
-              </a:lnSpc>
-            </a:pPr>
-            <a:r>
-              <a:rPr lang="zh-CN" altLang="en-US" sz="3600" b="1" i="0" dirty="0">
-                <a:solidFill>
-                  <a:srgbClr val="9900FF">
-                    <a:alpha val="100000"/>
-                  </a:srgbClr>
-                </a:solidFill>
-                <a:latin typeface="楷体"/>
-                <a:ea typeface="楷体"/>
-              </a:rPr>
-              <a:t>格</a:t>
-            </a:r>
-          </a:p>
-        </p:txBody>
-      </p:sp>
-      <p:sp>
-        <p:nvSpPr>
-          <p:cNvPr id="17" name="文本4"/>
+          <p:cNvPr id="16" name="文本4"/>
           <p:cNvSpPr txBox="1"/>
           <p:nvPr/>
         </p:nvSpPr>
@@ -6215,7 +6135,7 @@
       </p:sp>
       <p:sp>
         <p:nvSpPr>
-          <p:cNvPr id="18" name="文本5"/>
+          <p:cNvPr id="17" name="文本5"/>
           <p:cNvSpPr txBox="1"/>
           <p:nvPr/>
         </p:nvSpPr>
@@ -6255,7 +6175,7 @@
       </p:sp>
       <p:sp>
         <p:nvSpPr>
-          <p:cNvPr id="19" name="形状6"/>
+          <p:cNvPr id="18" name="形状6"/>
           <p:cNvSpPr txBox="1"/>
           <p:nvPr/>
         </p:nvSpPr>
@@ -6289,7 +6209,7 @@
       </p:sp>
       <p:sp>
         <p:nvSpPr>
-          <p:cNvPr id="20" name="文本6"/>
+          <p:cNvPr id="19" name="文本6"/>
           <p:cNvSpPr txBox="1"/>
           <p:nvPr/>
         </p:nvSpPr>
@@ -6329,7 +6249,7 @@
       </p:sp>
       <p:sp>
         <p:nvSpPr>
-          <p:cNvPr id="21" name="文本7"/>
+          <p:cNvPr id="20" name="文本7"/>
           <p:cNvSpPr txBox="1"/>
           <p:nvPr/>
         </p:nvSpPr>
@@ -6432,6 +6352,24 @@
                                   </p:childTnLst>
                                 </p:cTn>
                               </p:par>
+                            </p:childTnLst>
+                          </p:cTn>
+                        </p:par>
+                      </p:childTnLst>
+                    </p:cTn>
+                  </p:par>
+                  <p:par>
+                    <p:cTn id="11" fill="hold">
+                      <p:stCondLst>
+                        <p:cond delay="indefinite"/>
+                      </p:stCondLst>
+                      <p:childTnLst>
+                        <p:par>
+                          <p:cTn id="12" fill="hold">
+                            <p:stCondLst>
+                              <p:cond delay="0"/>
+                            </p:stCondLst>
+                            <p:childTnLst>
                               <p:par>
                                 <p:cTn id="10" presetID="10" presetClass="entr" presetSubtype="0" fill="hold" grpId="0" nodeType="clickEffect">
                                   <p:stCondLst>
@@ -6441,6 +6379,41 @@
                                     <p:set>
                                       <p:cBhvr>
                                         <p:cTn id="8" dur="1" fill="hold">
+                                          <p:stCondLst>
+                                            <p:cond delay="0"/>
+                                          </p:stCondLst>
+                                        </p:cTn>
+                                        <p:tgtEl>
+                                          <p:spTgt spid="10"/>
+                                        </p:tgtEl>
+                                        <p:attrNameLst>
+                                          <p:attrName>style.visibility</p:attrName>
+                                        </p:attrNameLst>
+                                      </p:cBhvr>
+                                      <p:to>
+                                        <p:strVal val="visible"/>
+                                      </p:to>
+                                    </p:set>
+                                    <p:animEffect transition="in" filter="fade">
+                                      <p:cBhvr>
+                                        <p:cTn id="9" dur="1"/>
+                                        <p:tgtEl>
+                                          <p:spTgt spid="10"/>
+                                        </p:tgtEl>
+                                      </p:cBhvr>
+                                    </p:animEffect>
+                                  </p:childTnLst>
+                                </p:cTn>
+                              </p:par>
+                              <p:par>
+                                <p:cTn id="15" presetID="10" presetClass="entr" presetSubtype="0" fill="hold" grpId="0" nodeType="clickEffect">
+                                  <p:stCondLst>
+                                    <p:cond delay="0"/>
+                                  </p:stCondLst>
+                                  <p:childTnLst>
+                                    <p:set>
+                                      <p:cBhvr>
+                                        <p:cTn id="13" dur="1" fill="hold">
                                           <p:stCondLst>
                                             <p:cond delay="0"/>
                                           </p:stCondLst>
@@ -6458,7 +6431,7 @@
                                     </p:set>
                                     <p:animEffect transition="in" filter="fade">
                                       <p:cBhvr>
-                                        <p:cTn id="9" dur="1"/>
+                                        <p:cTn id="14" dur="1"/>
                                         <p:tgtEl>
                                           <p:spTgt spid="16"/>
                                         </p:tgtEl>
@@ -6474,32 +6447,32 @@
                     </p:cTn>
                   </p:par>
                   <p:par>
-                    <p:cTn id="14" fill="hold">
+                    <p:cTn id="19" fill="hold">
                       <p:stCondLst>
                         <p:cond delay="indefinite"/>
                       </p:stCondLst>
                       <p:childTnLst>
                         <p:par>
-                          <p:cTn id="15" fill="hold">
+                          <p:cTn id="20" fill="hold">
                             <p:stCondLst>
                               <p:cond delay="0"/>
                             </p:stCondLst>
                             <p:childTnLst>
                               <p:par>
-                                <p:cTn id="13" presetID="10" presetClass="entr" presetSubtype="0" fill="hold" grpId="0" nodeType="clickEffect">
+                                <p:cTn id="18" presetID="10" presetClass="entr" presetSubtype="0" fill="hold" grpId="0" nodeType="clickEffect">
                                   <p:stCondLst>
                                     <p:cond delay="0"/>
                                   </p:stCondLst>
                                   <p:childTnLst>
                                     <p:set>
                                       <p:cBhvr>
-                                        <p:cTn id="11" dur="1" fill="hold">
+                                        <p:cTn id="16" dur="1" fill="hold">
                                           <p:stCondLst>
                                             <p:cond delay="0"/>
                                           </p:stCondLst>
                                         </p:cTn>
                                         <p:tgtEl>
-                                          <p:spTgt spid="10"/>
+                                          <p:spTgt spid="11"/>
                                         </p:tgtEl>
                                         <p:attrNameLst>
                                           <p:attrName>style.visibility</p:attrName>
@@ -6511,9 +6484,9 @@
                                     </p:set>
                                     <p:animEffect transition="in" filter="fade">
                                       <p:cBhvr>
-                                        <p:cTn id="12" dur="1"/>
+                                        <p:cTn id="17" dur="1"/>
                                         <p:tgtEl>
-                                          <p:spTgt spid="10"/>
+                                          <p:spTgt spid="11"/>
                                         </p:tgtEl>
                                       </p:cBhvr>
                                     </p:animEffect>
@@ -6521,14 +6494,14 @@
                                 </p:cTn>
                               </p:par>
                               <p:par>
-                                <p:cTn id="18" presetID="10" presetClass="entr" presetSubtype="0" fill="hold" grpId="0" nodeType="clickEffect">
+                                <p:cTn id="23" presetID="10" presetClass="entr" presetSubtype="0" fill="hold" grpId="0" nodeType="clickEffect">
                                   <p:stCondLst>
                                     <p:cond delay="0"/>
                                   </p:stCondLst>
                                   <p:childTnLst>
                                     <p:set>
                                       <p:cBhvr>
-                                        <p:cTn id="16" dur="1" fill="hold">
+                                        <p:cTn id="21" dur="1" fill="hold">
                                           <p:stCondLst>
                                             <p:cond delay="0"/>
                                           </p:stCondLst>
@@ -6546,7 +6519,7 @@
                                     </p:set>
                                     <p:animEffect transition="in" filter="fade">
                                       <p:cBhvr>
-                                        <p:cTn id="17" dur="1"/>
+                                        <p:cTn id="22" dur="1"/>
                                         <p:tgtEl>
                                           <p:spTgt spid="17"/>
                                         </p:tgtEl>
@@ -6562,52 +6535,17 @@
                     </p:cTn>
                   </p:par>
                   <p:par>
-                    <p:cTn id="22" fill="hold">
+                    <p:cTn id="27" fill="hold">
                       <p:stCondLst>
                         <p:cond delay="indefinite"/>
                       </p:stCondLst>
                       <p:childTnLst>
                         <p:par>
-                          <p:cTn id="23" fill="hold">
+                          <p:cTn id="28" fill="hold">
                             <p:stCondLst>
                               <p:cond delay="0"/>
                             </p:stCondLst>
                             <p:childTnLst>
-                              <p:par>
-                                <p:cTn id="21" presetID="10" presetClass="entr" presetSubtype="0" fill="hold" grpId="0" nodeType="clickEffect">
-                                  <p:stCondLst>
-                                    <p:cond delay="0"/>
-                                  </p:stCondLst>
-                                  <p:childTnLst>
-                                    <p:set>
-                                      <p:cBhvr>
-                                        <p:cTn id="19" dur="1" fill="hold">
-                                          <p:stCondLst>
-                                            <p:cond delay="0"/>
-                                          </p:stCondLst>
-                                        </p:cTn>
-                                        <p:tgtEl>
-                                          <p:spTgt spid="11"/>
-                                        </p:tgtEl>
-                                        <p:attrNameLst>
-                                          <p:attrName>style.visibility</p:attrName>
-                                        </p:attrNameLst>
-                                      </p:cBhvr>
-                                      <p:to>
-                                        <p:strVal val="visible"/>
-                                      </p:to>
-                                    </p:set>
-                                    <p:animEffect transition="in" filter="fade">
-                                      <p:cBhvr>
-                                        <p:cTn id="20" dur="1"/>
-                                        <p:tgtEl>
-                                          <p:spTgt spid="11"/>
-                                        </p:tgtEl>
-                                      </p:cBhvr>
-                                    </p:animEffect>
-                                  </p:childTnLst>
-                                </p:cTn>
-                              </p:par>
                               <p:par>
                                 <p:cTn id="26" presetID="10" presetClass="entr" presetSubtype="0" fill="hold" grpId="0" nodeType="clickEffect">
                                   <p:stCondLst>
@@ -6643,33 +6581,15 @@
                                   </p:childTnLst>
                                 </p:cTn>
                               </p:par>
-                            </p:childTnLst>
-                          </p:cTn>
-                        </p:par>
-                      </p:childTnLst>
-                    </p:cTn>
-                  </p:par>
-                  <p:par>
-                    <p:cTn id="30" fill="hold">
-                      <p:stCondLst>
-                        <p:cond delay="indefinite"/>
-                      </p:stCondLst>
-                      <p:childTnLst>
-                        <p:par>
-                          <p:cTn id="31" fill="hold">
-                            <p:stCondLst>
-                              <p:cond delay="0"/>
-                            </p:stCondLst>
-                            <p:childTnLst>
                               <p:par>
-                                <p:cTn id="29" presetID="10" presetClass="entr" presetSubtype="0" fill="hold" grpId="0" nodeType="clickEffect">
+                                <p:cTn id="31" presetID="10" presetClass="entr" presetSubtype="0" fill="hold" grpId="0" nodeType="clickEffect">
                                   <p:stCondLst>
                                     <p:cond delay="0"/>
                                   </p:stCondLst>
                                   <p:childTnLst>
                                     <p:set>
                                       <p:cBhvr>
-                                        <p:cTn id="27" dur="1" fill="hold">
+                                        <p:cTn id="29" dur="1" fill="hold">
                                           <p:stCondLst>
                                             <p:cond delay="0"/>
                                           </p:stCondLst>
@@ -6687,44 +6607,9 @@
                                     </p:set>
                                     <p:animEffect transition="in" filter="fade">
                                       <p:cBhvr>
-                                        <p:cTn id="28" dur="1"/>
+                                        <p:cTn id="30" dur="1"/>
                                         <p:tgtEl>
                                           <p:spTgt spid="19"/>
-                                        </p:tgtEl>
-                                      </p:cBhvr>
-                                    </p:animEffect>
-                                  </p:childTnLst>
-                                </p:cTn>
-                              </p:par>
-                              <p:par>
-                                <p:cTn id="34" presetID="10" presetClass="entr" presetSubtype="0" fill="hold" grpId="0" nodeType="clickEffect">
-                                  <p:stCondLst>
-                                    <p:cond delay="0"/>
-                                  </p:stCondLst>
-                                  <p:childTnLst>
-                                    <p:set>
-                                      <p:cBhvr>
-                                        <p:cTn id="32" dur="1" fill="hold">
-                                          <p:stCondLst>
-                                            <p:cond delay="0"/>
-                                          </p:stCondLst>
-                                        </p:cTn>
-                                        <p:tgtEl>
-                                          <p:spTgt spid="20"/>
-                                        </p:tgtEl>
-                                        <p:attrNameLst>
-                                          <p:attrName>style.visibility</p:attrName>
-                                        </p:attrNameLst>
-                                      </p:cBhvr>
-                                      <p:to>
-                                        <p:strVal val="visible"/>
-                                      </p:to>
-                                    </p:set>
-                                    <p:animEffect transition="in" filter="fade">
-                                      <p:cBhvr>
-                                        <p:cTn id="33" dur="1"/>
-                                        <p:tgtEl>
-                                          <p:spTgt spid="20"/>
                                         </p:tgtEl>
                                       </p:cBhvr>
                                     </p:animEffect>
@@ -6738,26 +6623,26 @@
                     </p:cTn>
                   </p:par>
                   <p:par>
-                    <p:cTn id="38" fill="hold">
+                    <p:cTn id="35" fill="hold">
                       <p:stCondLst>
                         <p:cond delay="indefinite"/>
                       </p:stCondLst>
                       <p:childTnLst>
                         <p:par>
-                          <p:cTn id="39" fill="hold">
+                          <p:cTn id="36" fill="hold">
                             <p:stCondLst>
                               <p:cond delay="0"/>
                             </p:stCondLst>
                             <p:childTnLst>
                               <p:par>
-                                <p:cTn id="37" presetID="10" presetClass="entr" presetSubtype="0" fill="hold" grpId="0" nodeType="clickEffect">
+                                <p:cTn id="34" presetID="10" presetClass="entr" presetSubtype="0" fill="hold" grpId="0" nodeType="clickEffect">
                                   <p:stCondLst>
                                     <p:cond delay="0"/>
                                   </p:stCondLst>
                                   <p:childTnLst>
                                     <p:set>
                                       <p:cBhvr>
-                                        <p:cTn id="35" dur="1" fill="hold">
+                                        <p:cTn id="32" dur="1" fill="hold">
                                           <p:stCondLst>
                                             <p:cond delay="0"/>
                                           </p:stCondLst>
@@ -6775,44 +6660,9 @@
                                     </p:set>
                                     <p:animEffect transition="in" filter="fade">
                                       <p:cBhvr>
-                                        <p:cTn id="36" dur="300"/>
+                                        <p:cTn id="33" dur="300"/>
                                         <p:tgtEl>
                                           <p:spTgt spid="14"/>
-                                        </p:tgtEl>
-                                      </p:cBhvr>
-                                    </p:animEffect>
-                                  </p:childTnLst>
-                                </p:cTn>
-                              </p:par>
-                              <p:par>
-                                <p:cTn id="42" presetID="10" presetClass="entr" presetSubtype="0" fill="hold" grpId="0" nodeType="clickEffect">
-                                  <p:stCondLst>
-                                    <p:cond delay="0"/>
-                                  </p:stCondLst>
-                                  <p:childTnLst>
-                                    <p:set>
-                                      <p:cBhvr>
-                                        <p:cTn id="40" dur="1" fill="hold">
-                                          <p:stCondLst>
-                                            <p:cond delay="0"/>
-                                          </p:stCondLst>
-                                        </p:cTn>
-                                        <p:tgtEl>
-                                          <p:spTgt spid="13"/>
-                                        </p:tgtEl>
-                                        <p:attrNameLst>
-                                          <p:attrName>style.visibility</p:attrName>
-                                        </p:attrNameLst>
-                                      </p:cBhvr>
-                                      <p:to>
-                                        <p:strVal val="visible"/>
-                                      </p:to>
-                                    </p:set>
-                                    <p:animEffect transition="in" filter="fade">
-                                      <p:cBhvr>
-                                        <p:cTn id="41" dur="300"/>
-                                        <p:tgtEl>
-                                          <p:spTgt spid="13"/>
                                         </p:tgtEl>
                                       </p:cBhvr>
                                     </p:animEffect>
@@ -6826,32 +6676,32 @@
                     </p:cTn>
                   </p:par>
                   <p:par>
-                    <p:cTn id="46" fill="hold">
+                    <p:cTn id="40" fill="hold">
                       <p:stCondLst>
                         <p:cond delay="indefinite"/>
                       </p:stCondLst>
                       <p:childTnLst>
                         <p:par>
-                          <p:cTn id="47" fill="hold">
+                          <p:cTn id="41" fill="hold">
                             <p:stCondLst>
                               <p:cond delay="0"/>
                             </p:stCondLst>
                             <p:childTnLst>
                               <p:par>
-                                <p:cTn id="45" presetID="22" presetClass="entr" presetSubtype="0" fill="hold" grpId="0" nodeType="clickEffect">
+                                <p:cTn id="39" presetID="22" presetClass="entr" presetSubtype="0" fill="hold" grpId="0" nodeType="clickEffect">
                                   <p:stCondLst>
                                     <p:cond delay="0"/>
                                   </p:stCondLst>
                                   <p:childTnLst>
                                     <p:set>
                                       <p:cBhvr>
-                                        <p:cTn id="43" dur="1" fill="hold">
+                                        <p:cTn id="37" dur="1" fill="hold">
                                           <p:stCondLst>
                                             <p:cond delay="0"/>
                                           </p:stCondLst>
                                         </p:cTn>
                                         <p:tgtEl>
-                                          <p:spTgt spid="21"/>
+                                          <p:spTgt spid="20"/>
                                         </p:tgtEl>
                                         <p:attrNameLst>
                                           <p:attrName>style.visibility</p:attrName>
@@ -6863,9 +6713,9 @@
                                     </p:set>
                                     <p:animEffect transition="in" filter="wipe(left)">
                                       <p:cBhvr>
-                                        <p:cTn id="44" dur="500"/>
+                                        <p:cTn id="38" dur="500"/>
                                         <p:tgtEl>
-                                          <p:spTgt spid="21"/>
+                                          <p:spTgt spid="20"/>
                                         </p:tgtEl>
                                       </p:cBhvr>
                                     </p:animEffect>
@@ -6901,16 +6751,14 @@
     </p:tnLst>
     <p:bldLst>
       <p:bldP spid="9" grpId="0" animBg="1"/>
+      <p:bldP spid="10" grpId="0" animBg="1"/>
       <p:bldP spid="16" grpId="0" animBg="1"/>
-      <p:bldP spid="10" grpId="0" animBg="1"/>
+      <p:bldP spid="11" grpId="0" animBg="1"/>
       <p:bldP spid="17" grpId="0" animBg="1"/>
-      <p:bldP spid="11" grpId="0" animBg="1"/>
       <p:bldP spid="18" grpId="0" animBg="1"/>
       <p:bldP spid="19" grpId="0" animBg="1"/>
+      <p:bldP spid="14" grpId="0" animBg="1"/>
       <p:bldP spid="20" grpId="0" animBg="1"/>
-      <p:bldP spid="14" grpId="0" animBg="1"/>
-      <p:bldP spid="13" grpId="0" animBg="1"/>
-      <p:bldP spid="21" grpId="0" animBg="1"/>
     </p:bldLst>
   </p:timing>
 </p:sld>
@@ -8238,7 +8086,7 @@
                   <a:latin typeface="等线"/>
                   <a:ea typeface="等线"/>
                 </a:rPr>
-                <a:t>1.用你的方法尝试推理，填一填。</a:t>
+                <a:t>用你的方法尝试推理，填一填。</a:t>
               </a:r>
             </a:p>
             <a:p>
@@ -8257,7 +8105,7 @@
                   <a:latin typeface="等线"/>
                   <a:ea typeface="等线"/>
                 </a:rPr>
-                <a:t>2.注意黑板上的规则和方法</a:t>
+                <a:t>注意黑板上的规则和方法</a:t>
               </a:r>
             </a:p>
           </p:txBody>
@@ -8593,97 +8441,9 @@
           </p:txBody>
         </p:sp>
       </p:grpSp>
-      <p:grpSp>
-        <p:nvGrpSpPr>
-          <p:cNvPr id="7" name="组合2"/>
-          <p:cNvGrpSpPr/>
-          <p:nvPr/>
-        </p:nvGrpSpPr>
-        <p:grpSpPr>
-          <a:xfrm>
-            <a:off x="2417197" y="5170532"/>
-            <a:ext cx="2764046" cy="712842"/>
-            <a:chOff x="0" y="0"/>
-            <a:chExt cx="2764046" cy="712842"/>
-          </a:xfrm>
-        </p:grpSpPr>
-        <p:sp>
-          <p:nvSpPr>
-            <p:cNvPr id="8" name="形状3"/>
-            <p:cNvSpPr txBox="1"/>
-            <p:nvPr/>
-          </p:nvSpPr>
-          <p:spPr>
-            <a:xfrm>
-              <a:off x="0" y="66511"/>
-              <a:ext cx="2736304" cy="646331"/>
-            </a:xfrm>
-            <a:prstGeom prst="roundRect"/>
-            <a:solidFill>
-              <a:srgbClr val="FBE5D6">
-                <a:alpha val="100000"/>
-              </a:srgbClr>
-            </a:solidFill>
-            <a:ln w="9525">
-              <a:solidFill>
-                <a:srgbClr val="FFFFFF">
-                  <a:alpha val="0"/>
-                </a:srgbClr>
-              </a:solidFill>
-            </a:ln>
-          </p:spPr>
-          <p:txBody>
-            <a:bodyPr anchor="ctr"/>
-            <a:lstStyle/>
-            <a:p>
-              <a:pPr marL="0" algn="ctr"/>
-            </a:p>
-          </p:txBody>
-        </p:sp>
-        <p:sp>
-          <p:nvSpPr>
-            <p:cNvPr id="9" name="文本2"/>
-            <p:cNvSpPr txBox="1"/>
-            <p:nvPr/>
-          </p:nvSpPr>
-          <p:spPr>
-            <a:xfrm>
-              <a:off x="27742" y="0"/>
-              <a:ext cx="2736304" cy="680293"/>
-            </a:xfrm>
-            <a:prstGeom prst="rect">
-              <a:avLst/>
-            </a:prstGeom>
-            <a:noFill/>
-          </p:spPr>
-          <p:txBody>
-            <a:bodyPr anchor="ctr"/>
-            <a:lstStyle/>
-            <a:p>
-              <a:pPr marL="0" algn="ctr">
-                <a:lnSpc>
-                  <a:spcPts val="3800"/>
-                </a:lnSpc>
-              </a:pPr>
-              <a:r>
-                <a:rPr lang="zh-CN" altLang="en-US" sz="3200" b="0" i="0" dirty="0">
-                  <a:solidFill>
-                    <a:srgbClr val="000000">
-                      <a:alpha val="100000"/>
-                    </a:srgbClr>
-                  </a:solidFill>
-                  <a:latin typeface="黑体"/>
-                  <a:ea typeface="黑体"/>
-                </a:rPr>
-                <a:t>找三定一法</a:t>
-              </a:r>
-            </a:p>
-          </p:txBody>
-        </p:sp>
-      </p:grpSp>
       <p:graphicFrame>
         <p:nvGraphicFramePr>
-          <p:cNvPr id="10" name="表格1">
+          <p:cNvPr id="7" name="表格1">
             <a:extLst>
               <a:ext uri="{FF2B5EF4-FFF2-40B4-BE49-F238E27FC236}">
                 <a16:creationId xmlns:a16="http://schemas.microsoft.com/office/drawing/2014/main" id="{62B2FBE6-5C8C-E811-489E-1440CA960B7D}"/>
@@ -8702,7 +8462,7 @@
           </p:nvPr>
         </p:nvGraphicFramePr>
         <p:xfrm>
-          <a:off x="2239766" y="1865757"/>
+          <a:off x="4537805" y="2254701"/>
           <a:ext cx="3118123" cy="3118523"/>
         </p:xfrm>
         <a:graphic>
@@ -9601,1030 +9361,6 @@
           </a:graphicData>
         </a:graphic>
       </p:graphicFrame>
-      <p:grpSp>
-        <p:nvGrpSpPr>
-          <p:cNvPr id="11" name="组合3"/>
-          <p:cNvGrpSpPr/>
-          <p:nvPr/>
-        </p:nvGrpSpPr>
-        <p:grpSpPr>
-          <a:xfrm>
-            <a:off x="6977577" y="5239893"/>
-            <a:ext cx="2764045" cy="712842"/>
-            <a:chOff x="0" y="0"/>
-            <a:chExt cx="2764045" cy="712842"/>
-          </a:xfrm>
-        </p:grpSpPr>
-        <p:sp>
-          <p:nvSpPr>
-            <p:cNvPr id="12" name="形状4"/>
-            <p:cNvSpPr txBox="1"/>
-            <p:nvPr/>
-          </p:nvSpPr>
-          <p:spPr>
-            <a:xfrm>
-              <a:off x="0" y="66511"/>
-              <a:ext cx="2736304" cy="646331"/>
-            </a:xfrm>
-            <a:prstGeom prst="roundRect"/>
-            <a:solidFill>
-              <a:srgbClr val="FBE5D6">
-                <a:alpha val="100000"/>
-              </a:srgbClr>
-            </a:solidFill>
-            <a:ln w="9525">
-              <a:solidFill>
-                <a:srgbClr val="FFFFFF">
-                  <a:alpha val="0"/>
-                </a:srgbClr>
-              </a:solidFill>
-            </a:ln>
-          </p:spPr>
-          <p:txBody>
-            <a:bodyPr anchor="ctr"/>
-            <a:lstStyle/>
-            <a:p>
-              <a:pPr marL="0" algn="ctr"/>
-            </a:p>
-          </p:txBody>
-        </p:sp>
-        <p:sp>
-          <p:nvSpPr>
-            <p:cNvPr id="13" name="文本3"/>
-            <p:cNvSpPr txBox="1"/>
-            <p:nvPr/>
-          </p:nvSpPr>
-          <p:spPr>
-            <a:xfrm>
-              <a:off x="27741" y="0"/>
-              <a:ext cx="2736304" cy="680293"/>
-            </a:xfrm>
-            <a:prstGeom prst="rect">
-              <a:avLst/>
-            </a:prstGeom>
-            <a:noFill/>
-          </p:spPr>
-          <p:txBody>
-            <a:bodyPr anchor="ctr"/>
-            <a:lstStyle/>
-            <a:p>
-              <a:pPr marL="0" algn="ctr">
-                <a:lnSpc>
-                  <a:spcPts val="3800"/>
-                </a:lnSpc>
-              </a:pPr>
-              <a:r>
-                <a:rPr lang="zh-CN" altLang="en-US" sz="3200" b="0" i="0" dirty="0">
-                  <a:solidFill>
-                    <a:srgbClr val="000000">
-                      <a:alpha val="100000"/>
-                    </a:srgbClr>
-                  </a:solidFill>
-                  <a:latin typeface="黑体"/>
-                  <a:ea typeface="黑体"/>
-                </a:rPr>
-                <a:t>宫内排除法</a:t>
-              </a:r>
-            </a:p>
-          </p:txBody>
-        </p:sp>
-      </p:grpSp>
-      <p:graphicFrame>
-        <p:nvGraphicFramePr>
-          <p:cNvPr id="14" name="表格2">
-            <a:extLst>
-              <a:ext uri="{FF2B5EF4-FFF2-40B4-BE49-F238E27FC236}">
-                <a16:creationId xmlns:a16="http://schemas.microsoft.com/office/drawing/2014/main" id="{62B2FBE6-5C8C-E811-489E-1440CA960B7D}"/>
-              </a:ext>
-            </a:extLst>
-          </p:cNvPr>
-          <p:cNvGraphicFramePr>
-            <a:graphicFrameLocks noGrp="1"/>
-          </p:cNvGraphicFramePr>
-          <p:nvPr>
-            <p:extLst>
-              <p:ext uri="{D42A27DB-BD31-4B8C-83A1-F6EECF244321}">
-                <p14:modId xmlns:p14="http://schemas.microsoft.com/office/powerpoint/2010/main" val="3345567701"/>
-              </p:ext>
-            </p:extLst>
-          </p:nvPr>
-        </p:nvGraphicFramePr>
-        <p:xfrm>
-          <a:off x="6800269" y="1865890"/>
-          <a:ext cx="3118123" cy="3118523"/>
-        </p:xfrm>
-        <a:graphic>
-          <a:graphicData uri="http://schemas.openxmlformats.org/drawingml/2006/table">
-            <a:tbl>
-              <a:tblPr firstRow="1" bandRow="1">
-                <a:tableStyleId>{5C22544A-7EE6-4342-B048-85BDC9FD1C3A}</a:tableStyleId>
-              </a:tblPr>
-              <a:tblGrid>
-                <a:gridCol w="779531">
-                  <a:extLst>
-                    <a:ext uri="{9D8B030D-6E8A-4147-A177-3AD203B41FA5}">
-                      <a16:colId xmlns:a16="http://schemas.microsoft.com/office/drawing/2014/main" val="2854172943"/>
-                    </a:ext>
-                  </a:extLst>
-                </a:gridCol>
-                <a:gridCol w="779531">
-                  <a:extLst>
-                    <a:ext uri="{9D8B030D-6E8A-4147-A177-3AD203B41FA5}">
-                      <a16:colId xmlns:a16="http://schemas.microsoft.com/office/drawing/2014/main" val="2854172943"/>
-                    </a:ext>
-                  </a:extLst>
-                </a:gridCol>
-                <a:gridCol w="779531">
-                  <a:extLst>
-                    <a:ext uri="{9D8B030D-6E8A-4147-A177-3AD203B41FA5}">
-                      <a16:colId xmlns:a16="http://schemas.microsoft.com/office/drawing/2014/main" val="2854172943"/>
-                    </a:ext>
-                  </a:extLst>
-                </a:gridCol>
-                <a:gridCol w="779531">
-                  <a:extLst>
-                    <a:ext uri="{9D8B030D-6E8A-4147-A177-3AD203B41FA5}">
-                      <a16:colId xmlns:a16="http://schemas.microsoft.com/office/drawing/2014/main" val="2854172943"/>
-                    </a:ext>
-                  </a:extLst>
-                </a:gridCol>
-              </a:tblGrid>
-              <a:tr h="779631">
-                <a:tc rowSpan="1" gridSpan="1">
-                  <a:txBody>
-                    <a:bodyPr anchor="ctr"/>
-                    <a:lstStyle/>
-                    <a:p>
-                      <a:pPr marL="0" algn="ctr">
-                        <a:lnSpc>
-                          <a:spcPts val="4300"/>
-                        </a:lnSpc>
-                      </a:pPr>
-                      <a:r>
-                        <a:rPr lang="zh-CN" altLang="en-US" sz="3600" b="1" i="0" dirty="0">
-                          <a:solidFill>
-                            <a:srgbClr val="000000">
-                              <a:alpha val="100000"/>
-                            </a:srgbClr>
-                          </a:solidFill>
-                          <a:latin typeface="Times New Roman"/>
-                          <a:ea typeface="Times New Roman"/>
-                        </a:rPr>
-                        <a:t>1</a:t>
-                      </a:r>
-                    </a:p>
-                  </a:txBody>
-                  <a:tcPr anchor="ctr">
-                    <a:lnL w="28575" cap="flat">
-                      <a:solidFill>
-                        <a:srgbClr val="000000">
-                          <a:alpha val="100000"/>
-                        </a:srgbClr>
-                      </a:solidFill>
-                    </a:lnL>
-                    <a:lnR w="12700" cap="flat">
-                      <a:solidFill>
-                        <a:srgbClr val="000000">
-                          <a:alpha val="100000"/>
-                        </a:srgbClr>
-                      </a:solidFill>
-                    </a:lnR>
-                    <a:lnT w="28575" cap="flat">
-                      <a:solidFill>
-                        <a:srgbClr val="000000">
-                          <a:alpha val="100000"/>
-                        </a:srgbClr>
-                      </a:solidFill>
-                    </a:lnT>
-                    <a:lnB w="12700" cap="flat">
-                      <a:solidFill>
-                        <a:srgbClr val="000000">
-                          <a:alpha val="100000"/>
-                        </a:srgbClr>
-                      </a:solidFill>
-                    </a:lnB>
-                    <a:solidFill>
-                      <a:srgbClr val="FFFFFF">
-                        <a:alpha val="100000"/>
-                      </a:srgbClr>
-                    </a:solidFill>
-                  </a:tcPr>
-                  <a:extLst>
-                    <a:ext uri="{0D108BD9-81ED-4DB2-BD59-A6C34878D82A}">
-                      <a16:rowId xmlns:a16="http://schemas.microsoft.com/office/drawing/2014/main" val="2661222183"/>
-                    </a:ext>
-                  </a:extLst>
-                </a:tc>
-                <a:tc rowSpan="1" gridSpan="1">
-                  <a:txBody>
-                    <a:bodyPr anchor="t"/>
-                    <a:lstStyle/>
-                    <a:p>
-                      <a:pPr marL="0" algn="l"/>
-                    </a:p>
-                  </a:txBody>
-                  <a:tcPr anchor="t">
-                    <a:lnL w="12700" cap="flat">
-                      <a:solidFill>
-                        <a:srgbClr val="000000">
-                          <a:alpha val="100000"/>
-                        </a:srgbClr>
-                      </a:solidFill>
-                    </a:lnL>
-                    <a:lnR w="28575" cap="flat">
-                      <a:solidFill>
-                        <a:srgbClr val="000000">
-                          <a:alpha val="100000"/>
-                        </a:srgbClr>
-                      </a:solidFill>
-                    </a:lnR>
-                    <a:lnT w="28575" cap="flat">
-                      <a:solidFill>
-                        <a:srgbClr val="000000">
-                          <a:alpha val="100000"/>
-                        </a:srgbClr>
-                      </a:solidFill>
-                    </a:lnT>
-                    <a:lnB w="12700" cap="flat">
-                      <a:solidFill>
-                        <a:srgbClr val="000000">
-                          <a:alpha val="100000"/>
-                        </a:srgbClr>
-                      </a:solidFill>
-                    </a:lnB>
-                    <a:solidFill>
-                      <a:srgbClr val="FFFFFF">
-                        <a:alpha val="100000"/>
-                      </a:srgbClr>
-                    </a:solidFill>
-                  </a:tcPr>
-                  <a:extLst>
-                    <a:ext uri="{0D108BD9-81ED-4DB2-BD59-A6C34878D82A}">
-                      <a16:rowId xmlns:a16="http://schemas.microsoft.com/office/drawing/2014/main" val="2661222183"/>
-                    </a:ext>
-                  </a:extLst>
-                </a:tc>
-                <a:tc rowSpan="1" gridSpan="1">
-                  <a:txBody>
-                    <a:bodyPr anchor="t"/>
-                    <a:lstStyle/>
-                    <a:p>
-                      <a:pPr marL="0" algn="l"/>
-                    </a:p>
-                  </a:txBody>
-                  <a:tcPr anchor="t">
-                    <a:lnL w="28575" cap="flat">
-                      <a:solidFill>
-                        <a:srgbClr val="000000">
-                          <a:alpha val="100000"/>
-                        </a:srgbClr>
-                      </a:solidFill>
-                    </a:lnL>
-                    <a:lnR w="12700" cap="flat">
-                      <a:solidFill>
-                        <a:srgbClr val="000000">
-                          <a:alpha val="100000"/>
-                        </a:srgbClr>
-                      </a:solidFill>
-                    </a:lnR>
-                    <a:lnT w="28575" cap="flat">
-                      <a:solidFill>
-                        <a:srgbClr val="000000">
-                          <a:alpha val="100000"/>
-                        </a:srgbClr>
-                      </a:solidFill>
-                    </a:lnT>
-                    <a:lnB w="12700" cap="flat">
-                      <a:solidFill>
-                        <a:srgbClr val="000000">
-                          <a:alpha val="100000"/>
-                        </a:srgbClr>
-                      </a:solidFill>
-                    </a:lnB>
-                    <a:solidFill>
-                      <a:srgbClr val="FFFFFF">
-                        <a:alpha val="100000"/>
-                      </a:srgbClr>
-                    </a:solidFill>
-                  </a:tcPr>
-                  <a:extLst>
-                    <a:ext uri="{0D108BD9-81ED-4DB2-BD59-A6C34878D82A}">
-                      <a16:rowId xmlns:a16="http://schemas.microsoft.com/office/drawing/2014/main" val="2661222183"/>
-                    </a:ext>
-                  </a:extLst>
-                </a:tc>
-                <a:tc rowSpan="1" gridSpan="1">
-                  <a:txBody>
-                    <a:bodyPr anchor="t"/>
-                    <a:lstStyle/>
-                    <a:p>
-                      <a:pPr marL="0" algn="l"/>
-                    </a:p>
-                  </a:txBody>
-                  <a:tcPr anchor="t">
-                    <a:lnL w="12700" cap="flat">
-                      <a:solidFill>
-                        <a:srgbClr val="000000">
-                          <a:alpha val="100000"/>
-                        </a:srgbClr>
-                      </a:solidFill>
-                    </a:lnL>
-                    <a:lnR w="28575" cap="flat">
-                      <a:solidFill>
-                        <a:srgbClr val="000000">
-                          <a:alpha val="100000"/>
-                        </a:srgbClr>
-                      </a:solidFill>
-                    </a:lnR>
-                    <a:lnT w="28575" cap="flat">
-                      <a:solidFill>
-                        <a:srgbClr val="000000">
-                          <a:alpha val="100000"/>
-                        </a:srgbClr>
-                      </a:solidFill>
-                    </a:lnT>
-                    <a:lnB w="12700" cap="flat">
-                      <a:solidFill>
-                        <a:srgbClr val="000000">
-                          <a:alpha val="100000"/>
-                        </a:srgbClr>
-                      </a:solidFill>
-                    </a:lnB>
-                    <a:solidFill>
-                      <a:srgbClr val="FFFFFF">
-                        <a:alpha val="100000"/>
-                      </a:srgbClr>
-                    </a:solidFill>
-                  </a:tcPr>
-                  <a:extLst>
-                    <a:ext uri="{0D108BD9-81ED-4DB2-BD59-A6C34878D82A}">
-                      <a16:rowId xmlns:a16="http://schemas.microsoft.com/office/drawing/2014/main" val="2661222183"/>
-                    </a:ext>
-                  </a:extLst>
-                </a:tc>
-              </a:tr>
-              <a:tr h="779630">
-                <a:tc rowSpan="1" gridSpan="1">
-                  <a:txBody>
-                    <a:bodyPr anchor="t"/>
-                    <a:lstStyle/>
-                    <a:p>
-                      <a:pPr marL="0" algn="ctr">
-                        <a:lnSpc>
-                          <a:spcPts val="4300"/>
-                        </a:lnSpc>
-                      </a:pPr>
-                      <a:r>
-                        <a:rPr lang="zh-CN" altLang="en-US" sz="3600" b="1" i="0" dirty="0">
-                          <a:solidFill>
-                            <a:srgbClr val="000000">
-                              <a:alpha val="100000"/>
-                            </a:srgbClr>
-                          </a:solidFill>
-                          <a:latin typeface="Times New Roman"/>
-                          <a:ea typeface="Times New Roman"/>
-                        </a:rPr>
-                        <a:t>2</a:t>
-                      </a:r>
-                    </a:p>
-                  </a:txBody>
-                  <a:tcPr anchor="t">
-                    <a:lnL w="28575" cap="flat">
-                      <a:solidFill>
-                        <a:srgbClr val="000000">
-                          <a:alpha val="100000"/>
-                        </a:srgbClr>
-                      </a:solidFill>
-                    </a:lnL>
-                    <a:lnR w="12700" cap="flat">
-                      <a:solidFill>
-                        <a:srgbClr val="000000">
-                          <a:alpha val="100000"/>
-                        </a:srgbClr>
-                      </a:solidFill>
-                    </a:lnR>
-                    <a:lnT w="12700" cap="flat">
-                      <a:solidFill>
-                        <a:srgbClr val="000000">
-                          <a:alpha val="100000"/>
-                        </a:srgbClr>
-                      </a:solidFill>
-                    </a:lnT>
-                    <a:lnB w="28575" cap="flat">
-                      <a:solidFill>
-                        <a:srgbClr val="000000">
-                          <a:alpha val="100000"/>
-                        </a:srgbClr>
-                      </a:solidFill>
-                    </a:lnB>
-                    <a:solidFill>
-                      <a:srgbClr val="FFFFFF">
-                        <a:alpha val="100000"/>
-                      </a:srgbClr>
-                    </a:solidFill>
-                  </a:tcPr>
-                  <a:extLst>
-                    <a:ext uri="{0D108BD9-81ED-4DB2-BD59-A6C34878D82A}">
-                      <a16:rowId xmlns:a16="http://schemas.microsoft.com/office/drawing/2014/main" val="2661222183"/>
-                    </a:ext>
-                  </a:extLst>
-                </a:tc>
-                <a:tc rowSpan="1" gridSpan="1">
-                  <a:txBody>
-                    <a:bodyPr anchor="t"/>
-                    <a:lstStyle/>
-                    <a:p>
-                      <a:pPr marL="0" algn="l"/>
-                    </a:p>
-                  </a:txBody>
-                  <a:tcPr anchor="t">
-                    <a:lnL w="12700" cap="flat">
-                      <a:solidFill>
-                        <a:srgbClr val="000000">
-                          <a:alpha val="100000"/>
-                        </a:srgbClr>
-                      </a:solidFill>
-                    </a:lnL>
-                    <a:lnR w="28575" cap="flat">
-                      <a:solidFill>
-                        <a:srgbClr val="000000">
-                          <a:alpha val="100000"/>
-                        </a:srgbClr>
-                      </a:solidFill>
-                    </a:lnR>
-                    <a:lnT w="12700" cap="flat">
-                      <a:solidFill>
-                        <a:srgbClr val="000000">
-                          <a:alpha val="100000"/>
-                        </a:srgbClr>
-                      </a:solidFill>
-                    </a:lnT>
-                    <a:lnB w="28575" cap="flat">
-                      <a:solidFill>
-                        <a:srgbClr val="000000">
-                          <a:alpha val="100000"/>
-                        </a:srgbClr>
-                      </a:solidFill>
-                    </a:lnB>
-                    <a:solidFill>
-                      <a:srgbClr val="FFFFFF">
-                        <a:alpha val="100000"/>
-                      </a:srgbClr>
-                    </a:solidFill>
-                  </a:tcPr>
-                  <a:extLst>
-                    <a:ext uri="{0D108BD9-81ED-4DB2-BD59-A6C34878D82A}">
-                      <a16:rowId xmlns:a16="http://schemas.microsoft.com/office/drawing/2014/main" val="2661222183"/>
-                    </a:ext>
-                  </a:extLst>
-                </a:tc>
-                <a:tc rowSpan="1" gridSpan="1">
-                  <a:txBody>
-                    <a:bodyPr anchor="t"/>
-                    <a:lstStyle/>
-                    <a:p>
-                      <a:pPr marL="0" algn="l"/>
-                    </a:p>
-                  </a:txBody>
-                  <a:tcPr anchor="t">
-                    <a:lnL w="28575" cap="flat">
-                      <a:solidFill>
-                        <a:srgbClr val="000000">
-                          <a:alpha val="100000"/>
-                        </a:srgbClr>
-                      </a:solidFill>
-                    </a:lnL>
-                    <a:lnR w="12700" cap="flat">
-                      <a:solidFill>
-                        <a:srgbClr val="000000">
-                          <a:alpha val="100000"/>
-                        </a:srgbClr>
-                      </a:solidFill>
-                    </a:lnR>
-                    <a:lnT w="12700" cap="flat">
-                      <a:solidFill>
-                        <a:srgbClr val="000000">
-                          <a:alpha val="100000"/>
-                        </a:srgbClr>
-                      </a:solidFill>
-                    </a:lnT>
-                    <a:lnB w="28575" cap="flat">
-                      <a:solidFill>
-                        <a:srgbClr val="000000">
-                          <a:alpha val="100000"/>
-                        </a:srgbClr>
-                      </a:solidFill>
-                    </a:lnB>
-                    <a:solidFill>
-                      <a:srgbClr val="FFFFFF">
-                        <a:alpha val="100000"/>
-                      </a:srgbClr>
-                    </a:solidFill>
-                  </a:tcPr>
-                  <a:extLst>
-                    <a:ext uri="{0D108BD9-81ED-4DB2-BD59-A6C34878D82A}">
-                      <a16:rowId xmlns:a16="http://schemas.microsoft.com/office/drawing/2014/main" val="2661222183"/>
-                    </a:ext>
-                  </a:extLst>
-                </a:tc>
-                <a:tc rowSpan="1" gridSpan="1">
-                  <a:txBody>
-                    <a:bodyPr anchor="ctr"/>
-                    <a:lstStyle/>
-                    <a:p>
-                      <a:pPr marL="0" algn="ctr">
-                        <a:lnSpc>
-                          <a:spcPts val="4300"/>
-                        </a:lnSpc>
-                      </a:pPr>
-                      <a:r>
-                        <a:rPr lang="zh-CN" altLang="en-US" sz="3600" b="1" i="0" dirty="0">
-                          <a:solidFill>
-                            <a:srgbClr val="000000">
-                              <a:alpha val="100000"/>
-                            </a:srgbClr>
-                          </a:solidFill>
-                          <a:latin typeface="Times New Roman"/>
-                          <a:ea typeface="Times New Roman"/>
-                        </a:rPr>
-                        <a:t>4</a:t>
-                      </a:r>
-                    </a:p>
-                  </a:txBody>
-                  <a:tcPr anchor="ctr">
-                    <a:lnL w="12700" cap="flat">
-                      <a:solidFill>
-                        <a:srgbClr val="000000">
-                          <a:alpha val="100000"/>
-                        </a:srgbClr>
-                      </a:solidFill>
-                    </a:lnL>
-                    <a:lnR w="28575" cap="flat">
-                      <a:solidFill>
-                        <a:srgbClr val="000000">
-                          <a:alpha val="100000"/>
-                        </a:srgbClr>
-                      </a:solidFill>
-                    </a:lnR>
-                    <a:lnT w="12700" cap="flat">
-                      <a:solidFill>
-                        <a:srgbClr val="000000">
-                          <a:alpha val="100000"/>
-                        </a:srgbClr>
-                      </a:solidFill>
-                    </a:lnT>
-                    <a:lnB w="28575" cap="flat">
-                      <a:solidFill>
-                        <a:srgbClr val="000000">
-                          <a:alpha val="100000"/>
-                        </a:srgbClr>
-                      </a:solidFill>
-                    </a:lnB>
-                    <a:solidFill>
-                      <a:srgbClr val="FFFFFF">
-                        <a:alpha val="100000"/>
-                      </a:srgbClr>
-                    </a:solidFill>
-                  </a:tcPr>
-                  <a:extLst>
-                    <a:ext uri="{0D108BD9-81ED-4DB2-BD59-A6C34878D82A}">
-                      <a16:rowId xmlns:a16="http://schemas.microsoft.com/office/drawing/2014/main" val="2661222183"/>
-                    </a:ext>
-                  </a:extLst>
-                </a:tc>
-              </a:tr>
-              <a:tr h="779631">
-                <a:tc rowSpan="1" gridSpan="1">
-                  <a:txBody>
-                    <a:bodyPr anchor="ctr"/>
-                    <a:lstStyle/>
-                    <a:p>
-                      <a:pPr marL="0" algn="ctr">
-                        <a:lnSpc>
-                          <a:spcPts val="4300"/>
-                        </a:lnSpc>
-                      </a:pPr>
-                      <a:r>
-                        <a:rPr lang="zh-CN" altLang="en-US" sz="3600" b="1" i="0" dirty="0">
-                          <a:solidFill>
-                            <a:srgbClr val="000000">
-                              <a:alpha val="100000"/>
-                            </a:srgbClr>
-                          </a:solidFill>
-                          <a:latin typeface="Times New Roman"/>
-                          <a:ea typeface="Times New Roman"/>
-                        </a:rPr>
-                        <a:t>3</a:t>
-                      </a:r>
-                    </a:p>
-                  </a:txBody>
-                  <a:tcPr anchor="ctr">
-                    <a:lnL w="28575" cap="flat">
-                      <a:solidFill>
-                        <a:srgbClr val="000000">
-                          <a:alpha val="100000"/>
-                        </a:srgbClr>
-                      </a:solidFill>
-                    </a:lnL>
-                    <a:lnR w="12700" cap="flat">
-                      <a:solidFill>
-                        <a:srgbClr val="000000">
-                          <a:alpha val="100000"/>
-                        </a:srgbClr>
-                      </a:solidFill>
-                    </a:lnR>
-                    <a:lnT w="28575" cap="flat">
-                      <a:solidFill>
-                        <a:srgbClr val="000000">
-                          <a:alpha val="100000"/>
-                        </a:srgbClr>
-                      </a:solidFill>
-                    </a:lnT>
-                    <a:lnB w="12700" cap="flat">
-                      <a:solidFill>
-                        <a:srgbClr val="000000">
-                          <a:alpha val="100000"/>
-                        </a:srgbClr>
-                      </a:solidFill>
-                    </a:lnB>
-                    <a:solidFill>
-                      <a:srgbClr val="FFFFFF">
-                        <a:alpha val="100000"/>
-                      </a:srgbClr>
-                    </a:solidFill>
-                  </a:tcPr>
-                  <a:extLst>
-                    <a:ext uri="{0D108BD9-81ED-4DB2-BD59-A6C34878D82A}">
-                      <a16:rowId xmlns:a16="http://schemas.microsoft.com/office/drawing/2014/main" val="2661222183"/>
-                    </a:ext>
-                  </a:extLst>
-                </a:tc>
-                <a:tc rowSpan="1" gridSpan="1">
-                  <a:txBody>
-                    <a:bodyPr anchor="t"/>
-                    <a:lstStyle/>
-                    <a:p>
-                      <a:pPr marL="0" algn="l"/>
-                    </a:p>
-                  </a:txBody>
-                  <a:tcPr anchor="t">
-                    <a:lnL w="12700" cap="flat">
-                      <a:solidFill>
-                        <a:srgbClr val="000000">
-                          <a:alpha val="100000"/>
-                        </a:srgbClr>
-                      </a:solidFill>
-                    </a:lnL>
-                    <a:lnR w="28575" cap="flat">
-                      <a:solidFill>
-                        <a:srgbClr val="000000">
-                          <a:alpha val="100000"/>
-                        </a:srgbClr>
-                      </a:solidFill>
-                    </a:lnR>
-                    <a:lnT w="28575" cap="flat">
-                      <a:solidFill>
-                        <a:srgbClr val="000000">
-                          <a:alpha val="100000"/>
-                        </a:srgbClr>
-                      </a:solidFill>
-                    </a:lnT>
-                    <a:lnB w="12700" cap="flat">
-                      <a:solidFill>
-                        <a:srgbClr val="000000">
-                          <a:alpha val="100000"/>
-                        </a:srgbClr>
-                      </a:solidFill>
-                    </a:lnB>
-                    <a:solidFill>
-                      <a:srgbClr val="FFFFFF">
-                        <a:alpha val="100000"/>
-                      </a:srgbClr>
-                    </a:solidFill>
-                  </a:tcPr>
-                  <a:extLst>
-                    <a:ext uri="{0D108BD9-81ED-4DB2-BD59-A6C34878D82A}">
-                      <a16:rowId xmlns:a16="http://schemas.microsoft.com/office/drawing/2014/main" val="2661222183"/>
-                    </a:ext>
-                  </a:extLst>
-                </a:tc>
-                <a:tc rowSpan="1" gridSpan="1">
-                  <a:txBody>
-                    <a:bodyPr anchor="t"/>
-                    <a:lstStyle/>
-                    <a:p>
-                      <a:pPr marL="0" algn="l"/>
-                    </a:p>
-                  </a:txBody>
-                  <a:tcPr anchor="t">
-                    <a:lnL w="28575" cap="flat">
-                      <a:solidFill>
-                        <a:srgbClr val="000000">
-                          <a:alpha val="100000"/>
-                        </a:srgbClr>
-                      </a:solidFill>
-                    </a:lnL>
-                    <a:lnR w="12700" cap="flat">
-                      <a:solidFill>
-                        <a:srgbClr val="000000">
-                          <a:alpha val="100000"/>
-                        </a:srgbClr>
-                      </a:solidFill>
-                    </a:lnR>
-                    <a:lnT w="28575" cap="flat">
-                      <a:solidFill>
-                        <a:srgbClr val="000000">
-                          <a:alpha val="100000"/>
-                        </a:srgbClr>
-                      </a:solidFill>
-                    </a:lnT>
-                    <a:lnB w="12700" cap="flat">
-                      <a:solidFill>
-                        <a:srgbClr val="000000">
-                          <a:alpha val="100000"/>
-                        </a:srgbClr>
-                      </a:solidFill>
-                    </a:lnB>
-                    <a:solidFill>
-                      <a:srgbClr val="FFFFFF">
-                        <a:alpha val="100000"/>
-                      </a:srgbClr>
-                    </a:solidFill>
-                  </a:tcPr>
-                  <a:extLst>
-                    <a:ext uri="{0D108BD9-81ED-4DB2-BD59-A6C34878D82A}">
-                      <a16:rowId xmlns:a16="http://schemas.microsoft.com/office/drawing/2014/main" val="2661222183"/>
-                    </a:ext>
-                  </a:extLst>
-                </a:tc>
-                <a:tc rowSpan="1" gridSpan="1">
-                  <a:txBody>
-                    <a:bodyPr anchor="t"/>
-                    <a:lstStyle/>
-                    <a:p>
-                      <a:pPr marL="0" algn="l"/>
-                    </a:p>
-                  </a:txBody>
-                  <a:tcPr anchor="t">
-                    <a:lnL w="12700" cap="flat">
-                      <a:solidFill>
-                        <a:srgbClr val="000000">
-                          <a:alpha val="100000"/>
-                        </a:srgbClr>
-                      </a:solidFill>
-                    </a:lnL>
-                    <a:lnR w="28575" cap="flat">
-                      <a:solidFill>
-                        <a:srgbClr val="000000">
-                          <a:alpha val="100000"/>
-                        </a:srgbClr>
-                      </a:solidFill>
-                    </a:lnR>
-                    <a:lnT w="28575" cap="flat">
-                      <a:solidFill>
-                        <a:srgbClr val="000000">
-                          <a:alpha val="100000"/>
-                        </a:srgbClr>
-                      </a:solidFill>
-                    </a:lnT>
-                    <a:lnB w="12700" cap="flat">
-                      <a:solidFill>
-                        <a:srgbClr val="000000">
-                          <a:alpha val="100000"/>
-                        </a:srgbClr>
-                      </a:solidFill>
-                    </a:lnB>
-                    <a:solidFill>
-                      <a:srgbClr val="FFFFFF">
-                        <a:alpha val="100000"/>
-                      </a:srgbClr>
-                    </a:solidFill>
-                  </a:tcPr>
-                  <a:extLst>
-                    <a:ext uri="{0D108BD9-81ED-4DB2-BD59-A6C34878D82A}">
-                      <a16:rowId xmlns:a16="http://schemas.microsoft.com/office/drawing/2014/main" val="2661222183"/>
-                    </a:ext>
-                  </a:extLst>
-                </a:tc>
-              </a:tr>
-              <a:tr h="779631">
-                <a:tc rowSpan="1" gridSpan="1">
-                  <a:txBody>
-                    <a:bodyPr anchor="t"/>
-                    <a:lstStyle/>
-                    <a:p>
-                      <a:pPr marL="0" algn="l"/>
-                    </a:p>
-                  </a:txBody>
-                  <a:tcPr anchor="t">
-                    <a:lnL w="28575" cap="flat">
-                      <a:solidFill>
-                        <a:srgbClr val="000000">
-                          <a:alpha val="100000"/>
-                        </a:srgbClr>
-                      </a:solidFill>
-                    </a:lnL>
-                    <a:lnR w="12700" cap="flat">
-                      <a:solidFill>
-                        <a:srgbClr val="000000">
-                          <a:alpha val="100000"/>
-                        </a:srgbClr>
-                      </a:solidFill>
-                    </a:lnR>
-                    <a:lnT w="12700" cap="flat">
-                      <a:solidFill>
-                        <a:srgbClr val="000000">
-                          <a:alpha val="100000"/>
-                        </a:srgbClr>
-                      </a:solidFill>
-                    </a:lnT>
-                    <a:lnB w="28575" cap="flat">
-                      <a:solidFill>
-                        <a:srgbClr val="000000">
-                          <a:alpha val="100000"/>
-                        </a:srgbClr>
-                      </a:solidFill>
-                    </a:lnB>
-                    <a:solidFill>
-                      <a:srgbClr val="FFFFFF">
-                        <a:alpha val="100000"/>
-                      </a:srgbClr>
-                    </a:solidFill>
-                  </a:tcPr>
-                  <a:extLst>
-                    <a:ext uri="{0D108BD9-81ED-4DB2-BD59-A6C34878D82A}">
-                      <a16:rowId xmlns:a16="http://schemas.microsoft.com/office/drawing/2014/main" val="2661222183"/>
-                    </a:ext>
-                  </a:extLst>
-                </a:tc>
-                <a:tc rowSpan="1" gridSpan="1">
-                  <a:txBody>
-                    <a:bodyPr anchor="t"/>
-                    <a:lstStyle/>
-                    <a:p>
-                      <a:pPr marL="0" algn="l"/>
-                    </a:p>
-                  </a:txBody>
-                  <a:tcPr anchor="t">
-                    <a:lnL w="12700" cap="flat">
-                      <a:solidFill>
-                        <a:srgbClr val="000000">
-                          <a:alpha val="100000"/>
-                        </a:srgbClr>
-                      </a:solidFill>
-                    </a:lnL>
-                    <a:lnR w="28575" cap="flat">
-                      <a:solidFill>
-                        <a:srgbClr val="000000">
-                          <a:alpha val="100000"/>
-                        </a:srgbClr>
-                      </a:solidFill>
-                    </a:lnR>
-                    <a:lnT w="12700" cap="flat">
-                      <a:solidFill>
-                        <a:srgbClr val="000000">
-                          <a:alpha val="100000"/>
-                        </a:srgbClr>
-                      </a:solidFill>
-                    </a:lnT>
-                    <a:lnB w="28575" cap="flat">
-                      <a:solidFill>
-                        <a:srgbClr val="000000">
-                          <a:alpha val="100000"/>
-                        </a:srgbClr>
-                      </a:solidFill>
-                    </a:lnB>
-                    <a:solidFill>
-                      <a:srgbClr val="FFFFFF">
-                        <a:alpha val="100000"/>
-                      </a:srgbClr>
-                    </a:solidFill>
-                  </a:tcPr>
-                  <a:extLst>
-                    <a:ext uri="{0D108BD9-81ED-4DB2-BD59-A6C34878D82A}">
-                      <a16:rowId xmlns:a16="http://schemas.microsoft.com/office/drawing/2014/main" val="2661222183"/>
-                    </a:ext>
-                  </a:extLst>
-                </a:tc>
-                <a:tc rowSpan="1" gridSpan="1">
-                  <a:txBody>
-                    <a:bodyPr anchor="t"/>
-                    <a:lstStyle/>
-                    <a:p>
-                      <a:pPr marL="0" algn="l"/>
-                    </a:p>
-                  </a:txBody>
-                  <a:tcPr anchor="t">
-                    <a:lnL w="28575" cap="flat">
-                      <a:solidFill>
-                        <a:srgbClr val="000000">
-                          <a:alpha val="100000"/>
-                        </a:srgbClr>
-                      </a:solidFill>
-                    </a:lnL>
-                    <a:lnR w="12700" cap="flat">
-                      <a:solidFill>
-                        <a:srgbClr val="000000">
-                          <a:alpha val="100000"/>
-                        </a:srgbClr>
-                      </a:solidFill>
-                    </a:lnR>
-                    <a:lnT w="12700" cap="flat">
-                      <a:solidFill>
-                        <a:srgbClr val="000000">
-                          <a:alpha val="100000"/>
-                        </a:srgbClr>
-                      </a:solidFill>
-                    </a:lnT>
-                    <a:lnB w="28575" cap="flat">
-                      <a:solidFill>
-                        <a:srgbClr val="000000">
-                          <a:alpha val="100000"/>
-                        </a:srgbClr>
-                      </a:solidFill>
-                    </a:lnB>
-                    <a:solidFill>
-                      <a:srgbClr val="FFFFFF">
-                        <a:alpha val="100000"/>
-                      </a:srgbClr>
-                    </a:solidFill>
-                  </a:tcPr>
-                  <a:extLst>
-                    <a:ext uri="{0D108BD9-81ED-4DB2-BD59-A6C34878D82A}">
-                      <a16:rowId xmlns:a16="http://schemas.microsoft.com/office/drawing/2014/main" val="2661222183"/>
-                    </a:ext>
-                  </a:extLst>
-                </a:tc>
-                <a:tc rowSpan="1" gridSpan="1">
-                  <a:txBody>
-                    <a:bodyPr anchor="ctr"/>
-                    <a:lstStyle/>
-                    <a:p>
-                      <a:pPr marL="0" algn="ctr">
-                        <a:lnSpc>
-                          <a:spcPts val="4300"/>
-                        </a:lnSpc>
-                      </a:pPr>
-                      <a:r>
-                        <a:rPr lang="zh-CN" altLang="en-US" sz="3600" b="1" i="0" dirty="0">
-                          <a:solidFill>
-                            <a:srgbClr val="000000">
-                              <a:alpha val="100000"/>
-                            </a:srgbClr>
-                          </a:solidFill>
-                          <a:latin typeface="Times New Roman"/>
-                          <a:ea typeface="Times New Roman"/>
-                        </a:rPr>
-                        <a:t>2</a:t>
-                      </a:r>
-                    </a:p>
-                  </a:txBody>
-                  <a:tcPr anchor="ctr">
-                    <a:lnL w="12700" cap="flat">
-                      <a:solidFill>
-                        <a:srgbClr val="000000">
-                          <a:alpha val="100000"/>
-                        </a:srgbClr>
-                      </a:solidFill>
-                    </a:lnL>
-                    <a:lnR w="28575" cap="flat">
-                      <a:solidFill>
-                        <a:srgbClr val="000000">
-                          <a:alpha val="100000"/>
-                        </a:srgbClr>
-                      </a:solidFill>
-                    </a:lnR>
-                    <a:lnT w="12700" cap="flat">
-                      <a:solidFill>
-                        <a:srgbClr val="000000">
-                          <a:alpha val="100000"/>
-                        </a:srgbClr>
-                      </a:solidFill>
-                    </a:lnT>
-                    <a:lnB w="28575" cap="flat">
-                      <a:solidFill>
-                        <a:srgbClr val="000000">
-                          <a:alpha val="100000"/>
-                        </a:srgbClr>
-                      </a:solidFill>
-                    </a:lnB>
-                    <a:solidFill>
-                      <a:srgbClr val="FFFFFF">
-                        <a:alpha val="100000"/>
-                      </a:srgbClr>
-                    </a:solidFill>
-                  </a:tcPr>
-                  <a:extLst>
-                    <a:ext uri="{0D108BD9-81ED-4DB2-BD59-A6C34878D82A}">
-                      <a16:rowId xmlns:a16="http://schemas.microsoft.com/office/drawing/2014/main" val="2661222183"/>
-                    </a:ext>
-                  </a:extLst>
-                </a:tc>
-              </a:tr>
-            </a:tbl>
-          </a:graphicData>
-        </a:graphic>
-      </p:graphicFrame>
     </p:spTree>
     <p:extLst>
       <p:ext uri="{BB962C8B-B14F-4D97-AF65-F5344CB8AC3E}">
@@ -10635,182 +9371,6 @@
   <p:clrMapOvr>
     <a:masterClrMapping/>
   </p:clrMapOvr>
-  <p:timing>
-    <p:tnLst>
-      <p:par>
-        <p:cTn id="1" dur="indefinite" restart="never" nodeType="tmRoot">
-          <p:childTnLst>
-            <p:seq concurrent="1" nextAc="seek">
-              <p:cTn id="2" dur="indefinite" nodeType="mainSeq">
-                <p:childTnLst>
-                  <p:par>
-                    <p:cTn id="6" fill="hold">
-                      <p:stCondLst>
-                        <p:cond delay="indefinite"/>
-                      </p:stCondLst>
-                      <p:childTnLst>
-                        <p:par>
-                          <p:cTn id="7" fill="hold">
-                            <p:stCondLst>
-                              <p:cond delay="0"/>
-                            </p:stCondLst>
-                            <p:childTnLst>
-                              <p:par>
-                                <p:cTn id="5" presetID="10" presetClass="entr" presetSubtype="0" fill="hold" grpId="0" nodeType="clickEffect">
-                                  <p:stCondLst>
-                                    <p:cond delay="0"/>
-                                  </p:stCondLst>
-                                  <p:childTnLst>
-                                    <p:set>
-                                      <p:cBhvr>
-                                        <p:cTn id="3" dur="1" fill="hold">
-                                          <p:stCondLst>
-                                            <p:cond delay="0"/>
-                                          </p:stCondLst>
-                                        </p:cTn>
-                                        <p:tgtEl>
-                                          <p:spTgt spid="7"/>
-                                        </p:tgtEl>
-                                        <p:attrNameLst>
-                                          <p:attrName>style.visibility</p:attrName>
-                                        </p:attrNameLst>
-                                      </p:cBhvr>
-                                      <p:to>
-                                        <p:strVal val="visible"/>
-                                      </p:to>
-                                    </p:set>
-                                    <p:animEffect transition="in" filter="fade">
-                                      <p:cBhvr>
-                                        <p:cTn id="4" dur="1"/>
-                                        <p:tgtEl>
-                                          <p:spTgt spid="7"/>
-                                        </p:tgtEl>
-                                      </p:cBhvr>
-                                    </p:animEffect>
-                                  </p:childTnLst>
-                                </p:cTn>
-                              </p:par>
-                            </p:childTnLst>
-                          </p:cTn>
-                        </p:par>
-                      </p:childTnLst>
-                    </p:cTn>
-                  </p:par>
-                  <p:par>
-                    <p:cTn id="11" fill="hold">
-                      <p:stCondLst>
-                        <p:cond delay="indefinite"/>
-                      </p:stCondLst>
-                      <p:childTnLst>
-                        <p:par>
-                          <p:cTn id="12" fill="hold">
-                            <p:stCondLst>
-                              <p:cond delay="0"/>
-                            </p:stCondLst>
-                            <p:childTnLst>
-                              <p:par>
-                                <p:cTn id="10" presetID="10" presetClass="entr" presetSubtype="0" fill="hold" grpId="0" nodeType="clickEffect">
-                                  <p:stCondLst>
-                                    <p:cond delay="0"/>
-                                  </p:stCondLst>
-                                  <p:childTnLst>
-                                    <p:set>
-                                      <p:cBhvr>
-                                        <p:cTn id="8" dur="1" fill="hold">
-                                          <p:stCondLst>
-                                            <p:cond delay="0"/>
-                                          </p:stCondLst>
-                                        </p:cTn>
-                                        <p:tgtEl>
-                                          <p:spTgt spid="11"/>
-                                        </p:tgtEl>
-                                        <p:attrNameLst>
-                                          <p:attrName>style.visibility</p:attrName>
-                                        </p:attrNameLst>
-                                      </p:cBhvr>
-                                      <p:to>
-                                        <p:strVal val="visible"/>
-                                      </p:to>
-                                    </p:set>
-                                    <p:animEffect transition="in" filter="fade">
-                                      <p:cBhvr>
-                                        <p:cTn id="9" dur="1"/>
-                                        <p:tgtEl>
-                                          <p:spTgt spid="11"/>
-                                        </p:tgtEl>
-                                      </p:cBhvr>
-                                    </p:animEffect>
-                                  </p:childTnLst>
-                                </p:cTn>
-                              </p:par>
-                              <p:par>
-                                <p:cTn id="15" presetID="10" presetClass="entr" presetSubtype="0" fill="hold" grpId="0" nodeType="clickEffect">
-                                  <p:stCondLst>
-                                    <p:cond delay="0"/>
-                                  </p:stCondLst>
-                                  <p:childTnLst>
-                                    <p:set>
-                                      <p:cBhvr>
-                                        <p:cTn id="13" dur="1" fill="hold">
-                                          <p:stCondLst>
-                                            <p:cond delay="0"/>
-                                          </p:stCondLst>
-                                        </p:cTn>
-                                        <p:tgtEl>
-                                          <p:spTgt spid="14"/>
-                                        </p:tgtEl>
-                                        <p:attrNameLst>
-                                          <p:attrName>style.visibility</p:attrName>
-                                        </p:attrNameLst>
-                                      </p:cBhvr>
-                                      <p:to>
-                                        <p:strVal val="visible"/>
-                                      </p:to>
-                                    </p:set>
-                                    <p:animEffect transition="in" filter="fade">
-                                      <p:cBhvr>
-                                        <p:cTn id="14" dur="300"/>
-                                        <p:tgtEl>
-                                          <p:spTgt spid="14"/>
-                                        </p:tgtEl>
-                                      </p:cBhvr>
-                                    </p:animEffect>
-                                  </p:childTnLst>
-                                </p:cTn>
-                              </p:par>
-                            </p:childTnLst>
-                          </p:cTn>
-                        </p:par>
-                      </p:childTnLst>
-                    </p:cTn>
-                  </p:par>
-                </p:childTnLst>
-              </p:cTn>
-              <p:prevCondLst>
-                <p:cond evt="onPrev" delay="0">
-                  <p:tgtEl>
-                    <p:sldTgt/>
-                  </p:tgtEl>
-                </p:cond>
-              </p:prevCondLst>
-              <p:nextCondLst>
-                <p:cond evt="onNext" delay="0">
-                  <p:tgtEl>
-                    <p:sldTgt/>
-                  </p:tgtEl>
-                </p:cond>
-              </p:nextCondLst>
-            </p:seq>
-          </p:childTnLst>
-        </p:cTn>
-      </p:par>
-    </p:tnLst>
-    <p:bldLst>
-      <p:bldP spid="7" grpId="0" animBg="1"/>
-      <p:bldP spid="11" grpId="0" animBg="1"/>
-      <p:bldP spid="14" grpId="0" animBg="1"/>
-    </p:bldLst>
-  </p:timing>
 </p:sld>
 </file>
 

--- a/docs/教学/实习/汇报课-二年级下-数独游戏/数独游戏.pptx
+++ b/docs/教学/实习/汇报课-二年级下-数独游戏/数独游戏.pptx
@@ -12,7 +12,6 @@
     <p:sldId id="260" r:id="rId10"/>
     <p:sldId id="261" r:id="rId11"/>
     <p:sldId id="262" r:id="rId12"/>
-    <p:sldId id="263" r:id="rId13"/>
   </p:sldIdLst>
   <p:sldSz cx="12192000" cy="6858000"/>
   <p:notesSz cx="6858000" cy="9144000"/>
@@ -329,36 +328,6 @@
 </p:sldLayout>
 </file>
 
-<file path=ppt/slideLayouts/slideLayout8.xml><?xml version="1.0" encoding="utf-8"?>
-<p:sldLayout xmlns:p14="http://schemas.microsoft.com/office/powerpoint/2010/main" xmlns:a="http://schemas.openxmlformats.org/drawingml/2006/main" xmlns:r="http://schemas.openxmlformats.org/officeDocument/2006/relationships" xmlns:p="http://schemas.openxmlformats.org/presentationml/2006/main" preserve="1" userDrawn="1">
-  <p:cSld name="标题幻灯片">
-    <p:spTree>
-      <p:nvGrpSpPr>
-        <p:cNvPr id="1" name=""/>
-        <p:cNvGrpSpPr/>
-        <p:nvPr/>
-      </p:nvGrpSpPr>
-      <p:grpSpPr>
-        <a:xfrm>
-          <a:off x="0" y="0"/>
-          <a:ext cx="0" cy="0"/>
-          <a:chOff x="0" y="0"/>
-          <a:chExt cx="0" cy="0"/>
-        </a:xfrm>
-      </p:grpSpPr>
-    </p:spTree>
-    <p:extLst>
-      <p:ext uri="{BB962C8B-B14F-4D97-AF65-F5344CB8AC3E}">
-        <p14:creationId xmlns:p14="http://schemas.microsoft.com/office/powerpoint/2010/main" val="2723191420"/>
-      </p:ext>
-    </p:extLst>
-  </p:cSld>
-  <p:clrMapOvr>
-    <a:masterClrMapping/>
-  </p:clrMapOvr>
-</p:sldLayout>
-</file>
-
 <file path=ppt/slideMasters/slideMaster1.xml><?xml version="1.0" encoding="utf-8"?>
 <p:sldMaster xmlns:p14="http://schemas.microsoft.com/office/powerpoint/2010/main" xmlns:a="http://schemas.openxmlformats.org/drawingml/2006/main" xmlns:r="http://schemas.openxmlformats.org/officeDocument/2006/relationships" xmlns:p="http://schemas.openxmlformats.org/presentationml/2006/main">
   <p:cSld>
@@ -397,7 +366,6 @@
     <p:sldLayoutId id="2147483653" r:id="rId6"/>
     <p:sldLayoutId id="2147483654" r:id="rId7"/>
     <p:sldLayoutId id="2147483655" r:id="rId8"/>
-    <p:sldLayoutId id="2147483656" r:id="rId9"/>
   </p:sldLayoutIdLst>
   <p:txStyles>
     <p:titleStyle>
@@ -1407,7 +1375,7 @@
           <a:p>
             <a:pPr marL="0" algn="ctr">
               <a:lnSpc>
-                <a:spcPts val="4800"/>
+                <a:spcPts val="4400"/>
               </a:lnSpc>
             </a:pPr>
             <a:r>
@@ -1417,8 +1385,8 @@
                     <a:alpha val="100000"/>
                   </a:srgbClr>
                 </a:solidFill>
-                <a:latin typeface="微软雅黑"/>
-                <a:ea typeface="微软雅黑"/>
+                <a:latin typeface="Aa偷吃可爱长大的"/>
+                <a:ea typeface="Aa偷吃可爱长大的"/>
               </a:rPr>
               <a:t>游戏导入</a:t>
             </a:r>
@@ -1434,7 +1402,7 @@
         <p:spPr>
           <a:xfrm>
             <a:off x="781600" y="1219230"/>
-            <a:ext cx="10757674" cy="1471300"/>
+            <a:ext cx="10757674" cy="1515681"/>
           </a:xfrm>
           <a:prstGeom prst="rect">
             <a:avLst/>
@@ -1447,7 +1415,7 @@
           <a:p>
             <a:pPr marL="0" algn="l">
               <a:lnSpc>
-                <a:spcPts val="4800"/>
+                <a:spcPts val="5200"/>
               </a:lnSpc>
             </a:pPr>
             <a:r>
@@ -1457,8 +1425,8 @@
                     <a:alpha val="100000"/>
                   </a:srgbClr>
                 </a:solidFill>
-                <a:latin typeface="楷体"/>
-                <a:ea typeface="楷体"/>
+                <a:latin typeface="Aa偷吃可爱长大的"/>
+                <a:ea typeface="Aa偷吃可爱长大的"/>
               </a:rPr>
               <a:t>规则：下面的方格中只能填</a:t>
             </a:r>
@@ -1469,8 +1437,8 @@
                     <a:alpha val="100000"/>
                   </a:srgbClr>
                 </a:solidFill>
-                <a:latin typeface="楷体"/>
-                <a:ea typeface="楷体"/>
+                <a:latin typeface="Aa偷吃可爱长大的"/>
+                <a:ea typeface="Aa偷吃可爱长大的"/>
               </a:rPr>
               <a:t>1~4</a:t>
             </a:r>
@@ -1481,8 +1449,8 @@
                     <a:alpha val="100000"/>
                   </a:srgbClr>
                 </a:solidFill>
-                <a:latin typeface="楷体"/>
-                <a:ea typeface="楷体"/>
+                <a:latin typeface="Aa偷吃可爱长大的"/>
+                <a:ea typeface="Aa偷吃可爱长大的"/>
               </a:rPr>
               <a:t>这四个数，每个数只能用一次。</a:t>
             </a:r>
@@ -2578,9 +2546,9 @@
         <p:grpSpPr>
           <a:xfrm>
             <a:off x="4423308" y="4554501"/>
-            <a:ext cx="5043488" cy="729134"/>
+            <a:ext cx="5043488" cy="768979"/>
             <a:chOff x="0" y="0"/>
-            <a:chExt cx="5043488" cy="729134"/>
+            <a:chExt cx="5043488" cy="768979"/>
           </a:xfrm>
         </p:grpSpPr>
         <p:sp>
@@ -2628,7 +2596,7 @@
           <p:spPr>
             <a:xfrm>
               <a:off x="5134" y="0"/>
-              <a:ext cx="5038354" cy="729134"/>
+              <a:ext cx="5038354" cy="768979"/>
             </a:xfrm>
             <a:prstGeom prst="rect">
               <a:avLst/>
@@ -2641,7 +2609,7 @@
             <a:p>
               <a:pPr marL="0" algn="l">
                 <a:lnSpc>
-                  <a:spcPts val="4200"/>
+                  <a:spcPts val="4500"/>
                 </a:lnSpc>
               </a:pPr>
               <a:r>
@@ -2651,8 +2619,8 @@
                       <a:alpha val="100000"/>
                     </a:srgbClr>
                   </a:solidFill>
-                  <a:latin typeface="楷体"/>
-                  <a:ea typeface="楷体"/>
+                  <a:latin typeface="Aa偷吃可爱长大的"/>
+                  <a:ea typeface="Aa偷吃可爱长大的"/>
                 </a:rPr>
                 <a:t>哪个选项A只有一个可能？</a:t>
               </a:r>
@@ -2864,7 +2832,7 @@
         </p:grpSpPr>
         <p:sp>
           <p:nvSpPr>
-            <p:cNvPr id="5" name="形状3"/>
+            <p:cNvPr id="5" name="形状7"/>
             <p:cNvSpPr txBox="1"/>
             <p:nvPr/>
           </p:nvSpPr>
@@ -2897,7 +2865,7 @@
         </p:sp>
         <p:sp>
           <p:nvSpPr>
-            <p:cNvPr id="6" name="形状4"/>
+            <p:cNvPr id="6" name="形状8"/>
             <p:cNvSpPr txBox="1"/>
             <p:nvPr/>
           </p:nvSpPr>
@@ -2930,39 +2898,9 @@
           </p:txBody>
         </p:sp>
       </p:grpSp>
-      <p:pic>
-        <p:nvPicPr>
-          <p:cNvPr id="7" name="图片2">
-            <a:extLst>
-              <a:ext uri="{FF2B5EF4-FFF2-40B4-BE49-F238E27FC236}">
-                <a16:creationId xmlns:a16="http://schemas.microsoft.com/office/drawing/2014/main" id="{69ED34C6-1862-8A8A-03F9-2D1EFC8C3215}"/>
-              </a:ext>
-            </a:extLst>
-          </p:cNvPr>
-          <p:cNvPicPr>
-            <a:picLocks noChangeAspect="1"/>
-          </p:cNvPicPr>
-          <p:nvPr/>
-        </p:nvPicPr>
-        <p:blipFill>
-          <a:blip r:embed="rId3"/>
-          <a:stretch>
-            <a:fillRect/>
-          </a:stretch>
-        </p:blipFill>
-        <p:spPr>
-          <a:xfrm rot="20628928">
-            <a:off x="6842525" y="-97654"/>
-            <a:ext cx="1056178" cy="1069464"/>
-          </a:xfrm>
-          <a:prstGeom prst="rect">
-            <a:avLst/>
-          </a:prstGeom>
-        </p:spPr>
-      </p:pic>
       <p:sp>
         <p:nvSpPr>
-          <p:cNvPr id="8" name="形状2"/>
+          <p:cNvPr id="7" name="形状2"/>
           <p:cNvSpPr txBox="1"/>
           <p:nvPr/>
         </p:nvSpPr>
@@ -2996,54 +2934,113 @@
       </p:sp>
       <p:sp>
         <p:nvSpPr>
-          <p:cNvPr id="9" name="文本1"/>
+          <p:cNvPr id="8" name="形状3"/>
           <p:cNvSpPr txBox="1"/>
           <p:nvPr/>
         </p:nvSpPr>
         <p:spPr>
           <a:xfrm>
-            <a:off x="4596959" y="195449"/>
-            <a:ext cx="3180963" cy="898386"/>
+            <a:off x="10394269" y="3429080"/>
+            <a:ext cx="720000" cy="720000"/>
           </a:xfrm>
-          <a:prstGeom prst="rect">
-            <a:avLst/>
-          </a:prstGeom>
-          <a:noFill/>
+          <a:prstGeom prst="rect"/>
+          <a:solidFill>
+            <a:srgbClr val="9900FF">
+              <a:alpha val="74901"/>
+            </a:srgbClr>
+          </a:solidFill>
+          <a:ln w="9525">
+            <a:solidFill>
+              <a:srgbClr val="FFFFFF">
+                <a:alpha val="0"/>
+              </a:srgbClr>
+            </a:solidFill>
+          </a:ln>
         </p:spPr>
         <p:txBody>
-          <a:bodyPr anchor="t"/>
+          <a:bodyPr anchor="ctr"/>
           <a:lstStyle/>
           <a:p>
-            <a:pPr marL="0" algn="ctr">
-              <a:lnSpc>
-                <a:spcPts val="4800"/>
-              </a:lnSpc>
-            </a:pPr>
-            <a:r>
-              <a:rPr lang="zh-CN" altLang="en-US" sz="4000" b="1" i="0" dirty="0">
-                <a:solidFill>
-                  <a:srgbClr val="000000">
-                    <a:alpha val="100000"/>
-                  </a:srgbClr>
-                </a:solidFill>
-                <a:latin typeface="微软雅黑"/>
-                <a:ea typeface="微软雅黑"/>
-              </a:rPr>
-              <a:t>游戏导入</a:t>
-            </a:r>
+            <a:pPr marL="0" algn="ctr"/>
           </a:p>
         </p:txBody>
       </p:sp>
       <p:sp>
         <p:nvSpPr>
-          <p:cNvPr id="10" name="文本2"/>
+          <p:cNvPr id="9" name="形状4"/>
           <p:cNvSpPr txBox="1"/>
           <p:nvPr/>
         </p:nvSpPr>
         <p:spPr>
           <a:xfrm>
-            <a:off x="716823" y="980323"/>
-            <a:ext cx="6395228" cy="2534249"/>
+            <a:off x="8232780" y="1989080"/>
+            <a:ext cx="2880000" cy="720000"/>
+          </a:xfrm>
+          <a:prstGeom prst="rect"/>
+          <a:solidFill>
+            <a:srgbClr val="22C0C4">
+              <a:alpha val="74901"/>
+            </a:srgbClr>
+          </a:solidFill>
+          <a:ln w="9525">
+            <a:solidFill>
+              <a:srgbClr val="FFFFFF">
+                <a:alpha val="0"/>
+              </a:srgbClr>
+            </a:solidFill>
+          </a:ln>
+        </p:spPr>
+        <p:txBody>
+          <a:bodyPr anchor="ctr"/>
+          <a:lstStyle/>
+          <a:p>
+            <a:pPr marL="0" algn="ctr"/>
+          </a:p>
+        </p:txBody>
+      </p:sp>
+      <p:sp>
+        <p:nvSpPr>
+          <p:cNvPr id="10" name="形状5"/>
+          <p:cNvSpPr txBox="1"/>
+          <p:nvPr/>
+        </p:nvSpPr>
+        <p:spPr>
+          <a:xfrm rot="5400000">
+            <a:off x="7873897" y="2348921"/>
+            <a:ext cx="2880000" cy="720000"/>
+          </a:xfrm>
+          <a:prstGeom prst="rect"/>
+          <a:solidFill>
+            <a:srgbClr val="FFF2CC">
+              <a:alpha val="74901"/>
+            </a:srgbClr>
+          </a:solidFill>
+          <a:ln w="9525">
+            <a:solidFill>
+              <a:srgbClr val="FFFFFF">
+                <a:alpha val="0"/>
+              </a:srgbClr>
+            </a:solidFill>
+          </a:ln>
+        </p:spPr>
+        <p:txBody>
+          <a:bodyPr anchor="ctr"/>
+          <a:lstStyle/>
+          <a:p>
+            <a:pPr marL="0" algn="ctr"/>
+          </a:p>
+        </p:txBody>
+      </p:sp>
+      <p:sp>
+        <p:nvSpPr>
+          <p:cNvPr id="11" name="文本2"/>
+          <p:cNvSpPr txBox="1"/>
+          <p:nvPr/>
+        </p:nvSpPr>
+        <p:spPr>
+          <a:xfrm>
+            <a:off x="588280" y="899304"/>
+            <a:ext cx="7535316" cy="2829530"/>
           </a:xfrm>
           <a:prstGeom prst="rect">
             <a:avLst/>
@@ -3056,75 +3053,27 @@
           <a:p>
             <a:pPr marL="0" algn="l">
               <a:lnSpc>
-                <a:spcPts val="6000"/>
+                <a:spcPts val="6900"/>
               </a:lnSpc>
             </a:pPr>
             <a:r>
-              <a:rPr lang="zh-CN" altLang="en-US" sz="3399" b="1" i="0" dirty="0">
+              <a:rPr lang="zh-CN" altLang="en-US" sz="3600" b="0" i="0" dirty="0">
                 <a:solidFill>
                   <a:srgbClr val="231F20">
                     <a:alpha val="100000"/>
                   </a:srgbClr>
                 </a:solidFill>
-                <a:latin typeface="楷体"/>
-                <a:ea typeface="楷体"/>
+                <a:latin typeface="Aa偷吃可爱长大的"/>
+                <a:ea typeface="Aa偷吃可爱长大的"/>
               </a:rPr>
-              <a:t>用</a:t>
-            </a:r>
-            <a:r>
-              <a:rPr lang="zh-CN" altLang="en-US" sz="3399" b="1" i="0" dirty="0">
-                <a:solidFill>
-                  <a:srgbClr val="231F20">
-                    <a:alpha val="100000"/>
-                  </a:srgbClr>
-                </a:solidFill>
-                <a:latin typeface="Times New Roman"/>
-                <a:ea typeface="Times New Roman"/>
-              </a:rPr>
-              <a:t>1~3</a:t>
-            </a:r>
-            <a:r>
-              <a:rPr lang="zh-CN" altLang="en-US" sz="3399" b="1" i="0" dirty="0">
-                <a:solidFill>
-                  <a:srgbClr val="231F20">
-                    <a:alpha val="100000"/>
-                  </a:srgbClr>
-                </a:solidFill>
-                <a:latin typeface="楷体"/>
-                <a:ea typeface="楷体"/>
-              </a:rPr>
-              <a:t>填满右边的的方格，要使每行、每列以及都要用到</a:t>
-            </a:r>
-            <a:r>
-              <a:rPr lang="zh-CN" altLang="en-US" sz="3399" b="1" i="0" dirty="0">
-                <a:solidFill>
-                  <a:srgbClr val="231F20">
-                    <a:alpha val="100000"/>
-                  </a:srgbClr>
-                </a:solidFill>
-                <a:latin typeface="Times New Roman"/>
-                <a:ea typeface="Times New Roman"/>
-              </a:rPr>
-              <a:t>1~3</a:t>
-            </a:r>
-            <a:r>
-              <a:rPr lang="zh-CN" altLang="en-US" sz="3399" b="1" i="0" dirty="0">
-                <a:solidFill>
-                  <a:srgbClr val="231F20">
-                    <a:alpha val="100000"/>
-                  </a:srgbClr>
-                </a:solidFill>
-                <a:latin typeface="楷体"/>
-                <a:ea typeface="楷体"/>
-              </a:rPr>
-              <a:t>，且不能重复。</a:t>
+              <a:t>        用1~4填满右边的方格，要使每行、每列以及每个          （宫）都要用到1~4，且不能重复。</a:t>
             </a:r>
           </a:p>
         </p:txBody>
       </p:sp>
       <p:graphicFrame>
         <p:nvGraphicFramePr>
-          <p:cNvPr id="11" name="表格1">
+          <p:cNvPr id="12" name="表格1">
             <a:extLst>
               <a:ext uri="{FF2B5EF4-FFF2-40B4-BE49-F238E27FC236}">
                 <a16:creationId xmlns:a16="http://schemas.microsoft.com/office/drawing/2014/main" id="{62B2FBE6-5C8C-E811-489E-1440CA960B7D}"/>
@@ -3143,8 +3092,8 @@
           </p:nvPr>
         </p:nvGraphicFramePr>
         <p:xfrm>
-          <a:off x="7414492" y="1752752"/>
-          <a:ext cx="3142405" cy="2910325"/>
+          <a:off x="4569836" y="1890807"/>
+          <a:ext cx="936000" cy="936000"/>
         </p:xfrm>
         <a:graphic>
           <a:graphicData uri="http://schemas.openxmlformats.org/drawingml/2006/table">
@@ -3153,29 +3102,286 @@
                 <a:tableStyleId>{5C22544A-7EE6-4342-B048-85BDC9FD1C3A}</a:tableStyleId>
               </a:tblPr>
               <a:tblGrid>
-                <a:gridCol w="1064774">
+                <a:gridCol w="468000">
                   <a:extLst>
                     <a:ext uri="{9D8B030D-6E8A-4147-A177-3AD203B41FA5}">
                       <a16:colId xmlns:a16="http://schemas.microsoft.com/office/drawing/2014/main" val="2854172943"/>
                     </a:ext>
                   </a:extLst>
                 </a:gridCol>
-                <a:gridCol w="1021510">
+                <a:gridCol w="468000">
                   <a:extLst>
                     <a:ext uri="{9D8B030D-6E8A-4147-A177-3AD203B41FA5}">
                       <a16:colId xmlns:a16="http://schemas.microsoft.com/office/drawing/2014/main" val="2854172943"/>
                     </a:ext>
                   </a:extLst>
                 </a:gridCol>
-                <a:gridCol w="1056121">
+              </a:tblGrid>
+              <a:tr h="468000">
+                <a:tc rowSpan="1" gridSpan="1">
+                  <a:txBody>
+                    <a:bodyPr anchor="t"/>
+                    <a:lstStyle/>
+                    <a:p>
+                      <a:pPr marL="0" algn="l"/>
+                    </a:p>
+                  </a:txBody>
+                  <a:tcPr anchor="t">
+                    <a:lnL w="19050" cap="flat">
+                      <a:solidFill>
+                        <a:srgbClr val="000000">
+                          <a:alpha val="100000"/>
+                        </a:srgbClr>
+                      </a:solidFill>
+                    </a:lnL>
+                    <a:lnR w="12700" cap="flat">
+                      <a:solidFill>
+                        <a:srgbClr val="000000">
+                          <a:alpha val="100000"/>
+                        </a:srgbClr>
+                      </a:solidFill>
+                    </a:lnR>
+                    <a:lnT w="19050" cap="flat">
+                      <a:solidFill>
+                        <a:srgbClr val="000000">
+                          <a:alpha val="100000"/>
+                        </a:srgbClr>
+                      </a:solidFill>
+                    </a:lnT>
+                    <a:lnB w="12700" cap="flat">
+                      <a:solidFill>
+                        <a:srgbClr val="000000">
+                          <a:alpha val="100000"/>
+                        </a:srgbClr>
+                      </a:solidFill>
+                    </a:lnB>
+                    <a:solidFill>
+                      <a:srgbClr val="FFFFFF">
+                        <a:alpha val="100000"/>
+                      </a:srgbClr>
+                    </a:solidFill>
+                  </a:tcPr>
+                  <a:extLst>
+                    <a:ext uri="{0D108BD9-81ED-4DB2-BD59-A6C34878D82A}">
+                      <a16:rowId xmlns:a16="http://schemas.microsoft.com/office/drawing/2014/main" val="2661222183"/>
+                    </a:ext>
+                  </a:extLst>
+                </a:tc>
+                <a:tc rowSpan="1" gridSpan="1">
+                  <a:txBody>
+                    <a:bodyPr anchor="t"/>
+                    <a:lstStyle/>
+                    <a:p>
+                      <a:pPr marL="0" algn="l"/>
+                    </a:p>
+                  </a:txBody>
+                  <a:tcPr anchor="t">
+                    <a:lnL w="12700" cap="flat">
+                      <a:solidFill>
+                        <a:srgbClr val="000000">
+                          <a:alpha val="100000"/>
+                        </a:srgbClr>
+                      </a:solidFill>
+                    </a:lnL>
+                    <a:lnR w="19050" cap="flat">
+                      <a:solidFill>
+                        <a:srgbClr val="000000">
+                          <a:alpha val="100000"/>
+                        </a:srgbClr>
+                      </a:solidFill>
+                    </a:lnR>
+                    <a:lnT w="19050" cap="flat">
+                      <a:solidFill>
+                        <a:srgbClr val="000000">
+                          <a:alpha val="100000"/>
+                        </a:srgbClr>
+                      </a:solidFill>
+                    </a:lnT>
+                    <a:lnB w="12700" cap="flat">
+                      <a:solidFill>
+                        <a:srgbClr val="000000">
+                          <a:alpha val="100000"/>
+                        </a:srgbClr>
+                      </a:solidFill>
+                    </a:lnB>
+                    <a:solidFill>
+                      <a:srgbClr val="FFFFFF">
+                        <a:alpha val="100000"/>
+                      </a:srgbClr>
+                    </a:solidFill>
+                  </a:tcPr>
+                  <a:extLst>
+                    <a:ext uri="{0D108BD9-81ED-4DB2-BD59-A6C34878D82A}">
+                      <a16:rowId xmlns:a16="http://schemas.microsoft.com/office/drawing/2014/main" val="2661222183"/>
+                    </a:ext>
+                  </a:extLst>
+                </a:tc>
+              </a:tr>
+              <a:tr h="468000">
+                <a:tc rowSpan="1" gridSpan="1">
+                  <a:txBody>
+                    <a:bodyPr anchor="t"/>
+                    <a:lstStyle/>
+                    <a:p>
+                      <a:pPr marL="0" algn="l"/>
+                    </a:p>
+                  </a:txBody>
+                  <a:tcPr anchor="t">
+                    <a:lnL w="19050" cap="flat">
+                      <a:solidFill>
+                        <a:srgbClr val="000000">
+                          <a:alpha val="100000"/>
+                        </a:srgbClr>
+                      </a:solidFill>
+                    </a:lnL>
+                    <a:lnR w="12700" cap="flat">
+                      <a:solidFill>
+                        <a:srgbClr val="000000">
+                          <a:alpha val="100000"/>
+                        </a:srgbClr>
+                      </a:solidFill>
+                    </a:lnR>
+                    <a:lnT w="12700" cap="flat">
+                      <a:solidFill>
+                        <a:srgbClr val="000000">
+                          <a:alpha val="100000"/>
+                        </a:srgbClr>
+                      </a:solidFill>
+                    </a:lnT>
+                    <a:lnB w="19050" cap="flat">
+                      <a:solidFill>
+                        <a:srgbClr val="000000">
+                          <a:alpha val="100000"/>
+                        </a:srgbClr>
+                      </a:solidFill>
+                    </a:lnB>
+                    <a:solidFill>
+                      <a:srgbClr val="FFFFFF">
+                        <a:alpha val="100000"/>
+                      </a:srgbClr>
+                    </a:solidFill>
+                  </a:tcPr>
+                  <a:extLst>
+                    <a:ext uri="{0D108BD9-81ED-4DB2-BD59-A6C34878D82A}">
+                      <a16:rowId xmlns:a16="http://schemas.microsoft.com/office/drawing/2014/main" val="2661222183"/>
+                    </a:ext>
+                  </a:extLst>
+                </a:tc>
+                <a:tc rowSpan="1" gridSpan="1">
+                  <a:txBody>
+                    <a:bodyPr anchor="t"/>
+                    <a:lstStyle/>
+                    <a:p>
+                      <a:pPr marL="0" algn="l"/>
+                    </a:p>
+                  </a:txBody>
+                  <a:tcPr anchor="t">
+                    <a:lnL w="12700" cap="flat">
+                      <a:solidFill>
+                        <a:srgbClr val="000000">
+                          <a:alpha val="100000"/>
+                        </a:srgbClr>
+                      </a:solidFill>
+                    </a:lnL>
+                    <a:lnR w="19050" cap="flat">
+                      <a:solidFill>
+                        <a:srgbClr val="000000">
+                          <a:alpha val="100000"/>
+                        </a:srgbClr>
+                      </a:solidFill>
+                    </a:lnR>
+                    <a:lnT w="12700" cap="flat">
+                      <a:solidFill>
+                        <a:srgbClr val="000000">
+                          <a:alpha val="100000"/>
+                        </a:srgbClr>
+                      </a:solidFill>
+                    </a:lnT>
+                    <a:lnB w="19050" cap="flat">
+                      <a:solidFill>
+                        <a:srgbClr val="000000">
+                          <a:alpha val="100000"/>
+                        </a:srgbClr>
+                      </a:solidFill>
+                    </a:lnB>
+                    <a:solidFill>
+                      <a:srgbClr val="FFFFFF">
+                        <a:alpha val="100000"/>
+                      </a:srgbClr>
+                    </a:solidFill>
+                  </a:tcPr>
+                  <a:extLst>
+                    <a:ext uri="{0D108BD9-81ED-4DB2-BD59-A6C34878D82A}">
+                      <a16:rowId xmlns:a16="http://schemas.microsoft.com/office/drawing/2014/main" val="2661222183"/>
+                    </a:ext>
+                  </a:extLst>
+                </a:tc>
+              </a:tr>
+            </a:tbl>
+          </a:graphicData>
+        </a:graphic>
+      </p:graphicFrame>
+      <p:graphicFrame>
+        <p:nvGraphicFramePr>
+          <p:cNvPr id="13" name="表格2">
+            <a:extLst>
+              <a:ext uri="{FF2B5EF4-FFF2-40B4-BE49-F238E27FC236}">
+                <a16:creationId xmlns:a16="http://schemas.microsoft.com/office/drawing/2014/main" id="{62B2FBE6-5C8C-E811-489E-1440CA960B7D}"/>
+              </a:ext>
+            </a:extLst>
+          </p:cNvPr>
+          <p:cNvGraphicFramePr>
+            <a:graphicFrameLocks noGrp="1"/>
+          </p:cNvGraphicFramePr>
+          <p:nvPr>
+            <p:extLst>
+              <p:ext uri="{D42A27DB-BD31-4B8C-83A1-F6EECF244321}">
+                <p14:modId xmlns:p14="http://schemas.microsoft.com/office/powerpoint/2010/main" val="3345567701"/>
+              </p:ext>
+            </p:extLst>
+          </p:nvPr>
+        </p:nvGraphicFramePr>
+        <p:xfrm>
+          <a:off x="8233525" y="1269080"/>
+          <a:ext cx="2880000" cy="2880000"/>
+        </p:xfrm>
+        <a:graphic>
+          <a:graphicData uri="http://schemas.openxmlformats.org/drawingml/2006/table">
+            <a:tbl>
+              <a:tblPr firstRow="1" bandRow="1">
+                <a:tableStyleId>{5C22544A-7EE6-4342-B048-85BDC9FD1C3A}</a:tableStyleId>
+              </a:tblPr>
+              <a:tblGrid>
+                <a:gridCol w="720000">
                   <a:extLst>
                     <a:ext uri="{9D8B030D-6E8A-4147-A177-3AD203B41FA5}">
                       <a16:colId xmlns:a16="http://schemas.microsoft.com/office/drawing/2014/main" val="2854172943"/>
                     </a:ext>
                   </a:extLst>
                 </a:gridCol>
+                <a:gridCol w="720000">
+                  <a:extLst>
+                    <a:ext uri="{9D8B030D-6E8A-4147-A177-3AD203B41FA5}">
+                      <a16:colId xmlns:a16="http://schemas.microsoft.com/office/drawing/2014/main" val="2854172943"/>
+                    </a:ext>
+                  </a:extLst>
+                </a:gridCol>
+                <a:gridCol w="720000">
+                  <a:extLst>
+                    <a:ext uri="{9D8B030D-6E8A-4147-A177-3AD203B41FA5}">
+                      <a16:colId xmlns:a16="http://schemas.microsoft.com/office/drawing/2014/main" val="2854172943"/>
+                    </a:ext>
+                  </a:extLst>
+                </a:gridCol>
+                <a:gridCol w="720000">
+                  <a:extLst>
+                    <a:ext uri="{9D8B030D-6E8A-4147-A177-3AD203B41FA5}">
+                      <a16:colId xmlns:a16="http://schemas.microsoft.com/office/drawing/2014/main" val="2854172943"/>
+                    </a:ext>
+                  </a:extLst>
+                </a:gridCol>
               </a:tblGrid>
-              <a:tr h="986006">
+              <a:tr h="720000">
                 <a:tc rowSpan="1" gridSpan="1">
                   <a:txBody>
                     <a:bodyPr anchor="ctr"/>
@@ -3201,28 +3407,28 @@
                     </a:p>
                   </a:txBody>
                   <a:tcPr anchor="ctr">
-                    <a:lnL w="19050" cap="flat">
+                    <a:lnL w="28575" cap="flat">
                       <a:solidFill>
                         <a:srgbClr val="000000">
                           <a:alpha val="100000"/>
                         </a:srgbClr>
                       </a:solidFill>
                     </a:lnL>
-                    <a:lnR w="19050" cap="flat">
+                    <a:lnR w="12700" cap="flat">
                       <a:solidFill>
                         <a:srgbClr val="000000">
                           <a:alpha val="100000"/>
                         </a:srgbClr>
                       </a:solidFill>
                     </a:lnR>
-                    <a:lnT w="19050" cap="flat">
+                    <a:lnT w="28575" cap="flat">
                       <a:solidFill>
                         <a:srgbClr val="000000">
                           <a:alpha val="100000"/>
                         </a:srgbClr>
                       </a:solidFill>
                     </a:lnT>
-                    <a:lnB w="19050" cap="flat">
+                    <a:lnB w="12700" cap="flat">
                       <a:solidFill>
                         <a:srgbClr val="000000">
                           <a:alpha val="100000"/>
@@ -3231,7 +3437,7 @@
                     </a:lnB>
                     <a:solidFill>
                       <a:srgbClr val="FFFFFF">
-                        <a:alpha val="100000"/>
+                        <a:alpha val="0"/>
                       </a:srgbClr>
                     </a:solidFill>
                   </a:tcPr>
@@ -3250,28 +3456,28 @@
                     </a:p>
                   </a:txBody>
                   <a:tcPr anchor="t">
-                    <a:lnL w="19050" cap="flat">
+                    <a:lnL w="12700" cap="flat">
                       <a:solidFill>
                         <a:srgbClr val="000000">
                           <a:alpha val="100000"/>
                         </a:srgbClr>
                       </a:solidFill>
                     </a:lnL>
-                    <a:lnR w="19050" cap="flat">
+                    <a:lnR w="28575" cap="flat">
                       <a:solidFill>
                         <a:srgbClr val="000000">
                           <a:alpha val="100000"/>
                         </a:srgbClr>
                       </a:solidFill>
                     </a:lnR>
-                    <a:lnT w="19050" cap="flat">
+                    <a:lnT w="28575" cap="flat">
                       <a:solidFill>
                         <a:srgbClr val="000000">
                           <a:alpha val="100000"/>
                         </a:srgbClr>
                       </a:solidFill>
                     </a:lnT>
-                    <a:lnB w="19050" cap="flat">
+                    <a:lnB w="12700" cap="flat">
                       <a:solidFill>
                         <a:srgbClr val="000000">
                           <a:alpha val="100000"/>
@@ -3280,7 +3486,7 @@
                     </a:lnB>
                     <a:solidFill>
                       <a:srgbClr val="FFFFFF">
-                        <a:alpha val="100000"/>
+                        <a:alpha val="0"/>
                       </a:srgbClr>
                     </a:solidFill>
                   </a:tcPr>
@@ -3299,28 +3505,28 @@
                     </a:p>
                   </a:txBody>
                   <a:tcPr anchor="t">
-                    <a:lnL w="19050" cap="flat">
+                    <a:lnL w="28575" cap="flat">
                       <a:solidFill>
                         <a:srgbClr val="000000">
                           <a:alpha val="100000"/>
                         </a:srgbClr>
                       </a:solidFill>
                     </a:lnL>
-                    <a:lnR w="19050" cap="flat">
+                    <a:lnR w="12700" cap="flat">
                       <a:solidFill>
                         <a:srgbClr val="000000">
                           <a:alpha val="100000"/>
                         </a:srgbClr>
                       </a:solidFill>
                     </a:lnR>
-                    <a:lnT w="19050" cap="flat">
+                    <a:lnT w="28575" cap="flat">
                       <a:solidFill>
                         <a:srgbClr val="000000">
                           <a:alpha val="100000"/>
                         </a:srgbClr>
                       </a:solidFill>
                     </a:lnT>
-                    <a:lnB w="19050" cap="flat">
+                    <a:lnB w="12700" cap="flat">
                       <a:solidFill>
                         <a:srgbClr val="000000">
                           <a:alpha val="100000"/>
@@ -3329,58 +3535,7 @@
                     </a:lnB>
                     <a:solidFill>
                       <a:srgbClr val="FFFFFF">
-                        <a:alpha val="100000"/>
-                      </a:srgbClr>
-                    </a:solidFill>
-                  </a:tcPr>
-                  <a:extLst>
-                    <a:ext uri="{0D108BD9-81ED-4DB2-BD59-A6C34878D82A}">
-                      <a16:rowId xmlns:a16="http://schemas.microsoft.com/office/drawing/2014/main" val="2661222183"/>
-                    </a:ext>
-                  </a:extLst>
-                </a:tc>
-              </a:tr>
-              <a:tr h="938313">
-                <a:tc rowSpan="1" gridSpan="1">
-                  <a:txBody>
-                    <a:bodyPr anchor="t"/>
-                    <a:lstStyle/>
-                    <a:p>
-                      <a:pPr marL="0" algn="ctr"/>
-                    </a:p>
-                  </a:txBody>
-                  <a:tcPr anchor="t">
-                    <a:lnL w="19050" cap="flat">
-                      <a:solidFill>
-                        <a:srgbClr val="000000">
-                          <a:alpha val="100000"/>
-                        </a:srgbClr>
-                      </a:solidFill>
-                    </a:lnL>
-                    <a:lnR w="19050" cap="flat">
-                      <a:solidFill>
-                        <a:srgbClr val="000000">
-                          <a:alpha val="100000"/>
-                        </a:srgbClr>
-                      </a:solidFill>
-                    </a:lnR>
-                    <a:lnT w="19050" cap="flat">
-                      <a:solidFill>
-                        <a:srgbClr val="000000">
-                          <a:alpha val="100000"/>
-                        </a:srgbClr>
-                      </a:solidFill>
-                    </a:lnT>
-                    <a:lnB w="19050" cap="flat">
-                      <a:solidFill>
-                        <a:srgbClr val="000000">
-                          <a:alpha val="100000"/>
-                        </a:srgbClr>
-                      </a:solidFill>
-                    </a:lnB>
-                    <a:solidFill>
-                      <a:srgbClr val="FFFFFF">
-                        <a:alpha val="100000"/>
+                        <a:alpha val="0"/>
                       </a:srgbClr>
                     </a:solidFill>
                   </a:tcPr>
@@ -3399,28 +3554,28 @@
                     </a:p>
                   </a:txBody>
                   <a:tcPr anchor="t">
-                    <a:lnL w="19050" cap="flat">
+                    <a:lnL w="12700" cap="flat">
                       <a:solidFill>
                         <a:srgbClr val="000000">
                           <a:alpha val="100000"/>
                         </a:srgbClr>
                       </a:solidFill>
                     </a:lnL>
-                    <a:lnR w="19050" cap="flat">
+                    <a:lnR w="28575" cap="flat">
                       <a:solidFill>
                         <a:srgbClr val="000000">
                           <a:alpha val="100000"/>
                         </a:srgbClr>
                       </a:solidFill>
                     </a:lnR>
-                    <a:lnT w="19050" cap="flat">
+                    <a:lnT w="28575" cap="flat">
                       <a:solidFill>
                         <a:srgbClr val="000000">
                           <a:alpha val="100000"/>
                         </a:srgbClr>
                       </a:solidFill>
                     </a:lnT>
-                    <a:lnB w="19050" cap="flat">
+                    <a:lnB w="12700" cap="flat">
                       <a:solidFill>
                         <a:srgbClr val="000000">
                           <a:alpha val="100000"/>
@@ -3429,7 +3584,584 @@
                     </a:lnB>
                     <a:solidFill>
                       <a:srgbClr val="FFFFFF">
-                        <a:alpha val="100000"/>
+                        <a:alpha val="0"/>
+                      </a:srgbClr>
+                    </a:solidFill>
+                  </a:tcPr>
+                  <a:extLst>
+                    <a:ext uri="{0D108BD9-81ED-4DB2-BD59-A6C34878D82A}">
+                      <a16:rowId xmlns:a16="http://schemas.microsoft.com/office/drawing/2014/main" val="2661222183"/>
+                    </a:ext>
+                  </a:extLst>
+                </a:tc>
+              </a:tr>
+              <a:tr h="720000">
+                <a:tc rowSpan="1" gridSpan="1">
+                  <a:txBody>
+                    <a:bodyPr anchor="t"/>
+                    <a:lstStyle/>
+                    <a:p>
+                      <a:pPr marL="0" algn="l"/>
+                    </a:p>
+                  </a:txBody>
+                  <a:tcPr anchor="t">
+                    <a:lnL w="28575" cap="flat">
+                      <a:solidFill>
+                        <a:srgbClr val="000000">
+                          <a:alpha val="100000"/>
+                        </a:srgbClr>
+                      </a:solidFill>
+                    </a:lnL>
+                    <a:lnR w="12700" cap="flat">
+                      <a:solidFill>
+                        <a:srgbClr val="000000">
+                          <a:alpha val="100000"/>
+                        </a:srgbClr>
+                      </a:solidFill>
+                    </a:lnR>
+                    <a:lnT w="12700" cap="flat">
+                      <a:solidFill>
+                        <a:srgbClr val="000000">
+                          <a:alpha val="100000"/>
+                        </a:srgbClr>
+                      </a:solidFill>
+                    </a:lnT>
+                    <a:lnB w="28575" cap="flat">
+                      <a:solidFill>
+                        <a:srgbClr val="000000">
+                          <a:alpha val="100000"/>
+                        </a:srgbClr>
+                      </a:solidFill>
+                    </a:lnB>
+                    <a:solidFill>
+                      <a:srgbClr val="FFFFFF">
+                        <a:alpha val="0"/>
+                      </a:srgbClr>
+                    </a:solidFill>
+                  </a:tcPr>
+                  <a:extLst>
+                    <a:ext uri="{0D108BD9-81ED-4DB2-BD59-A6C34878D82A}">
+                      <a16:rowId xmlns:a16="http://schemas.microsoft.com/office/drawing/2014/main" val="2661222183"/>
+                    </a:ext>
+                  </a:extLst>
+                </a:tc>
+                <a:tc rowSpan="1" gridSpan="1">
+                  <a:txBody>
+                    <a:bodyPr anchor="t"/>
+                    <a:lstStyle/>
+                    <a:p>
+                      <a:pPr marL="0" algn="l"/>
+                    </a:p>
+                  </a:txBody>
+                  <a:tcPr anchor="t">
+                    <a:lnL w="12700" cap="flat">
+                      <a:solidFill>
+                        <a:srgbClr val="000000">
+                          <a:alpha val="100000"/>
+                        </a:srgbClr>
+                      </a:solidFill>
+                    </a:lnL>
+                    <a:lnR w="28575" cap="flat">
+                      <a:solidFill>
+                        <a:srgbClr val="000000">
+                          <a:alpha val="100000"/>
+                        </a:srgbClr>
+                      </a:solidFill>
+                    </a:lnR>
+                    <a:lnT w="12700" cap="flat">
+                      <a:solidFill>
+                        <a:srgbClr val="000000">
+                          <a:alpha val="100000"/>
+                        </a:srgbClr>
+                      </a:solidFill>
+                    </a:lnT>
+                    <a:lnB w="28575" cap="flat">
+                      <a:solidFill>
+                        <a:srgbClr val="000000">
+                          <a:alpha val="100000"/>
+                        </a:srgbClr>
+                      </a:solidFill>
+                    </a:lnB>
+                    <a:solidFill>
+                      <a:srgbClr val="FFFFFF">
+                        <a:alpha val="0"/>
+                      </a:srgbClr>
+                    </a:solidFill>
+                  </a:tcPr>
+                  <a:extLst>
+                    <a:ext uri="{0D108BD9-81ED-4DB2-BD59-A6C34878D82A}">
+                      <a16:rowId xmlns:a16="http://schemas.microsoft.com/office/drawing/2014/main" val="2661222183"/>
+                    </a:ext>
+                  </a:extLst>
+                </a:tc>
+                <a:tc rowSpan="1" gridSpan="1">
+                  <a:txBody>
+                    <a:bodyPr anchor="t"/>
+                    <a:lstStyle/>
+                    <a:p>
+                      <a:pPr marL="0" algn="l"/>
+                    </a:p>
+                  </a:txBody>
+                  <a:tcPr anchor="t">
+                    <a:lnL w="28575" cap="flat">
+                      <a:solidFill>
+                        <a:srgbClr val="000000">
+                          <a:alpha val="100000"/>
+                        </a:srgbClr>
+                      </a:solidFill>
+                    </a:lnL>
+                    <a:lnR w="12700" cap="flat">
+                      <a:solidFill>
+                        <a:srgbClr val="000000">
+                          <a:alpha val="100000"/>
+                        </a:srgbClr>
+                      </a:solidFill>
+                    </a:lnR>
+                    <a:lnT w="12700" cap="flat">
+                      <a:solidFill>
+                        <a:srgbClr val="000000">
+                          <a:alpha val="100000"/>
+                        </a:srgbClr>
+                      </a:solidFill>
+                    </a:lnT>
+                    <a:lnB w="28575" cap="flat">
+                      <a:solidFill>
+                        <a:srgbClr val="000000">
+                          <a:alpha val="100000"/>
+                        </a:srgbClr>
+                      </a:solidFill>
+                    </a:lnB>
+                    <a:solidFill>
+                      <a:srgbClr val="FFFFFF">
+                        <a:alpha val="0"/>
+                      </a:srgbClr>
+                    </a:solidFill>
+                  </a:tcPr>
+                  <a:extLst>
+                    <a:ext uri="{0D108BD9-81ED-4DB2-BD59-A6C34878D82A}">
+                      <a16:rowId xmlns:a16="http://schemas.microsoft.com/office/drawing/2014/main" val="2661222183"/>
+                    </a:ext>
+                  </a:extLst>
+                </a:tc>
+                <a:tc rowSpan="1" gridSpan="1">
+                  <a:txBody>
+                    <a:bodyPr anchor="ctr"/>
+                    <a:lstStyle/>
+                    <a:p>
+                      <a:pPr marL="0" algn="ctr">
+                        <a:lnSpc>
+                          <a:spcPts val="4300"/>
+                        </a:lnSpc>
+                      </a:pPr>
+                      <a:r>
+                        <a:rPr lang="zh-CN" altLang="en-US" sz="3600" b="1" i="0" dirty="0">
+                          <a:solidFill>
+                            <a:srgbClr val="000000">
+                              <a:alpha val="100000"/>
+                            </a:srgbClr>
+                          </a:solidFill>
+                          <a:latin typeface="Times New Roman"/>
+                          <a:ea typeface="Times New Roman"/>
+                        </a:rPr>
+                        <a:t>4</a:t>
+                      </a:r>
+                    </a:p>
+                  </a:txBody>
+                  <a:tcPr anchor="ctr">
+                    <a:lnL w="12700" cap="flat">
+                      <a:solidFill>
+                        <a:srgbClr val="000000">
+                          <a:alpha val="100000"/>
+                        </a:srgbClr>
+                      </a:solidFill>
+                    </a:lnL>
+                    <a:lnR w="28575" cap="flat">
+                      <a:solidFill>
+                        <a:srgbClr val="000000">
+                          <a:alpha val="100000"/>
+                        </a:srgbClr>
+                      </a:solidFill>
+                    </a:lnR>
+                    <a:lnT w="12700" cap="flat">
+                      <a:solidFill>
+                        <a:srgbClr val="000000">
+                          <a:alpha val="100000"/>
+                        </a:srgbClr>
+                      </a:solidFill>
+                    </a:lnT>
+                    <a:lnB w="28575" cap="flat">
+                      <a:solidFill>
+                        <a:srgbClr val="000000">
+                          <a:alpha val="100000"/>
+                        </a:srgbClr>
+                      </a:solidFill>
+                    </a:lnB>
+                    <a:solidFill>
+                      <a:srgbClr val="FFFFFF">
+                        <a:alpha val="0"/>
+                      </a:srgbClr>
+                    </a:solidFill>
+                  </a:tcPr>
+                  <a:extLst>
+                    <a:ext uri="{0D108BD9-81ED-4DB2-BD59-A6C34878D82A}">
+                      <a16:rowId xmlns:a16="http://schemas.microsoft.com/office/drawing/2014/main" val="2661222183"/>
+                    </a:ext>
+                  </a:extLst>
+                </a:tc>
+              </a:tr>
+              <a:tr h="720000">
+                <a:tc rowSpan="1" gridSpan="1">
+                  <a:txBody>
+                    <a:bodyPr anchor="ctr"/>
+                    <a:lstStyle/>
+                    <a:p>
+                      <a:pPr marL="0" algn="ctr">
+                        <a:lnSpc>
+                          <a:spcPts val="4300"/>
+                        </a:lnSpc>
+                      </a:pPr>
+                      <a:r>
+                        <a:rPr lang="zh-CN" altLang="en-US" sz="3600" b="1" i="0" dirty="0">
+                          <a:solidFill>
+                            <a:srgbClr val="000000">
+                              <a:alpha val="100000"/>
+                            </a:srgbClr>
+                          </a:solidFill>
+                          <a:latin typeface="Times New Roman"/>
+                          <a:ea typeface="Times New Roman"/>
+                        </a:rPr>
+                        <a:t>3</a:t>
+                      </a:r>
+                    </a:p>
+                  </a:txBody>
+                  <a:tcPr anchor="ctr">
+                    <a:lnL w="28575" cap="flat">
+                      <a:solidFill>
+                        <a:srgbClr val="000000">
+                          <a:alpha val="100000"/>
+                        </a:srgbClr>
+                      </a:solidFill>
+                    </a:lnL>
+                    <a:lnR w="12700" cap="flat">
+                      <a:solidFill>
+                        <a:srgbClr val="000000">
+                          <a:alpha val="100000"/>
+                        </a:srgbClr>
+                      </a:solidFill>
+                    </a:lnR>
+                    <a:lnT w="28575" cap="flat">
+                      <a:solidFill>
+                        <a:srgbClr val="000000">
+                          <a:alpha val="100000"/>
+                        </a:srgbClr>
+                      </a:solidFill>
+                    </a:lnT>
+                    <a:lnB w="12700" cap="flat">
+                      <a:solidFill>
+                        <a:srgbClr val="000000">
+                          <a:alpha val="100000"/>
+                        </a:srgbClr>
+                      </a:solidFill>
+                    </a:lnB>
+                    <a:solidFill>
+                      <a:srgbClr val="FFFFFF">
+                        <a:alpha val="0"/>
+                      </a:srgbClr>
+                    </a:solidFill>
+                  </a:tcPr>
+                  <a:extLst>
+                    <a:ext uri="{0D108BD9-81ED-4DB2-BD59-A6C34878D82A}">
+                      <a16:rowId xmlns:a16="http://schemas.microsoft.com/office/drawing/2014/main" val="2661222183"/>
+                    </a:ext>
+                  </a:extLst>
+                </a:tc>
+                <a:tc rowSpan="1" gridSpan="1">
+                  <a:txBody>
+                    <a:bodyPr anchor="t"/>
+                    <a:lstStyle/>
+                    <a:p>
+                      <a:pPr marL="0" algn="l"/>
+                    </a:p>
+                  </a:txBody>
+                  <a:tcPr anchor="t">
+                    <a:lnL w="12700" cap="flat">
+                      <a:solidFill>
+                        <a:srgbClr val="000000">
+                          <a:alpha val="100000"/>
+                        </a:srgbClr>
+                      </a:solidFill>
+                    </a:lnL>
+                    <a:lnR w="28575" cap="flat">
+                      <a:solidFill>
+                        <a:srgbClr val="000000">
+                          <a:alpha val="100000"/>
+                        </a:srgbClr>
+                      </a:solidFill>
+                    </a:lnR>
+                    <a:lnT w="28575" cap="flat">
+                      <a:solidFill>
+                        <a:srgbClr val="000000">
+                          <a:alpha val="100000"/>
+                        </a:srgbClr>
+                      </a:solidFill>
+                    </a:lnT>
+                    <a:lnB w="12700" cap="flat">
+                      <a:solidFill>
+                        <a:srgbClr val="000000">
+                          <a:alpha val="100000"/>
+                        </a:srgbClr>
+                      </a:solidFill>
+                    </a:lnB>
+                    <a:solidFill>
+                      <a:srgbClr val="FFFFFF">
+                        <a:alpha val="0"/>
+                      </a:srgbClr>
+                    </a:solidFill>
+                  </a:tcPr>
+                  <a:extLst>
+                    <a:ext uri="{0D108BD9-81ED-4DB2-BD59-A6C34878D82A}">
+                      <a16:rowId xmlns:a16="http://schemas.microsoft.com/office/drawing/2014/main" val="2661222183"/>
+                    </a:ext>
+                  </a:extLst>
+                </a:tc>
+                <a:tc rowSpan="1" gridSpan="1">
+                  <a:txBody>
+                    <a:bodyPr anchor="t"/>
+                    <a:lstStyle/>
+                    <a:p>
+                      <a:pPr marL="0" algn="l"/>
+                    </a:p>
+                  </a:txBody>
+                  <a:tcPr anchor="t">
+                    <a:lnL w="28575" cap="flat">
+                      <a:solidFill>
+                        <a:srgbClr val="000000">
+                          <a:alpha val="100000"/>
+                        </a:srgbClr>
+                      </a:solidFill>
+                    </a:lnL>
+                    <a:lnR w="12700" cap="flat">
+                      <a:solidFill>
+                        <a:srgbClr val="000000">
+                          <a:alpha val="100000"/>
+                        </a:srgbClr>
+                      </a:solidFill>
+                    </a:lnR>
+                    <a:lnT w="28575" cap="flat">
+                      <a:solidFill>
+                        <a:srgbClr val="000000">
+                          <a:alpha val="100000"/>
+                        </a:srgbClr>
+                      </a:solidFill>
+                    </a:lnT>
+                    <a:lnB w="12700" cap="flat">
+                      <a:solidFill>
+                        <a:srgbClr val="000000">
+                          <a:alpha val="100000"/>
+                        </a:srgbClr>
+                      </a:solidFill>
+                    </a:lnB>
+                    <a:solidFill>
+                      <a:srgbClr val="FFFFFF">
+                        <a:alpha val="0"/>
+                      </a:srgbClr>
+                    </a:solidFill>
+                  </a:tcPr>
+                  <a:extLst>
+                    <a:ext uri="{0D108BD9-81ED-4DB2-BD59-A6C34878D82A}">
+                      <a16:rowId xmlns:a16="http://schemas.microsoft.com/office/drawing/2014/main" val="2661222183"/>
+                    </a:ext>
+                  </a:extLst>
+                </a:tc>
+                <a:tc rowSpan="1" gridSpan="1">
+                  <a:txBody>
+                    <a:bodyPr anchor="t"/>
+                    <a:lstStyle/>
+                    <a:p>
+                      <a:pPr marL="0" algn="l"/>
+                    </a:p>
+                  </a:txBody>
+                  <a:tcPr anchor="t">
+                    <a:lnL w="12700" cap="flat">
+                      <a:solidFill>
+                        <a:srgbClr val="000000">
+                          <a:alpha val="100000"/>
+                        </a:srgbClr>
+                      </a:solidFill>
+                    </a:lnL>
+                    <a:lnR w="28575" cap="flat">
+                      <a:solidFill>
+                        <a:srgbClr val="000000">
+                          <a:alpha val="100000"/>
+                        </a:srgbClr>
+                      </a:solidFill>
+                    </a:lnR>
+                    <a:lnT w="28575" cap="flat">
+                      <a:solidFill>
+                        <a:srgbClr val="000000">
+                          <a:alpha val="100000"/>
+                        </a:srgbClr>
+                      </a:solidFill>
+                    </a:lnT>
+                    <a:lnB w="12700" cap="flat">
+                      <a:solidFill>
+                        <a:srgbClr val="000000">
+                          <a:alpha val="100000"/>
+                        </a:srgbClr>
+                      </a:solidFill>
+                    </a:lnB>
+                    <a:solidFill>
+                      <a:srgbClr val="FFFFFF">
+                        <a:alpha val="0"/>
+                      </a:srgbClr>
+                    </a:solidFill>
+                  </a:tcPr>
+                  <a:extLst>
+                    <a:ext uri="{0D108BD9-81ED-4DB2-BD59-A6C34878D82A}">
+                      <a16:rowId xmlns:a16="http://schemas.microsoft.com/office/drawing/2014/main" val="2661222183"/>
+                    </a:ext>
+                  </a:extLst>
+                </a:tc>
+              </a:tr>
+              <a:tr h="720000">
+                <a:tc rowSpan="1" gridSpan="1">
+                  <a:txBody>
+                    <a:bodyPr anchor="t"/>
+                    <a:lstStyle/>
+                    <a:p>
+                      <a:pPr marL="0" algn="l"/>
+                    </a:p>
+                  </a:txBody>
+                  <a:tcPr anchor="t">
+                    <a:lnL w="28575" cap="flat">
+                      <a:solidFill>
+                        <a:srgbClr val="000000">
+                          <a:alpha val="100000"/>
+                        </a:srgbClr>
+                      </a:solidFill>
+                    </a:lnL>
+                    <a:lnR w="12700" cap="flat">
+                      <a:solidFill>
+                        <a:srgbClr val="000000">
+                          <a:alpha val="100000"/>
+                        </a:srgbClr>
+                      </a:solidFill>
+                    </a:lnR>
+                    <a:lnT w="12700" cap="flat">
+                      <a:solidFill>
+                        <a:srgbClr val="000000">
+                          <a:alpha val="100000"/>
+                        </a:srgbClr>
+                      </a:solidFill>
+                    </a:lnT>
+                    <a:lnB w="28575" cap="flat">
+                      <a:solidFill>
+                        <a:srgbClr val="000000">
+                          <a:alpha val="100000"/>
+                        </a:srgbClr>
+                      </a:solidFill>
+                    </a:lnB>
+                    <a:solidFill>
+                      <a:srgbClr val="FFFFFF">
+                        <a:alpha val="0"/>
+                      </a:srgbClr>
+                    </a:solidFill>
+                  </a:tcPr>
+                  <a:extLst>
+                    <a:ext uri="{0D108BD9-81ED-4DB2-BD59-A6C34878D82A}">
+                      <a16:rowId xmlns:a16="http://schemas.microsoft.com/office/drawing/2014/main" val="2661222183"/>
+                    </a:ext>
+                  </a:extLst>
+                </a:tc>
+                <a:tc rowSpan="1" gridSpan="1">
+                  <a:txBody>
+                    <a:bodyPr anchor="t"/>
+                    <a:lstStyle/>
+                    <a:p>
+                      <a:pPr marL="0" algn="l"/>
+                    </a:p>
+                  </a:txBody>
+                  <a:tcPr anchor="t">
+                    <a:lnL w="12700" cap="flat">
+                      <a:solidFill>
+                        <a:srgbClr val="000000">
+                          <a:alpha val="100000"/>
+                        </a:srgbClr>
+                      </a:solidFill>
+                    </a:lnL>
+                    <a:lnR w="28575" cap="flat">
+                      <a:solidFill>
+                        <a:srgbClr val="000000">
+                          <a:alpha val="100000"/>
+                        </a:srgbClr>
+                      </a:solidFill>
+                    </a:lnR>
+                    <a:lnT w="12700" cap="flat">
+                      <a:solidFill>
+                        <a:srgbClr val="000000">
+                          <a:alpha val="100000"/>
+                        </a:srgbClr>
+                      </a:solidFill>
+                    </a:lnT>
+                    <a:lnB w="28575" cap="flat">
+                      <a:solidFill>
+                        <a:srgbClr val="000000">
+                          <a:alpha val="100000"/>
+                        </a:srgbClr>
+                      </a:solidFill>
+                    </a:lnB>
+                    <a:solidFill>
+                      <a:srgbClr val="FFFFFF">
+                        <a:alpha val="0"/>
+                      </a:srgbClr>
+                    </a:solidFill>
+                  </a:tcPr>
+                  <a:extLst>
+                    <a:ext uri="{0D108BD9-81ED-4DB2-BD59-A6C34878D82A}">
+                      <a16:rowId xmlns:a16="http://schemas.microsoft.com/office/drawing/2014/main" val="2661222183"/>
+                    </a:ext>
+                  </a:extLst>
+                </a:tc>
+                <a:tc rowSpan="1" gridSpan="1">
+                  <a:txBody>
+                    <a:bodyPr anchor="t"/>
+                    <a:lstStyle/>
+                    <a:p>
+                      <a:pPr marL="0" algn="l"/>
+                    </a:p>
+                  </a:txBody>
+                  <a:tcPr anchor="t">
+                    <a:lnL w="28575" cap="flat">
+                      <a:solidFill>
+                        <a:srgbClr val="000000">
+                          <a:alpha val="100000"/>
+                        </a:srgbClr>
+                      </a:solidFill>
+                    </a:lnL>
+                    <a:lnR w="12700" cap="flat">
+                      <a:solidFill>
+                        <a:srgbClr val="000000">
+                          <a:alpha val="100000"/>
+                        </a:srgbClr>
+                      </a:solidFill>
+                    </a:lnR>
+                    <a:lnT w="12700" cap="flat">
+                      <a:solidFill>
+                        <a:srgbClr val="000000">
+                          <a:alpha val="100000"/>
+                        </a:srgbClr>
+                      </a:solidFill>
+                    </a:lnT>
+                    <a:lnB w="28575" cap="flat">
+                      <a:solidFill>
+                        <a:srgbClr val="000000">
+                          <a:alpha val="100000"/>
+                        </a:srgbClr>
+                      </a:solidFill>
+                    </a:lnB>
+                    <a:solidFill>
+                      <a:srgbClr val="FFFFFF">
+                        <a:alpha val="0"/>
                       </a:srgbClr>
                     </a:solidFill>
                   </a:tcPr>
@@ -3464,28 +4196,28 @@
                     </a:p>
                   </a:txBody>
                   <a:tcPr anchor="ctr">
-                    <a:lnL w="19050" cap="flat">
+                    <a:lnL w="12700" cap="flat">
                       <a:solidFill>
                         <a:srgbClr val="000000">
                           <a:alpha val="100000"/>
                         </a:srgbClr>
                       </a:solidFill>
                     </a:lnL>
-                    <a:lnR w="19050" cap="flat">
+                    <a:lnR w="28575" cap="flat">
                       <a:solidFill>
                         <a:srgbClr val="000000">
                           <a:alpha val="100000"/>
                         </a:srgbClr>
                       </a:solidFill>
                     </a:lnR>
-                    <a:lnT w="19050" cap="flat">
+                    <a:lnT w="12700" cap="flat">
                       <a:solidFill>
                         <a:srgbClr val="000000">
                           <a:alpha val="100000"/>
                         </a:srgbClr>
                       </a:solidFill>
                     </a:lnT>
-                    <a:lnB w="19050" cap="flat">
+                    <a:lnB w="28575" cap="flat">
                       <a:solidFill>
                         <a:srgbClr val="000000">
                           <a:alpha val="100000"/>
@@ -3494,393 +4226,6 @@
                     </a:lnB>
                     <a:solidFill>
                       <a:srgbClr val="FFFFFF">
-                        <a:alpha val="100000"/>
-                      </a:srgbClr>
-                    </a:solidFill>
-                  </a:tcPr>
-                  <a:extLst>
-                    <a:ext uri="{0D108BD9-81ED-4DB2-BD59-A6C34878D82A}">
-                      <a16:rowId xmlns:a16="http://schemas.microsoft.com/office/drawing/2014/main" val="2661222183"/>
-                    </a:ext>
-                  </a:extLst>
-                </a:tc>
-              </a:tr>
-              <a:tr h="986006">
-                <a:tc rowSpan="1" gridSpan="1">
-                  <a:txBody>
-                    <a:bodyPr anchor="ctr"/>
-                    <a:lstStyle/>
-                    <a:p>
-                      <a:pPr marL="0" algn="ctr">
-                        <a:lnSpc>
-                          <a:spcPts val="4300"/>
-                        </a:lnSpc>
-                      </a:pPr>
-                      <a:r>
-                        <a:rPr lang="zh-CN" altLang="en-US" sz="3600" b="1" i="0" dirty="0">
-                          <a:solidFill>
-                            <a:srgbClr val="000000">
-                              <a:alpha val="100000"/>
-                            </a:srgbClr>
-                          </a:solidFill>
-                          <a:latin typeface="Times New Roman"/>
-                          <a:ea typeface="Times New Roman"/>
-                        </a:rPr>
-                        <a:t>3</a:t>
-                      </a:r>
-                    </a:p>
-                  </a:txBody>
-                  <a:tcPr anchor="ctr">
-                    <a:lnL w="19050" cap="flat">
-                      <a:solidFill>
-                        <a:srgbClr val="000000">
-                          <a:alpha val="100000"/>
-                        </a:srgbClr>
-                      </a:solidFill>
-                    </a:lnL>
-                    <a:lnR w="19050" cap="flat">
-                      <a:solidFill>
-                        <a:srgbClr val="000000">
-                          <a:alpha val="100000"/>
-                        </a:srgbClr>
-                      </a:solidFill>
-                    </a:lnR>
-                    <a:lnT w="19050" cap="flat">
-                      <a:solidFill>
-                        <a:srgbClr val="000000">
-                          <a:alpha val="100000"/>
-                        </a:srgbClr>
-                      </a:solidFill>
-                    </a:lnT>
-                    <a:lnB w="19050" cap="flat">
-                      <a:solidFill>
-                        <a:srgbClr val="000000">
-                          <a:alpha val="100000"/>
-                        </a:srgbClr>
-                      </a:solidFill>
-                    </a:lnB>
-                    <a:solidFill>
-                      <a:srgbClr val="FFFFFF">
-                        <a:alpha val="100000"/>
-                      </a:srgbClr>
-                    </a:solidFill>
-                  </a:tcPr>
-                  <a:extLst>
-                    <a:ext uri="{0D108BD9-81ED-4DB2-BD59-A6C34878D82A}">
-                      <a16:rowId xmlns:a16="http://schemas.microsoft.com/office/drawing/2014/main" val="2661222183"/>
-                    </a:ext>
-                  </a:extLst>
-                </a:tc>
-                <a:tc rowSpan="1" gridSpan="1">
-                  <a:txBody>
-                    <a:bodyPr anchor="t"/>
-                    <a:lstStyle/>
-                    <a:p>
-                      <a:pPr marL="0" algn="l"/>
-                    </a:p>
-                  </a:txBody>
-                  <a:tcPr anchor="t">
-                    <a:lnL w="19050" cap="flat">
-                      <a:solidFill>
-                        <a:srgbClr val="000000">
-                          <a:alpha val="100000"/>
-                        </a:srgbClr>
-                      </a:solidFill>
-                    </a:lnL>
-                    <a:lnR w="19050" cap="flat">
-                      <a:solidFill>
-                        <a:srgbClr val="000000">
-                          <a:alpha val="100000"/>
-                        </a:srgbClr>
-                      </a:solidFill>
-                    </a:lnR>
-                    <a:lnT w="19050" cap="flat">
-                      <a:solidFill>
-                        <a:srgbClr val="000000">
-                          <a:alpha val="100000"/>
-                        </a:srgbClr>
-                      </a:solidFill>
-                    </a:lnT>
-                    <a:lnB w="19050" cap="flat">
-                      <a:solidFill>
-                        <a:srgbClr val="000000">
-                          <a:alpha val="100000"/>
-                        </a:srgbClr>
-                      </a:solidFill>
-                    </a:lnB>
-                    <a:solidFill>
-                      <a:srgbClr val="FFFFFF">
-                        <a:alpha val="100000"/>
-                      </a:srgbClr>
-                    </a:solidFill>
-                  </a:tcPr>
-                  <a:extLst>
-                    <a:ext uri="{0D108BD9-81ED-4DB2-BD59-A6C34878D82A}">
-                      <a16:rowId xmlns:a16="http://schemas.microsoft.com/office/drawing/2014/main" val="2661222183"/>
-                    </a:ext>
-                  </a:extLst>
-                </a:tc>
-                <a:tc rowSpan="1" gridSpan="1">
-                  <a:txBody>
-                    <a:bodyPr anchor="t"/>
-                    <a:lstStyle/>
-                    <a:p>
-                      <a:pPr marL="0" algn="l"/>
-                    </a:p>
-                  </a:txBody>
-                  <a:tcPr anchor="t">
-                    <a:lnL w="19050" cap="flat">
-                      <a:solidFill>
-                        <a:srgbClr val="000000">
-                          <a:alpha val="100000"/>
-                        </a:srgbClr>
-                      </a:solidFill>
-                    </a:lnL>
-                    <a:lnR w="19050" cap="flat">
-                      <a:solidFill>
-                        <a:srgbClr val="000000">
-                          <a:alpha val="100000"/>
-                        </a:srgbClr>
-                      </a:solidFill>
-                    </a:lnR>
-                    <a:lnT w="19050" cap="flat">
-                      <a:solidFill>
-                        <a:srgbClr val="000000">
-                          <a:alpha val="100000"/>
-                        </a:srgbClr>
-                      </a:solidFill>
-                    </a:lnT>
-                    <a:lnB w="19050" cap="flat">
-                      <a:solidFill>
-                        <a:srgbClr val="000000">
-                          <a:alpha val="100000"/>
-                        </a:srgbClr>
-                      </a:solidFill>
-                    </a:lnB>
-                    <a:solidFill>
-                      <a:srgbClr val="FFFFFF">
-                        <a:alpha val="100000"/>
-                      </a:srgbClr>
-                    </a:solidFill>
-                  </a:tcPr>
-                  <a:extLst>
-                    <a:ext uri="{0D108BD9-81ED-4DB2-BD59-A6C34878D82A}">
-                      <a16:rowId xmlns:a16="http://schemas.microsoft.com/office/drawing/2014/main" val="2661222183"/>
-                    </a:ext>
-                  </a:extLst>
-                </a:tc>
-              </a:tr>
-            </a:tbl>
-          </a:graphicData>
-        </a:graphic>
-      </p:graphicFrame>
-      <p:graphicFrame>
-        <p:nvGraphicFramePr>
-          <p:cNvPr id="12" name="表格2">
-            <a:extLst>
-              <a:ext uri="{FF2B5EF4-FFF2-40B4-BE49-F238E27FC236}">
-                <a16:creationId xmlns:a16="http://schemas.microsoft.com/office/drawing/2014/main" id="{62B2FBE6-5C8C-E811-489E-1440CA960B7D}"/>
-              </a:ext>
-            </a:extLst>
-          </p:cNvPr>
-          <p:cNvGraphicFramePr>
-            <a:graphicFrameLocks noGrp="1"/>
-          </p:cNvGraphicFramePr>
-          <p:nvPr>
-            <p:extLst>
-              <p:ext uri="{D42A27DB-BD31-4B8C-83A1-F6EECF244321}">
-                <p14:modId xmlns:p14="http://schemas.microsoft.com/office/powerpoint/2010/main" val="3345567701"/>
-              </p:ext>
-            </p:extLst>
-          </p:nvPr>
-        </p:nvGraphicFramePr>
-        <p:xfrm>
-          <a:off x="7414435" y="1752818"/>
-          <a:ext cx="3142405" cy="986006"/>
-        </p:xfrm>
-        <a:graphic>
-          <a:graphicData uri="http://schemas.openxmlformats.org/drawingml/2006/table">
-            <a:tbl>
-              <a:tblPr firstRow="1" bandRow="1">
-                <a:tableStyleId>{5C22544A-7EE6-4342-B048-85BDC9FD1C3A}</a:tableStyleId>
-              </a:tblPr>
-              <a:tblGrid>
-                <a:gridCol w="1064774">
-                  <a:extLst>
-                    <a:ext uri="{9D8B030D-6E8A-4147-A177-3AD203B41FA5}">
-                      <a16:colId xmlns:a16="http://schemas.microsoft.com/office/drawing/2014/main" val="2854172943"/>
-                    </a:ext>
-                  </a:extLst>
-                </a:gridCol>
-                <a:gridCol w="1021510">
-                  <a:extLst>
-                    <a:ext uri="{9D8B030D-6E8A-4147-A177-3AD203B41FA5}">
-                      <a16:colId xmlns:a16="http://schemas.microsoft.com/office/drawing/2014/main" val="2854172943"/>
-                    </a:ext>
-                  </a:extLst>
-                </a:gridCol>
-                <a:gridCol w="1056121">
-                  <a:extLst>
-                    <a:ext uri="{9D8B030D-6E8A-4147-A177-3AD203B41FA5}">
-                      <a16:colId xmlns:a16="http://schemas.microsoft.com/office/drawing/2014/main" val="2854172943"/>
-                    </a:ext>
-                  </a:extLst>
-                </a:gridCol>
-              </a:tblGrid>
-              <a:tr h="986006">
-                <a:tc rowSpan="1" gridSpan="1">
-                  <a:txBody>
-                    <a:bodyPr anchor="ctr"/>
-                    <a:lstStyle/>
-                    <a:p>
-                      <a:pPr marL="0" algn="ctr">
-                        <a:lnSpc>
-                          <a:spcPts val="4300"/>
-                        </a:lnSpc>
-                      </a:pPr>
-                      <a:r>
-                        <a:rPr lang="zh-CN" altLang="en-US" sz="3600" b="1" i="0" dirty="0">
-                          <a:solidFill>
-                            <a:srgbClr val="000000">
-                              <a:alpha val="100000"/>
-                            </a:srgbClr>
-                          </a:solidFill>
-                          <a:latin typeface="Times New Roman"/>
-                          <a:ea typeface="Times New Roman"/>
-                        </a:rPr>
-                        <a:t>1</a:t>
-                      </a:r>
-                    </a:p>
-                  </a:txBody>
-                  <a:tcPr anchor="ctr">
-                    <a:lnL w="19050" cap="flat">
-                      <a:solidFill>
-                        <a:srgbClr val="000000">
-                          <a:alpha val="100000"/>
-                        </a:srgbClr>
-                      </a:solidFill>
-                    </a:lnL>
-                    <a:lnR w="19050" cap="flat">
-                      <a:solidFill>
-                        <a:srgbClr val="000000">
-                          <a:alpha val="100000"/>
-                        </a:srgbClr>
-                      </a:solidFill>
-                    </a:lnR>
-                    <a:lnT w="19050" cap="flat">
-                      <a:solidFill>
-                        <a:srgbClr val="000000">
-                          <a:alpha val="100000"/>
-                        </a:srgbClr>
-                      </a:solidFill>
-                    </a:lnT>
-                    <a:lnB w="19050" cap="flat">
-                      <a:solidFill>
-                        <a:srgbClr val="000000">
-                          <a:alpha val="100000"/>
-                        </a:srgbClr>
-                      </a:solidFill>
-                    </a:lnB>
-                    <a:solidFill>
-                      <a:srgbClr val="CCFAFF">
-                        <a:alpha val="100000"/>
-                      </a:srgbClr>
-                    </a:solidFill>
-                  </a:tcPr>
-                  <a:extLst>
-                    <a:ext uri="{0D108BD9-81ED-4DB2-BD59-A6C34878D82A}">
-                      <a16:rowId xmlns:a16="http://schemas.microsoft.com/office/drawing/2014/main" val="2661222183"/>
-                    </a:ext>
-                  </a:extLst>
-                </a:tc>
-                <a:tc rowSpan="1" gridSpan="1">
-                  <a:txBody>
-                    <a:bodyPr anchor="t"/>
-                    <a:lstStyle/>
-                    <a:p>
-                      <a:pPr marL="0" algn="l"/>
-                    </a:p>
-                  </a:txBody>
-                  <a:tcPr anchor="t">
-                    <a:lnL w="19050" cap="flat">
-                      <a:solidFill>
-                        <a:srgbClr val="000000">
-                          <a:alpha val="100000"/>
-                        </a:srgbClr>
-                      </a:solidFill>
-                    </a:lnL>
-                    <a:lnR w="19050" cap="flat">
-                      <a:solidFill>
-                        <a:srgbClr val="000000">
-                          <a:alpha val="100000"/>
-                        </a:srgbClr>
-                      </a:solidFill>
-                    </a:lnR>
-                    <a:lnT w="19050" cap="flat">
-                      <a:solidFill>
-                        <a:srgbClr val="000000">
-                          <a:alpha val="100000"/>
-                        </a:srgbClr>
-                      </a:solidFill>
-                    </a:lnT>
-                    <a:lnB w="19050" cap="flat">
-                      <a:solidFill>
-                        <a:srgbClr val="000000">
-                          <a:alpha val="100000"/>
-                        </a:srgbClr>
-                      </a:solidFill>
-                    </a:lnB>
-                    <a:solidFill>
-                      <a:srgbClr val="CCFAFF">
-                        <a:alpha val="100000"/>
-                      </a:srgbClr>
-                    </a:solidFill>
-                  </a:tcPr>
-                  <a:extLst>
-                    <a:ext uri="{0D108BD9-81ED-4DB2-BD59-A6C34878D82A}">
-                      <a16:rowId xmlns:a16="http://schemas.microsoft.com/office/drawing/2014/main" val="2661222183"/>
-                    </a:ext>
-                  </a:extLst>
-                </a:tc>
-                <a:tc rowSpan="1" gridSpan="1">
-                  <a:txBody>
-                    <a:bodyPr anchor="t"/>
-                    <a:lstStyle/>
-                    <a:p>
-                      <a:pPr marL="0" algn="l"/>
-                    </a:p>
-                  </a:txBody>
-                  <a:tcPr anchor="t">
-                    <a:lnL w="19050" cap="flat">
-                      <a:solidFill>
-                        <a:srgbClr val="000000">
-                          <a:alpha val="100000"/>
-                        </a:srgbClr>
-                      </a:solidFill>
-                    </a:lnL>
-                    <a:lnR w="19050" cap="flat">
-                      <a:solidFill>
-                        <a:srgbClr val="000000">
-                          <a:alpha val="100000"/>
-                        </a:srgbClr>
-                      </a:solidFill>
-                    </a:lnR>
-                    <a:lnT w="19050" cap="flat">
-                      <a:solidFill>
-                        <a:srgbClr val="000000">
-                          <a:alpha val="100000"/>
-                        </a:srgbClr>
-                      </a:solidFill>
-                    </a:lnT>
-                    <a:lnB w="19050" cap="flat">
-                      <a:solidFill>
-                        <a:srgbClr val="000000">
-                          <a:alpha val="100000"/>
-                        </a:srgbClr>
-                      </a:solidFill>
-                    </a:lnB>
-                    <a:solidFill>
-                      <a:srgbClr val="CCFAFF">
                         <a:alpha val="100000"/>
                       </a:srgbClr>
                     </a:solidFill>
@@ -3898,14 +4243,14 @@
       </p:graphicFrame>
       <p:sp>
         <p:nvSpPr>
-          <p:cNvPr id="13" name="文本3"/>
+          <p:cNvPr id="14" name="文本3"/>
           <p:cNvSpPr txBox="1"/>
           <p:nvPr/>
         </p:nvSpPr>
         <p:spPr>
           <a:xfrm>
-            <a:off x="10626045" y="1834467"/>
-            <a:ext cx="957520" cy="823008"/>
+            <a:off x="11105214" y="1961082"/>
+            <a:ext cx="942456" cy="836831"/>
           </a:xfrm>
           <a:prstGeom prst="rect">
             <a:avLst/>
@@ -3916,234 +4261,26 @@
           <a:bodyPr anchor="t"/>
           <a:lstStyle/>
           <a:p>
-            <a:pPr marL="0" algn="l"/>
+            <a:pPr marL="0" algn="l">
+              <a:lnSpc>
+                <a:spcPts val="4600"/>
+              </a:lnSpc>
+            </a:pPr>
             <a:r>
-              <a:rPr lang="zh-CN" altLang="en-US" sz="3899" b="0" i="0" dirty="0">
+              <a:rPr lang="zh-CN" altLang="en-US" sz="3600" b="1" i="0" dirty="0">
                 <a:solidFill>
-                  <a:srgbClr val="000000">
+                  <a:srgbClr val="1CA1A4">
                     <a:alpha val="100000"/>
                   </a:srgbClr>
                 </a:solidFill>
-                <a:latin typeface="黑体"/>
-                <a:ea typeface="黑体"/>
+                <a:latin typeface="Aa偷吃可爱长大的"/>
+                <a:ea typeface="Aa偷吃可爱长大的"/>
               </a:rPr>
               <a:t>行</a:t>
             </a:r>
           </a:p>
         </p:txBody>
       </p:sp>
-      <p:graphicFrame>
-        <p:nvGraphicFramePr>
-          <p:cNvPr id="14" name="表格3">
-            <a:extLst>
-              <a:ext uri="{FF2B5EF4-FFF2-40B4-BE49-F238E27FC236}">
-                <a16:creationId xmlns:a16="http://schemas.microsoft.com/office/drawing/2014/main" id="{62B2FBE6-5C8C-E811-489E-1440CA960B7D}"/>
-              </a:ext>
-            </a:extLst>
-          </p:cNvPr>
-          <p:cNvGraphicFramePr>
-            <a:graphicFrameLocks noGrp="1"/>
-          </p:cNvGraphicFramePr>
-          <p:nvPr>
-            <p:extLst>
-              <p:ext uri="{D42A27DB-BD31-4B8C-83A1-F6EECF244321}">
-                <p14:modId xmlns:p14="http://schemas.microsoft.com/office/powerpoint/2010/main" val="3345567701"/>
-              </p:ext>
-            </p:extLst>
-          </p:nvPr>
-        </p:nvGraphicFramePr>
-        <p:xfrm>
-          <a:off x="7368524" y="1753123"/>
-          <a:ext cx="1117740" cy="2910326"/>
-        </p:xfrm>
-        <a:graphic>
-          <a:graphicData uri="http://schemas.openxmlformats.org/drawingml/2006/table">
-            <a:tbl>
-              <a:tblPr firstRow="1" bandRow="1">
-                <a:tableStyleId>{5C22544A-7EE6-4342-B048-85BDC9FD1C3A}</a:tableStyleId>
-              </a:tblPr>
-              <a:tblGrid>
-                <a:gridCol w="1117740">
-                  <a:extLst>
-                    <a:ext uri="{9D8B030D-6E8A-4147-A177-3AD203B41FA5}">
-                      <a16:colId xmlns:a16="http://schemas.microsoft.com/office/drawing/2014/main" val="2854172943"/>
-                    </a:ext>
-                  </a:extLst>
-                </a:gridCol>
-              </a:tblGrid>
-              <a:tr h="986006">
-                <a:tc rowSpan="1" gridSpan="1">
-                  <a:txBody>
-                    <a:bodyPr anchor="ctr"/>
-                    <a:lstStyle/>
-                    <a:p>
-                      <a:pPr marL="0" algn="ctr">
-                        <a:lnSpc>
-                          <a:spcPts val="4300"/>
-                        </a:lnSpc>
-                      </a:pPr>
-                      <a:r>
-                        <a:rPr lang="zh-CN" altLang="en-US" sz="3600" b="1" i="0" dirty="0">
-                          <a:solidFill>
-                            <a:srgbClr val="000000">
-                              <a:alpha val="100000"/>
-                            </a:srgbClr>
-                          </a:solidFill>
-                          <a:latin typeface="Times New Roman"/>
-                          <a:ea typeface="Times New Roman"/>
-                        </a:rPr>
-                        <a:t>1</a:t>
-                      </a:r>
-                    </a:p>
-                  </a:txBody>
-                  <a:tcPr anchor="ctr">
-                    <a:lnL w="19050" cap="flat">
-                      <a:solidFill>
-                        <a:srgbClr val="000000">
-                          <a:alpha val="100000"/>
-                        </a:srgbClr>
-                      </a:solidFill>
-                    </a:lnL>
-                    <a:lnR w="19050" cap="flat">
-                      <a:solidFill>
-                        <a:srgbClr val="000000">
-                          <a:alpha val="100000"/>
-                        </a:srgbClr>
-                      </a:solidFill>
-                    </a:lnR>
-                    <a:lnT w="19050" cap="flat">
-                      <a:solidFill>
-                        <a:srgbClr val="000000">
-                          <a:alpha val="100000"/>
-                        </a:srgbClr>
-                      </a:solidFill>
-                    </a:lnT>
-                    <a:lnB w="19050" cap="flat">
-                      <a:solidFill>
-                        <a:srgbClr val="000000">
-                          <a:alpha val="100000"/>
-                        </a:srgbClr>
-                      </a:solidFill>
-                    </a:lnB>
-                    <a:solidFill>
-                      <a:srgbClr val="C2FFDB">
-                        <a:alpha val="100000"/>
-                      </a:srgbClr>
-                    </a:solidFill>
-                  </a:tcPr>
-                  <a:extLst>
-                    <a:ext uri="{0D108BD9-81ED-4DB2-BD59-A6C34878D82A}">
-                      <a16:rowId xmlns:a16="http://schemas.microsoft.com/office/drawing/2014/main" val="2661222183"/>
-                    </a:ext>
-                  </a:extLst>
-                </a:tc>
-              </a:tr>
-              <a:tr h="938313">
-                <a:tc rowSpan="1" gridSpan="1">
-                  <a:txBody>
-                    <a:bodyPr anchor="t"/>
-                    <a:lstStyle/>
-                    <a:p>
-                      <a:pPr marL="0" algn="ctr"/>
-                    </a:p>
-                  </a:txBody>
-                  <a:tcPr anchor="t">
-                    <a:lnL w="19050" cap="flat">
-                      <a:solidFill>
-                        <a:srgbClr val="000000">
-                          <a:alpha val="100000"/>
-                        </a:srgbClr>
-                      </a:solidFill>
-                    </a:lnL>
-                    <a:lnR w="19050" cap="flat">
-                      <a:solidFill>
-                        <a:srgbClr val="000000">
-                          <a:alpha val="100000"/>
-                        </a:srgbClr>
-                      </a:solidFill>
-                    </a:lnR>
-                    <a:lnT w="19050" cap="flat">
-                      <a:solidFill>
-                        <a:srgbClr val="000000">
-                          <a:alpha val="100000"/>
-                        </a:srgbClr>
-                      </a:solidFill>
-                    </a:lnT>
-                    <a:lnB w="19050" cap="flat">
-                      <a:solidFill>
-                        <a:srgbClr val="000000">
-                          <a:alpha val="100000"/>
-                        </a:srgbClr>
-                      </a:solidFill>
-                    </a:lnB>
-                    <a:solidFill>
-                      <a:srgbClr val="C2FFDB">
-                        <a:alpha val="100000"/>
-                      </a:srgbClr>
-                    </a:solidFill>
-                  </a:tcPr>
-                  <a:extLst>
-                    <a:ext uri="{0D108BD9-81ED-4DB2-BD59-A6C34878D82A}">
-                      <a16:rowId xmlns:a16="http://schemas.microsoft.com/office/drawing/2014/main" val="2661222183"/>
-                    </a:ext>
-                  </a:extLst>
-                </a:tc>
-              </a:tr>
-              <a:tr h="986006">
-                <a:tc rowSpan="1" gridSpan="1">
-                  <a:txBody>
-                    <a:bodyPr anchor="ctr"/>
-                    <a:lstStyle/>
-                    <a:p>
-                      <a:pPr marL="0" algn="ctr"/>
-                    </a:p>
-                  </a:txBody>
-                  <a:tcPr anchor="ctr">
-                    <a:lnL w="19050" cap="flat">
-                      <a:solidFill>
-                        <a:srgbClr val="000000">
-                          <a:alpha val="100000"/>
-                        </a:srgbClr>
-                      </a:solidFill>
-                    </a:lnL>
-                    <a:lnR w="19050" cap="flat">
-                      <a:solidFill>
-                        <a:srgbClr val="000000">
-                          <a:alpha val="100000"/>
-                        </a:srgbClr>
-                      </a:solidFill>
-                    </a:lnR>
-                    <a:lnT w="19050" cap="flat">
-                      <a:solidFill>
-                        <a:srgbClr val="000000">
-                          <a:alpha val="100000"/>
-                        </a:srgbClr>
-                      </a:solidFill>
-                    </a:lnT>
-                    <a:lnB w="19050" cap="flat">
-                      <a:solidFill>
-                        <a:srgbClr val="000000">
-                          <a:alpha val="100000"/>
-                        </a:srgbClr>
-                      </a:solidFill>
-                    </a:lnB>
-                    <a:solidFill>
-                      <a:srgbClr val="C2FFDB">
-                        <a:alpha val="100000"/>
-                      </a:srgbClr>
-                    </a:solidFill>
-                  </a:tcPr>
-                  <a:extLst>
-                    <a:ext uri="{0D108BD9-81ED-4DB2-BD59-A6C34878D82A}">
-                      <a16:rowId xmlns:a16="http://schemas.microsoft.com/office/drawing/2014/main" val="2661222183"/>
-                    </a:ext>
-                  </a:extLst>
-                </a:tc>
-              </a:tr>
-            </a:tbl>
-          </a:graphicData>
-        </a:graphic>
-      </p:graphicFrame>
       <p:sp>
         <p:nvSpPr>
           <p:cNvPr id="15" name="文本4"/>
@@ -4152,8 +4289,8 @@
         </p:nvSpPr>
         <p:spPr>
           <a:xfrm>
-            <a:off x="7561034" y="1012335"/>
-            <a:ext cx="957520" cy="823008"/>
+            <a:off x="8976320" y="541341"/>
+            <a:ext cx="942456" cy="836831"/>
           </a:xfrm>
           <a:prstGeom prst="rect">
             <a:avLst/>
@@ -4164,18 +4301,166 @@
           <a:bodyPr anchor="t"/>
           <a:lstStyle/>
           <a:p>
-            <a:pPr marL="0" algn="l"/>
+            <a:pPr marL="0" algn="l">
+              <a:lnSpc>
+                <a:spcPts val="4600"/>
+              </a:lnSpc>
+            </a:pPr>
             <a:r>
-              <a:rPr lang="zh-CN" altLang="en-US" sz="3899" b="0" i="0" dirty="0">
+              <a:rPr lang="zh-CN" altLang="en-US" sz="3600" b="1" i="0" dirty="0">
+                <a:solidFill>
+                  <a:srgbClr val="ED7D31">
+                    <a:alpha val="100000"/>
+                  </a:srgbClr>
+                </a:solidFill>
+                <a:latin typeface="Aa偷吃可爱长大的"/>
+                <a:ea typeface="Aa偷吃可爱长大的"/>
+              </a:rPr>
+              <a:t>列</a:t>
+            </a:r>
+          </a:p>
+        </p:txBody>
+      </p:sp>
+      <p:sp>
+        <p:nvSpPr>
+          <p:cNvPr id="16" name="形状6"/>
+          <p:cNvSpPr txBox="1"/>
+          <p:nvPr/>
+        </p:nvSpPr>
+        <p:spPr>
+          <a:xfrm>
+            <a:off x="8232035" y="2708842"/>
+            <a:ext cx="1440000" cy="1440000"/>
+          </a:xfrm>
+          <a:prstGeom prst="rect"/>
+          <a:solidFill>
+            <a:srgbClr val="FFFFFF">
+              <a:alpha val="0"/>
+            </a:srgbClr>
+          </a:solidFill>
+          <a:ln w="38100">
+            <a:solidFill>
+              <a:srgbClr val="F00C08">
+                <a:alpha val="100000"/>
+              </a:srgbClr>
+            </a:solidFill>
+            <a:prstDash val="solid"/>
+          </a:ln>
+        </p:spPr>
+        <p:txBody>
+          <a:bodyPr anchor="ctr"/>
+          <a:lstStyle/>
+          <a:p>
+            <a:pPr marL="0" algn="ctr"/>
+          </a:p>
+        </p:txBody>
+      </p:sp>
+      <p:sp>
+        <p:nvSpPr>
+          <p:cNvPr id="17" name="文本5"/>
+          <p:cNvSpPr txBox="1"/>
+          <p:nvPr/>
+        </p:nvSpPr>
+        <p:spPr>
+          <a:xfrm>
+            <a:off x="8630898" y="4112497"/>
+            <a:ext cx="838434" cy="836831"/>
+          </a:xfrm>
+          <a:prstGeom prst="rect">
+            <a:avLst/>
+          </a:prstGeom>
+          <a:noFill/>
+        </p:spPr>
+        <p:txBody>
+          <a:bodyPr anchor="t"/>
+          <a:lstStyle/>
+          <a:p>
+            <a:pPr marL="0" algn="l">
+              <a:lnSpc>
+                <a:spcPts val="4600"/>
+              </a:lnSpc>
+            </a:pPr>
+            <a:r>
+              <a:rPr lang="zh-CN" altLang="en-US" sz="3600" b="1" i="0" dirty="0">
+                <a:solidFill>
+                  <a:srgbClr val="FF0000">
+                    <a:alpha val="100000"/>
+                  </a:srgbClr>
+                </a:solidFill>
+                <a:latin typeface="Aa偷吃可爱长大的"/>
+                <a:ea typeface="Aa偷吃可爱长大的"/>
+              </a:rPr>
+              <a:t>宫</a:t>
+            </a:r>
+          </a:p>
+        </p:txBody>
+      </p:sp>
+      <p:pic>
+        <p:nvPicPr>
+          <p:cNvPr id="18" name="图片3">
+            <a:extLst>
+              <a:ext uri="{FF2B5EF4-FFF2-40B4-BE49-F238E27FC236}">
+                <a16:creationId xmlns:a16="http://schemas.microsoft.com/office/drawing/2014/main" id="{69ED34C6-1862-8A8A-03F9-2D1EFC8C3215}"/>
+              </a:ext>
+            </a:extLst>
+          </p:cNvPr>
+          <p:cNvPicPr>
+            <a:picLocks noChangeAspect="1"/>
+          </p:cNvPicPr>
+          <p:nvPr/>
+        </p:nvPicPr>
+        <p:blipFill>
+          <a:blip r:embed="rId3"/>
+          <a:stretch>
+            <a:fillRect/>
+          </a:stretch>
+        </p:blipFill>
+        <p:spPr>
+          <a:xfrm rot="20628928">
+            <a:off x="7360196" y="-76219"/>
+            <a:ext cx="1056178" cy="1069464"/>
+          </a:xfrm>
+          <a:prstGeom prst="rect">
+            <a:avLst/>
+          </a:prstGeom>
+        </p:spPr>
+      </p:pic>
+      <p:sp>
+        <p:nvSpPr>
+          <p:cNvPr id="19" name="文本7"/>
+          <p:cNvSpPr txBox="1"/>
+          <p:nvPr/>
+        </p:nvSpPr>
+        <p:spPr>
+          <a:xfrm>
+            <a:off x="4506220" y="221323"/>
+            <a:ext cx="3180963" cy="898386"/>
+          </a:xfrm>
+          <a:prstGeom prst="rect">
+            <a:avLst/>
+          </a:prstGeom>
+          <a:noFill/>
+        </p:spPr>
+        <p:txBody>
+          <a:bodyPr anchor="t"/>
+          <a:lstStyle/>
+          <a:p>
+            <a:pPr marL="0" algn="ctr">
+              <a:lnSpc>
+                <a:spcPts val="4400"/>
+              </a:lnSpc>
+            </a:pPr>
+            <a:r>
+              <a:rPr lang="zh-CN" altLang="en-US" sz="4000" b="1" i="0" dirty="0">
                 <a:solidFill>
                   <a:srgbClr val="000000">
                     <a:alpha val="100000"/>
                   </a:srgbClr>
                 </a:solidFill>
-                <a:latin typeface="黑体"/>
-                <a:ea typeface="黑体"/>
+                <a:latin typeface="Aa偷吃可爱长大的"/>
+                <a:ea typeface="Aa偷吃可爱长大的"/>
               </a:rPr>
-              <a:t>列</a:t>
+              <a:t>4x4数独游戏</a:t>
             </a:r>
           </a:p>
         </p:txBody>
@@ -4224,7 +4509,7 @@
                                           </p:stCondLst>
                                         </p:cTn>
                                         <p:tgtEl>
-                                          <p:spTgt spid="12"/>
+                                          <p:spTgt spid="8"/>
                                         </p:tgtEl>
                                         <p:attrNameLst>
                                           <p:attrName>style.visibility</p:attrName>
@@ -4236,9 +4521,9 @@
                                     </p:set>
                                     <p:animEffect transition="in" filter="fade">
                                       <p:cBhvr>
-                                        <p:cTn id="4" dur="300"/>
+                                        <p:cTn id="4" dur="1"/>
                                         <p:tgtEl>
-                                          <p:spTgt spid="12"/>
+                                          <p:spTgt spid="8"/>
                                         </p:tgtEl>
                                       </p:cBhvr>
                                     </p:animEffect>
@@ -4277,7 +4562,7 @@
                                           </p:stCondLst>
                                         </p:cTn>
                                         <p:tgtEl>
-                                          <p:spTgt spid="13"/>
+                                          <p:spTgt spid="9"/>
                                         </p:tgtEl>
                                         <p:attrNameLst>
                                           <p:attrName>style.visibility</p:attrName>
@@ -4289,9 +4574,9 @@
                                     </p:set>
                                     <p:animEffect transition="in" filter="fade">
                                       <p:cBhvr>
-                                        <p:cTn id="9" dur="300"/>
+                                        <p:cTn id="9" dur="1"/>
                                         <p:tgtEl>
-                                          <p:spTgt spid="13"/>
+                                          <p:spTgt spid="9"/>
                                         </p:tgtEl>
                                       </p:cBhvr>
                                     </p:animEffect>
@@ -4342,7 +4627,7 @@
                                     </p:set>
                                     <p:animEffect transition="in" filter="fade">
                                       <p:cBhvr>
-                                        <p:cTn id="14" dur="300"/>
+                                        <p:cTn id="14" dur="1"/>
                                         <p:tgtEl>
                                           <p:spTgt spid="14"/>
                                         </p:tgtEl>
@@ -4383,6 +4668,59 @@
                                           </p:stCondLst>
                                         </p:cTn>
                                         <p:tgtEl>
+                                          <p:spTgt spid="10"/>
+                                        </p:tgtEl>
+                                        <p:attrNameLst>
+                                          <p:attrName>style.visibility</p:attrName>
+                                        </p:attrNameLst>
+                                      </p:cBhvr>
+                                      <p:to>
+                                        <p:strVal val="visible"/>
+                                      </p:to>
+                                    </p:set>
+                                    <p:animEffect transition="in" filter="fade">
+                                      <p:cBhvr>
+                                        <p:cTn id="19" dur="1"/>
+                                        <p:tgtEl>
+                                          <p:spTgt spid="10"/>
+                                        </p:tgtEl>
+                                      </p:cBhvr>
+                                    </p:animEffect>
+                                  </p:childTnLst>
+                                </p:cTn>
+                              </p:par>
+                            </p:childTnLst>
+                          </p:cTn>
+                        </p:par>
+                      </p:childTnLst>
+                    </p:cTn>
+                  </p:par>
+                  <p:par>
+                    <p:cTn id="26" fill="hold">
+                      <p:stCondLst>
+                        <p:cond delay="indefinite"/>
+                      </p:stCondLst>
+                      <p:childTnLst>
+                        <p:par>
+                          <p:cTn id="27" fill="hold">
+                            <p:stCondLst>
+                              <p:cond delay="0"/>
+                            </p:stCondLst>
+                            <p:childTnLst>
+                              <p:par>
+                                <p:cTn id="25" presetID="10" presetClass="entr" presetSubtype="0" fill="hold" grpId="0" nodeType="clickEffect">
+                                  <p:stCondLst>
+                                    <p:cond delay="0"/>
+                                  </p:stCondLst>
+                                  <p:childTnLst>
+                                    <p:set>
+                                      <p:cBhvr>
+                                        <p:cTn id="23" dur="1" fill="hold">
+                                          <p:stCondLst>
+                                            <p:cond delay="0"/>
+                                          </p:stCondLst>
+                                        </p:cTn>
+                                        <p:tgtEl>
                                           <p:spTgt spid="15"/>
                                         </p:tgtEl>
                                         <p:attrNameLst>
@@ -4395,9 +4733,115 @@
                                     </p:set>
                                     <p:animEffect transition="in" filter="fade">
                                       <p:cBhvr>
-                                        <p:cTn id="19" dur="300"/>
+                                        <p:cTn id="24" dur="1"/>
                                         <p:tgtEl>
                                           <p:spTgt spid="15"/>
+                                        </p:tgtEl>
+                                      </p:cBhvr>
+                                    </p:animEffect>
+                                  </p:childTnLst>
+                                </p:cTn>
+                              </p:par>
+                            </p:childTnLst>
+                          </p:cTn>
+                        </p:par>
+                      </p:childTnLst>
+                    </p:cTn>
+                  </p:par>
+                  <p:par>
+                    <p:cTn id="31" fill="hold">
+                      <p:stCondLst>
+                        <p:cond delay="indefinite"/>
+                      </p:stCondLst>
+                      <p:childTnLst>
+                        <p:par>
+                          <p:cTn id="32" fill="hold">
+                            <p:stCondLst>
+                              <p:cond delay="0"/>
+                            </p:stCondLst>
+                            <p:childTnLst>
+                              <p:par>
+                                <p:cTn id="30" presetID="10" presetClass="entr" presetSubtype="0" fill="hold" grpId="0" nodeType="clickEffect">
+                                  <p:stCondLst>
+                                    <p:cond delay="0"/>
+                                  </p:stCondLst>
+                                  <p:childTnLst>
+                                    <p:set>
+                                      <p:cBhvr>
+                                        <p:cTn id="28" dur="1" fill="hold">
+                                          <p:stCondLst>
+                                            <p:cond delay="0"/>
+                                          </p:stCondLst>
+                                        </p:cTn>
+                                        <p:tgtEl>
+                                          <p:spTgt spid="16"/>
+                                        </p:tgtEl>
+                                        <p:attrNameLst>
+                                          <p:attrName>style.visibility</p:attrName>
+                                        </p:attrNameLst>
+                                      </p:cBhvr>
+                                      <p:to>
+                                        <p:strVal val="visible"/>
+                                      </p:to>
+                                    </p:set>
+                                    <p:animEffect transition="in" filter="fade">
+                                      <p:cBhvr>
+                                        <p:cTn id="29" dur="1"/>
+                                        <p:tgtEl>
+                                          <p:spTgt spid="16"/>
+                                        </p:tgtEl>
+                                      </p:cBhvr>
+                                    </p:animEffect>
+                                  </p:childTnLst>
+                                </p:cTn>
+                              </p:par>
+                            </p:childTnLst>
+                          </p:cTn>
+                        </p:par>
+                      </p:childTnLst>
+                    </p:cTn>
+                  </p:par>
+                  <p:par>
+                    <p:cTn id="36" fill="hold">
+                      <p:stCondLst>
+                        <p:cond delay="indefinite"/>
+                      </p:stCondLst>
+                      <p:childTnLst>
+                        <p:par>
+                          <p:cTn id="37" fill="hold">
+                            <p:stCondLst>
+                              <p:cond delay="0"/>
+                            </p:stCondLst>
+                            <p:childTnLst>
+                              <p:par>
+                                <p:cTn id="35" presetID="10" presetClass="entr" presetSubtype="0" fill="hold" grpId="0" nodeType="clickEffect">
+                                  <p:stCondLst>
+                                    <p:cond delay="0"/>
+                                  </p:stCondLst>
+                                  <p:childTnLst>
+                                    <p:set>
+                                      <p:cBhvr>
+                                        <p:cTn id="33" dur="1" fill="hold">
+                                          <p:stCondLst>
+                                            <p:cond delay="0"/>
+                                          </p:stCondLst>
+                                        </p:cTn>
+                                        <p:tgtEl>
+                                          <p:spTgt spid="17"/>
+                                        </p:tgtEl>
+                                        <p:attrNameLst>
+                                          <p:attrName>style.visibility</p:attrName>
+                                        </p:attrNameLst>
+                                      </p:cBhvr>
+                                      <p:to>
+                                        <p:strVal val="visible"/>
+                                      </p:to>
+                                    </p:set>
+                                    <p:animEffect transition="in" filter="fade">
+                                      <p:cBhvr>
+                                        <p:cTn id="34" dur="1"/>
+                                        <p:tgtEl>
+                                          <p:spTgt spid="17"/>
                                         </p:tgtEl>
                                       </p:cBhvr>
                                     </p:animEffect>
@@ -4432,10 +4876,13 @@
       </p:par>
     </p:tnLst>
     <p:bldLst>
-      <p:bldP spid="12" grpId="0" animBg="1"/>
-      <p:bldP spid="13" grpId="0" animBg="1"/>
+      <p:bldP spid="8" grpId="0" animBg="1"/>
+      <p:bldP spid="9" grpId="0" animBg="1"/>
       <p:bldP spid="14" grpId="0" animBg="1"/>
+      <p:bldP spid="10" grpId="0" animBg="1"/>
       <p:bldP spid="15" grpId="0" animBg="1"/>
+      <p:bldP spid="16" grpId="0" animBg="1"/>
+      <p:bldP spid="17" grpId="0" animBg="1"/>
     </p:bldLst>
   </p:timing>
 </p:sld>
@@ -4634,7 +5081,7 @@
         </p:blipFill>
         <p:spPr>
           <a:xfrm rot="20628928">
-            <a:off x="6842525" y="-97654"/>
+            <a:off x="7360196" y="-76219"/>
             <a:ext cx="1056178" cy="1069464"/>
           </a:xfrm>
           <a:prstGeom prst="rect">
@@ -4684,7 +5131,7 @@
         </p:nvSpPr>
         <p:spPr>
           <a:xfrm>
-            <a:off x="10394269" y="3429080"/>
+            <a:off x="6978584" y="4431036"/>
             <a:ext cx="720000" cy="720000"/>
           </a:xfrm>
           <a:prstGeom prst="rect"/>
@@ -4717,7 +5164,7 @@
         </p:nvSpPr>
         <p:spPr>
           <a:xfrm>
-            <a:off x="8232780" y="1989080"/>
+            <a:off x="4817095" y="2991036"/>
             <a:ext cx="2880000" cy="720000"/>
           </a:xfrm>
           <a:prstGeom prst="rect"/>
@@ -4750,7 +5197,7 @@
         </p:nvSpPr>
         <p:spPr>
           <a:xfrm rot="5400000">
-            <a:off x="7873897" y="2348921"/>
+            <a:off x="4458212" y="3350877"/>
             <a:ext cx="2880000" cy="720000"/>
           </a:xfrm>
           <a:prstGeom prst="rect"/>
@@ -4783,7 +5230,7 @@
         </p:nvSpPr>
         <p:spPr>
           <a:xfrm>
-            <a:off x="4596959" y="195449"/>
+            <a:off x="4506220" y="221323"/>
             <a:ext cx="3180963" cy="898386"/>
           </a:xfrm>
           <a:prstGeom prst="rect">
@@ -4797,7 +5244,7 @@
           <a:p>
             <a:pPr marL="0" algn="ctr">
               <a:lnSpc>
-                <a:spcPts val="4800"/>
+                <a:spcPts val="4400"/>
               </a:lnSpc>
             </a:pPr>
             <a:r>
@@ -4807,141 +5254,17 @@
                     <a:alpha val="100000"/>
                   </a:srgbClr>
                 </a:solidFill>
-                <a:latin typeface="微软雅黑"/>
-                <a:ea typeface="微软雅黑"/>
+                <a:latin typeface="Aa偷吃可爱长大的"/>
+                <a:ea typeface="Aa偷吃可爱长大的"/>
               </a:rPr>
-              <a:t>探索新知</a:t>
-            </a:r>
-          </a:p>
-        </p:txBody>
-      </p:sp>
-      <p:sp>
-        <p:nvSpPr>
-          <p:cNvPr id="13" name="文本2"/>
-          <p:cNvSpPr txBox="1"/>
-          <p:nvPr/>
-        </p:nvSpPr>
-        <p:spPr>
-          <a:xfrm>
-            <a:off x="588280" y="899304"/>
-            <a:ext cx="7535316" cy="2686757"/>
-          </a:xfrm>
-          <a:prstGeom prst="rect">
-            <a:avLst/>
-          </a:prstGeom>
-          <a:noFill/>
-        </p:spPr>
-        <p:txBody>
-          <a:bodyPr anchor="t"/>
-          <a:lstStyle/>
-          <a:p>
-            <a:pPr marL="0" algn="l">
-              <a:lnSpc>
-                <a:spcPts val="6500"/>
-              </a:lnSpc>
-            </a:pPr>
-            <a:r>
-              <a:rPr lang="zh-CN" altLang="en-US" sz="3600" b="0" i="0" dirty="0">
-                <a:solidFill>
-                  <a:srgbClr val="231F20">
-                    <a:alpha val="100000"/>
-                  </a:srgbClr>
-                </a:solidFill>
-                <a:latin typeface="Times New Roman"/>
-                <a:ea typeface="Times New Roman"/>
-              </a:rPr>
-              <a:t>        </a:t>
-            </a:r>
-            <a:r>
-              <a:rPr lang="zh-CN" altLang="en-US" sz="3600" b="0" i="0" dirty="0">
-                <a:solidFill>
-                  <a:srgbClr val="231F20">
-                    <a:alpha val="100000"/>
-                  </a:srgbClr>
-                </a:solidFill>
-                <a:latin typeface="楷体"/>
-                <a:ea typeface="楷体"/>
-              </a:rPr>
-              <a:t>用</a:t>
-            </a:r>
-            <a:r>
-              <a:rPr lang="zh-CN" altLang="en-US" sz="3600" b="0" i="0" dirty="0">
-                <a:solidFill>
-                  <a:srgbClr val="231F20">
-                    <a:alpha val="100000"/>
-                  </a:srgbClr>
-                </a:solidFill>
-                <a:latin typeface="Times New Roman"/>
-                <a:ea typeface="Times New Roman"/>
-              </a:rPr>
-              <a:t>1~4</a:t>
-            </a:r>
-            <a:r>
-              <a:rPr lang="zh-CN" altLang="en-US" sz="3600" b="0" i="0" dirty="0">
-                <a:solidFill>
-                  <a:srgbClr val="231F20">
-                    <a:alpha val="100000"/>
-                  </a:srgbClr>
-                </a:solidFill>
-                <a:latin typeface="楷体"/>
-                <a:ea typeface="楷体"/>
-              </a:rPr>
-              <a:t>填满右边的方格，要使每行、每列以及每个</a:t>
-            </a:r>
-            <a:r>
-              <a:rPr lang="zh-CN" altLang="en-US" sz="3600" b="0" i="0" dirty="0">
-                <a:solidFill>
-                  <a:srgbClr val="231F20">
-                    <a:alpha val="100000"/>
-                  </a:srgbClr>
-                </a:solidFill>
-                <a:latin typeface="Times New Roman"/>
-                <a:ea typeface="Times New Roman"/>
-              </a:rPr>
-              <a:t>          </a:t>
-            </a:r>
-            <a:r>
-              <a:rPr lang="zh-CN" altLang="en-US" sz="3600" b="0" i="0" dirty="0">
-                <a:solidFill>
-                  <a:srgbClr val="231F20">
-                    <a:alpha val="100000"/>
-                  </a:srgbClr>
-                </a:solidFill>
-                <a:latin typeface="楷体"/>
-                <a:ea typeface="楷体"/>
-              </a:rPr>
-              <a:t>（宫）都要用到</a:t>
-            </a:r>
-            <a:r>
-              <a:rPr lang="zh-CN" altLang="en-US" sz="3600" b="0" i="0" dirty="0">
-                <a:solidFill>
-                  <a:srgbClr val="231F20">
-                    <a:alpha val="100000"/>
-                  </a:srgbClr>
-                </a:solidFill>
-                <a:latin typeface="Times New Roman"/>
-                <a:ea typeface="Times New Roman"/>
-              </a:rPr>
-              <a:t>1~4</a:t>
-            </a:r>
-            <a:r>
-              <a:rPr lang="zh-CN" altLang="en-US" sz="3600" b="0" i="0" dirty="0">
-                <a:solidFill>
-                  <a:srgbClr val="231F20">
-                    <a:alpha val="100000"/>
-                  </a:srgbClr>
-                </a:solidFill>
-                <a:latin typeface="楷体"/>
-                <a:ea typeface="楷体"/>
-              </a:rPr>
-              <a:t>，且不能重复。</a:t>
+              <a:t>4x4数独游戏</a:t>
             </a:r>
           </a:p>
         </p:txBody>
       </p:sp>
       <p:graphicFrame>
         <p:nvGraphicFramePr>
-          <p:cNvPr id="14" name="表格1">
+          <p:cNvPr id="13" name="表格2">
             <a:extLst>
               <a:ext uri="{FF2B5EF4-FFF2-40B4-BE49-F238E27FC236}">
                 <a16:creationId xmlns:a16="http://schemas.microsoft.com/office/drawing/2014/main" id="{62B2FBE6-5C8C-E811-489E-1440CA960B7D}"/>
@@ -4960,257 +5283,7 @@
           </p:nvPr>
         </p:nvGraphicFramePr>
         <p:xfrm>
-          <a:off x="4552530" y="1812930"/>
-          <a:ext cx="936000" cy="936000"/>
-        </p:xfrm>
-        <a:graphic>
-          <a:graphicData uri="http://schemas.openxmlformats.org/drawingml/2006/table">
-            <a:tbl>
-              <a:tblPr firstRow="1" bandRow="1">
-                <a:tableStyleId>{5C22544A-7EE6-4342-B048-85BDC9FD1C3A}</a:tableStyleId>
-              </a:tblPr>
-              <a:tblGrid>
-                <a:gridCol w="468000">
-                  <a:extLst>
-                    <a:ext uri="{9D8B030D-6E8A-4147-A177-3AD203B41FA5}">
-                      <a16:colId xmlns:a16="http://schemas.microsoft.com/office/drawing/2014/main" val="2854172943"/>
-                    </a:ext>
-                  </a:extLst>
-                </a:gridCol>
-                <a:gridCol w="468000">
-                  <a:extLst>
-                    <a:ext uri="{9D8B030D-6E8A-4147-A177-3AD203B41FA5}">
-                      <a16:colId xmlns:a16="http://schemas.microsoft.com/office/drawing/2014/main" val="2854172943"/>
-                    </a:ext>
-                  </a:extLst>
-                </a:gridCol>
-              </a:tblGrid>
-              <a:tr h="468000">
-                <a:tc rowSpan="1" gridSpan="1">
-                  <a:txBody>
-                    <a:bodyPr anchor="t"/>
-                    <a:lstStyle/>
-                    <a:p>
-                      <a:pPr marL="0" algn="l"/>
-                    </a:p>
-                  </a:txBody>
-                  <a:tcPr anchor="t">
-                    <a:lnL w="19050" cap="flat">
-                      <a:solidFill>
-                        <a:srgbClr val="000000">
-                          <a:alpha val="100000"/>
-                        </a:srgbClr>
-                      </a:solidFill>
-                    </a:lnL>
-                    <a:lnR w="12700" cap="flat">
-                      <a:solidFill>
-                        <a:srgbClr val="000000">
-                          <a:alpha val="100000"/>
-                        </a:srgbClr>
-                      </a:solidFill>
-                    </a:lnR>
-                    <a:lnT w="19050" cap="flat">
-                      <a:solidFill>
-                        <a:srgbClr val="000000">
-                          <a:alpha val="100000"/>
-                        </a:srgbClr>
-                      </a:solidFill>
-                    </a:lnT>
-                    <a:lnB w="12700" cap="flat">
-                      <a:solidFill>
-                        <a:srgbClr val="000000">
-                          <a:alpha val="100000"/>
-                        </a:srgbClr>
-                      </a:solidFill>
-                    </a:lnB>
-                    <a:solidFill>
-                      <a:srgbClr val="FFFFFF">
-                        <a:alpha val="100000"/>
-                      </a:srgbClr>
-                    </a:solidFill>
-                  </a:tcPr>
-                  <a:extLst>
-                    <a:ext uri="{0D108BD9-81ED-4DB2-BD59-A6C34878D82A}">
-                      <a16:rowId xmlns:a16="http://schemas.microsoft.com/office/drawing/2014/main" val="2661222183"/>
-                    </a:ext>
-                  </a:extLst>
-                </a:tc>
-                <a:tc rowSpan="1" gridSpan="1">
-                  <a:txBody>
-                    <a:bodyPr anchor="t"/>
-                    <a:lstStyle/>
-                    <a:p>
-                      <a:pPr marL="0" algn="l"/>
-                    </a:p>
-                  </a:txBody>
-                  <a:tcPr anchor="t">
-                    <a:lnL w="12700" cap="flat">
-                      <a:solidFill>
-                        <a:srgbClr val="000000">
-                          <a:alpha val="100000"/>
-                        </a:srgbClr>
-                      </a:solidFill>
-                    </a:lnL>
-                    <a:lnR w="19050" cap="flat">
-                      <a:solidFill>
-                        <a:srgbClr val="000000">
-                          <a:alpha val="100000"/>
-                        </a:srgbClr>
-                      </a:solidFill>
-                    </a:lnR>
-                    <a:lnT w="19050" cap="flat">
-                      <a:solidFill>
-                        <a:srgbClr val="000000">
-                          <a:alpha val="100000"/>
-                        </a:srgbClr>
-                      </a:solidFill>
-                    </a:lnT>
-                    <a:lnB w="12700" cap="flat">
-                      <a:solidFill>
-                        <a:srgbClr val="000000">
-                          <a:alpha val="100000"/>
-                        </a:srgbClr>
-                      </a:solidFill>
-                    </a:lnB>
-                    <a:solidFill>
-                      <a:srgbClr val="FFFFFF">
-                        <a:alpha val="100000"/>
-                      </a:srgbClr>
-                    </a:solidFill>
-                  </a:tcPr>
-                  <a:extLst>
-                    <a:ext uri="{0D108BD9-81ED-4DB2-BD59-A6C34878D82A}">
-                      <a16:rowId xmlns:a16="http://schemas.microsoft.com/office/drawing/2014/main" val="2661222183"/>
-                    </a:ext>
-                  </a:extLst>
-                </a:tc>
-              </a:tr>
-              <a:tr h="468000">
-                <a:tc rowSpan="1" gridSpan="1">
-                  <a:txBody>
-                    <a:bodyPr anchor="t"/>
-                    <a:lstStyle/>
-                    <a:p>
-                      <a:pPr marL="0" algn="l"/>
-                    </a:p>
-                  </a:txBody>
-                  <a:tcPr anchor="t">
-                    <a:lnL w="19050" cap="flat">
-                      <a:solidFill>
-                        <a:srgbClr val="000000">
-                          <a:alpha val="100000"/>
-                        </a:srgbClr>
-                      </a:solidFill>
-                    </a:lnL>
-                    <a:lnR w="12700" cap="flat">
-                      <a:solidFill>
-                        <a:srgbClr val="000000">
-                          <a:alpha val="100000"/>
-                        </a:srgbClr>
-                      </a:solidFill>
-                    </a:lnR>
-                    <a:lnT w="12700" cap="flat">
-                      <a:solidFill>
-                        <a:srgbClr val="000000">
-                          <a:alpha val="100000"/>
-                        </a:srgbClr>
-                      </a:solidFill>
-                    </a:lnT>
-                    <a:lnB w="19050" cap="flat">
-                      <a:solidFill>
-                        <a:srgbClr val="000000">
-                          <a:alpha val="100000"/>
-                        </a:srgbClr>
-                      </a:solidFill>
-                    </a:lnB>
-                    <a:solidFill>
-                      <a:srgbClr val="FFFFFF">
-                        <a:alpha val="100000"/>
-                      </a:srgbClr>
-                    </a:solidFill>
-                  </a:tcPr>
-                  <a:extLst>
-                    <a:ext uri="{0D108BD9-81ED-4DB2-BD59-A6C34878D82A}">
-                      <a16:rowId xmlns:a16="http://schemas.microsoft.com/office/drawing/2014/main" val="2661222183"/>
-                    </a:ext>
-                  </a:extLst>
-                </a:tc>
-                <a:tc rowSpan="1" gridSpan="1">
-                  <a:txBody>
-                    <a:bodyPr anchor="t"/>
-                    <a:lstStyle/>
-                    <a:p>
-                      <a:pPr marL="0" algn="l"/>
-                    </a:p>
-                  </a:txBody>
-                  <a:tcPr anchor="t">
-                    <a:lnL w="12700" cap="flat">
-                      <a:solidFill>
-                        <a:srgbClr val="000000">
-                          <a:alpha val="100000"/>
-                        </a:srgbClr>
-                      </a:solidFill>
-                    </a:lnL>
-                    <a:lnR w="19050" cap="flat">
-                      <a:solidFill>
-                        <a:srgbClr val="000000">
-                          <a:alpha val="100000"/>
-                        </a:srgbClr>
-                      </a:solidFill>
-                    </a:lnR>
-                    <a:lnT w="12700" cap="flat">
-                      <a:solidFill>
-                        <a:srgbClr val="000000">
-                          <a:alpha val="100000"/>
-                        </a:srgbClr>
-                      </a:solidFill>
-                    </a:lnT>
-                    <a:lnB w="19050" cap="flat">
-                      <a:solidFill>
-                        <a:srgbClr val="000000">
-                          <a:alpha val="100000"/>
-                        </a:srgbClr>
-                      </a:solidFill>
-                    </a:lnB>
-                    <a:solidFill>
-                      <a:srgbClr val="FFFFFF">
-                        <a:alpha val="100000"/>
-                      </a:srgbClr>
-                    </a:solidFill>
-                  </a:tcPr>
-                  <a:extLst>
-                    <a:ext uri="{0D108BD9-81ED-4DB2-BD59-A6C34878D82A}">
-                      <a16:rowId xmlns:a16="http://schemas.microsoft.com/office/drawing/2014/main" val="2661222183"/>
-                    </a:ext>
-                  </a:extLst>
-                </a:tc>
-              </a:tr>
-            </a:tbl>
-          </a:graphicData>
-        </a:graphic>
-      </p:graphicFrame>
-      <p:graphicFrame>
-        <p:nvGraphicFramePr>
-          <p:cNvPr id="15" name="表格2">
-            <a:extLst>
-              <a:ext uri="{FF2B5EF4-FFF2-40B4-BE49-F238E27FC236}">
-                <a16:creationId xmlns:a16="http://schemas.microsoft.com/office/drawing/2014/main" id="{62B2FBE6-5C8C-E811-489E-1440CA960B7D}"/>
-              </a:ext>
-            </a:extLst>
-          </p:cNvPr>
-          <p:cNvGraphicFramePr>
-            <a:graphicFrameLocks noGrp="1"/>
-          </p:cNvGraphicFramePr>
-          <p:nvPr>
-            <p:extLst>
-              <p:ext uri="{D42A27DB-BD31-4B8C-83A1-F6EECF244321}">
-                <p14:modId xmlns:p14="http://schemas.microsoft.com/office/powerpoint/2010/main" val="3345567701"/>
-              </p:ext>
-            </p:extLst>
-          </p:nvPr>
-        </p:nvGraphicFramePr>
-        <p:xfrm>
-          <a:off x="8233525" y="1269080"/>
+          <a:off x="4817840" y="2271036"/>
           <a:ext cx="2880000" cy="2880000"/>
         </p:xfrm>
         <a:graphic>
@@ -6044,7 +6117,23 @@
                     <a:bodyPr anchor="ctr"/>
                     <a:lstStyle/>
                     <a:p>
-                      <a:pPr marL="0" algn="ctr"/>
+                      <a:pPr marL="0" algn="ctr">
+                        <a:lnSpc>
+                          <a:spcPts val="4300"/>
+                        </a:lnSpc>
+                      </a:pPr>
+                      <a:r>
+                        <a:rPr lang="zh-CN" altLang="en-US" sz="3600" b="1" i="0" dirty="0">
+                          <a:solidFill>
+                            <a:srgbClr val="000000">
+                              <a:alpha val="100000"/>
+                            </a:srgbClr>
+                          </a:solidFill>
+                          <a:latin typeface="Times New Roman"/>
+                          <a:ea typeface="Times New Roman"/>
+                        </a:rPr>
+                        <a:t>2</a:t>
+                      </a:r>
                     </a:p>
                   </a:txBody>
                   <a:tcPr anchor="ctr">
@@ -6078,7 +6167,7 @@
                     </a:lnB>
                     <a:solidFill>
                       <a:srgbClr val="FFFFFF">
-                        <a:alpha val="0"/>
+                        <a:alpha val="100000"/>
                       </a:srgbClr>
                     </a:solidFill>
                   </a:tcPr>
@@ -6095,13 +6184,13 @@
       </p:graphicFrame>
       <p:sp>
         <p:nvSpPr>
-          <p:cNvPr id="16" name="文本4"/>
+          <p:cNvPr id="14" name="文本3"/>
           <p:cNvSpPr txBox="1"/>
           <p:nvPr/>
         </p:nvSpPr>
         <p:spPr>
           <a:xfrm>
-            <a:off x="11105214" y="1961082"/>
+            <a:off x="7689529" y="2963038"/>
             <a:ext cx="942456" cy="836831"/>
           </a:xfrm>
           <a:prstGeom prst="rect">
@@ -6115,7 +6204,7 @@
           <a:p>
             <a:pPr marL="0" algn="l">
               <a:lnSpc>
-                <a:spcPts val="4300"/>
+                <a:spcPts val="4600"/>
               </a:lnSpc>
             </a:pPr>
             <a:r>
@@ -6125,8 +6214,8 @@
                     <a:alpha val="100000"/>
                   </a:srgbClr>
                 </a:solidFill>
-                <a:latin typeface="楷体"/>
-                <a:ea typeface="楷体"/>
+                <a:latin typeface="Aa偷吃可爱长大的"/>
+                <a:ea typeface="Aa偷吃可爱长大的"/>
               </a:rPr>
               <a:t>行</a:t>
             </a:r>
@@ -6135,13 +6224,13 @@
       </p:sp>
       <p:sp>
         <p:nvSpPr>
-          <p:cNvPr id="17" name="文本5"/>
+          <p:cNvPr id="15" name="文本4"/>
           <p:cNvSpPr txBox="1"/>
           <p:nvPr/>
         </p:nvSpPr>
         <p:spPr>
           <a:xfrm>
-            <a:off x="8976320" y="541341"/>
+            <a:off x="5560635" y="1543297"/>
             <a:ext cx="942456" cy="836831"/>
           </a:xfrm>
           <a:prstGeom prst="rect">
@@ -6155,7 +6244,7 @@
           <a:p>
             <a:pPr marL="0" algn="l">
               <a:lnSpc>
-                <a:spcPts val="4300"/>
+                <a:spcPts val="4600"/>
               </a:lnSpc>
             </a:pPr>
             <a:r>
@@ -6165,8 +6254,8 @@
                     <a:alpha val="100000"/>
                   </a:srgbClr>
                 </a:solidFill>
-                <a:latin typeface="楷体"/>
-                <a:ea typeface="楷体"/>
+                <a:latin typeface="Aa偷吃可爱长大的"/>
+                <a:ea typeface="Aa偷吃可爱长大的"/>
               </a:rPr>
               <a:t>列</a:t>
             </a:r>
@@ -6175,13 +6264,13 @@
       </p:sp>
       <p:sp>
         <p:nvSpPr>
-          <p:cNvPr id="18" name="形状6"/>
+          <p:cNvPr id="16" name="形状6"/>
           <p:cNvSpPr txBox="1"/>
           <p:nvPr/>
         </p:nvSpPr>
         <p:spPr>
           <a:xfrm>
-            <a:off x="8232035" y="2708842"/>
+            <a:off x="4816350" y="3710798"/>
             <a:ext cx="1440000" cy="1440000"/>
           </a:xfrm>
           <a:prstGeom prst="rect"/>
@@ -6209,13 +6298,13 @@
       </p:sp>
       <p:sp>
         <p:nvSpPr>
-          <p:cNvPr id="19" name="文本6"/>
+          <p:cNvPr id="17" name="文本5"/>
           <p:cNvSpPr txBox="1"/>
           <p:nvPr/>
         </p:nvSpPr>
         <p:spPr>
           <a:xfrm>
-            <a:off x="8630898" y="4112497"/>
+            <a:off x="5215213" y="5114453"/>
             <a:ext cx="838434" cy="836831"/>
           </a:xfrm>
           <a:prstGeom prst="rect">
@@ -6229,7 +6318,7 @@
           <a:p>
             <a:pPr marL="0" algn="l">
               <a:lnSpc>
-                <a:spcPts val="4300"/>
+                <a:spcPts val="4600"/>
               </a:lnSpc>
             </a:pPr>
             <a:r>
@@ -6239,50 +6328,10 @@
                     <a:alpha val="100000"/>
                   </a:srgbClr>
                 </a:solidFill>
-                <a:latin typeface="楷体"/>
-                <a:ea typeface="楷体"/>
+                <a:latin typeface="Aa偷吃可爱长大的"/>
+                <a:ea typeface="Aa偷吃可爱长大的"/>
               </a:rPr>
               <a:t>宫</a:t>
-            </a:r>
-          </a:p>
-        </p:txBody>
-      </p:sp>
-      <p:sp>
-        <p:nvSpPr>
-          <p:cNvPr id="20" name="文本7"/>
-          <p:cNvSpPr txBox="1"/>
-          <p:nvPr/>
-        </p:nvSpPr>
-        <p:spPr>
-          <a:xfrm>
-            <a:off x="1599050" y="3557387"/>
-            <a:ext cx="6311180" cy="859337"/>
-          </a:xfrm>
-          <a:prstGeom prst="rect">
-            <a:avLst/>
-          </a:prstGeom>
-          <a:noFill/>
-        </p:spPr>
-        <p:txBody>
-          <a:bodyPr anchor="t"/>
-          <a:lstStyle/>
-          <a:p>
-            <a:pPr marL="0" algn="l">
-              <a:lnSpc>
-                <a:spcPts val="5200"/>
-              </a:lnSpc>
-            </a:pPr>
-            <a:r>
-              <a:rPr lang="zh-CN" altLang="en-US" sz="3600" b="0" i="0" dirty="0">
-                <a:solidFill>
-                  <a:srgbClr val="0000FF">
-                    <a:alpha val="100000"/>
-                  </a:srgbClr>
-                </a:solidFill>
-                <a:latin typeface="黑体"/>
-                <a:ea typeface="黑体"/>
-              </a:rPr>
-              <a:t>从题目中，你知道了什么？</a:t>
             </a:r>
           </a:p>
         </p:txBody>
@@ -6405,6 +6454,24 @@
                                   </p:childTnLst>
                                 </p:cTn>
                               </p:par>
+                            </p:childTnLst>
+                          </p:cTn>
+                        </p:par>
+                      </p:childTnLst>
+                    </p:cTn>
+                  </p:par>
+                  <p:par>
+                    <p:cTn id="16" fill="hold">
+                      <p:stCondLst>
+                        <p:cond delay="indefinite"/>
+                      </p:stCondLst>
+                      <p:childTnLst>
+                        <p:par>
+                          <p:cTn id="17" fill="hold">
+                            <p:stCondLst>
+                              <p:cond delay="0"/>
+                            </p:stCondLst>
+                            <p:childTnLst>
                               <p:par>
                                 <p:cTn id="15" presetID="10" presetClass="entr" presetSubtype="0" fill="hold" grpId="0" nodeType="clickEffect">
                                   <p:stCondLst>
@@ -6414,6 +6481,165 @@
                                     <p:set>
                                       <p:cBhvr>
                                         <p:cTn id="13" dur="1" fill="hold">
+                                          <p:stCondLst>
+                                            <p:cond delay="0"/>
+                                          </p:stCondLst>
+                                        </p:cTn>
+                                        <p:tgtEl>
+                                          <p:spTgt spid="14"/>
+                                        </p:tgtEl>
+                                        <p:attrNameLst>
+                                          <p:attrName>style.visibility</p:attrName>
+                                        </p:attrNameLst>
+                                      </p:cBhvr>
+                                      <p:to>
+                                        <p:strVal val="visible"/>
+                                      </p:to>
+                                    </p:set>
+                                    <p:animEffect transition="in" filter="fade">
+                                      <p:cBhvr>
+                                        <p:cTn id="14" dur="1"/>
+                                        <p:tgtEl>
+                                          <p:spTgt spid="14"/>
+                                        </p:tgtEl>
+                                      </p:cBhvr>
+                                    </p:animEffect>
+                                  </p:childTnLst>
+                                </p:cTn>
+                              </p:par>
+                            </p:childTnLst>
+                          </p:cTn>
+                        </p:par>
+                      </p:childTnLst>
+                    </p:cTn>
+                  </p:par>
+                  <p:par>
+                    <p:cTn id="21" fill="hold">
+                      <p:stCondLst>
+                        <p:cond delay="indefinite"/>
+                      </p:stCondLst>
+                      <p:childTnLst>
+                        <p:par>
+                          <p:cTn id="22" fill="hold">
+                            <p:stCondLst>
+                              <p:cond delay="0"/>
+                            </p:stCondLst>
+                            <p:childTnLst>
+                              <p:par>
+                                <p:cTn id="20" presetID="10" presetClass="entr" presetSubtype="0" fill="hold" grpId="0" nodeType="clickEffect">
+                                  <p:stCondLst>
+                                    <p:cond delay="0"/>
+                                  </p:stCondLst>
+                                  <p:childTnLst>
+                                    <p:set>
+                                      <p:cBhvr>
+                                        <p:cTn id="18" dur="1" fill="hold">
+                                          <p:stCondLst>
+                                            <p:cond delay="0"/>
+                                          </p:stCondLst>
+                                        </p:cTn>
+                                        <p:tgtEl>
+                                          <p:spTgt spid="11"/>
+                                        </p:tgtEl>
+                                        <p:attrNameLst>
+                                          <p:attrName>style.visibility</p:attrName>
+                                        </p:attrNameLst>
+                                      </p:cBhvr>
+                                      <p:to>
+                                        <p:strVal val="visible"/>
+                                      </p:to>
+                                    </p:set>
+                                    <p:animEffect transition="in" filter="fade">
+                                      <p:cBhvr>
+                                        <p:cTn id="19" dur="1"/>
+                                        <p:tgtEl>
+                                          <p:spTgt spid="11"/>
+                                        </p:tgtEl>
+                                      </p:cBhvr>
+                                    </p:animEffect>
+                                  </p:childTnLst>
+                                </p:cTn>
+                              </p:par>
+                            </p:childTnLst>
+                          </p:cTn>
+                        </p:par>
+                      </p:childTnLst>
+                    </p:cTn>
+                  </p:par>
+                  <p:par>
+                    <p:cTn id="26" fill="hold">
+                      <p:stCondLst>
+                        <p:cond delay="indefinite"/>
+                      </p:stCondLst>
+                      <p:childTnLst>
+                        <p:par>
+                          <p:cTn id="27" fill="hold">
+                            <p:stCondLst>
+                              <p:cond delay="0"/>
+                            </p:stCondLst>
+                            <p:childTnLst>
+                              <p:par>
+                                <p:cTn id="25" presetID="10" presetClass="entr" presetSubtype="0" fill="hold" grpId="0" nodeType="clickEffect">
+                                  <p:stCondLst>
+                                    <p:cond delay="0"/>
+                                  </p:stCondLst>
+                                  <p:childTnLst>
+                                    <p:set>
+                                      <p:cBhvr>
+                                        <p:cTn id="23" dur="1" fill="hold">
+                                          <p:stCondLst>
+                                            <p:cond delay="0"/>
+                                          </p:stCondLst>
+                                        </p:cTn>
+                                        <p:tgtEl>
+                                          <p:spTgt spid="15"/>
+                                        </p:tgtEl>
+                                        <p:attrNameLst>
+                                          <p:attrName>style.visibility</p:attrName>
+                                        </p:attrNameLst>
+                                      </p:cBhvr>
+                                      <p:to>
+                                        <p:strVal val="visible"/>
+                                      </p:to>
+                                    </p:set>
+                                    <p:animEffect transition="in" filter="fade">
+                                      <p:cBhvr>
+                                        <p:cTn id="24" dur="1"/>
+                                        <p:tgtEl>
+                                          <p:spTgt spid="15"/>
+                                        </p:tgtEl>
+                                      </p:cBhvr>
+                                    </p:animEffect>
+                                  </p:childTnLst>
+                                </p:cTn>
+                              </p:par>
+                            </p:childTnLst>
+                          </p:cTn>
+                        </p:par>
+                      </p:childTnLst>
+                    </p:cTn>
+                  </p:par>
+                  <p:par>
+                    <p:cTn id="31" fill="hold">
+                      <p:stCondLst>
+                        <p:cond delay="indefinite"/>
+                      </p:stCondLst>
+                      <p:childTnLst>
+                        <p:par>
+                          <p:cTn id="32" fill="hold">
+                            <p:stCondLst>
+                              <p:cond delay="0"/>
+                            </p:stCondLst>
+                            <p:childTnLst>
+                              <p:par>
+                                <p:cTn id="30" presetID="10" presetClass="entr" presetSubtype="0" fill="hold" grpId="0" nodeType="clickEffect">
+                                  <p:stCondLst>
+                                    <p:cond delay="0"/>
+                                  </p:stCondLst>
+                                  <p:childTnLst>
+                                    <p:set>
+                                      <p:cBhvr>
+                                        <p:cTn id="28" dur="1" fill="hold">
                                           <p:stCondLst>
                                             <p:cond delay="0"/>
                                           </p:stCondLst>
@@ -6431,7 +6657,7 @@
                                     </p:set>
                                     <p:animEffect transition="in" filter="fade">
                                       <p:cBhvr>
-                                        <p:cTn id="14" dur="1"/>
+                                        <p:cTn id="29" dur="1"/>
                                         <p:tgtEl>
                                           <p:spTgt spid="16"/>
                                         </p:tgtEl>
@@ -6447,61 +6673,26 @@
                     </p:cTn>
                   </p:par>
                   <p:par>
-                    <p:cTn id="19" fill="hold">
+                    <p:cTn id="36" fill="hold">
                       <p:stCondLst>
                         <p:cond delay="indefinite"/>
                       </p:stCondLst>
                       <p:childTnLst>
                         <p:par>
-                          <p:cTn id="20" fill="hold">
+                          <p:cTn id="37" fill="hold">
                             <p:stCondLst>
                               <p:cond delay="0"/>
                             </p:stCondLst>
                             <p:childTnLst>
                               <p:par>
-                                <p:cTn id="18" presetID="10" presetClass="entr" presetSubtype="0" fill="hold" grpId="0" nodeType="clickEffect">
+                                <p:cTn id="35" presetID="10" presetClass="entr" presetSubtype="0" fill="hold" grpId="0" nodeType="clickEffect">
                                   <p:stCondLst>
                                     <p:cond delay="0"/>
                                   </p:stCondLst>
                                   <p:childTnLst>
                                     <p:set>
                                       <p:cBhvr>
-                                        <p:cTn id="16" dur="1" fill="hold">
-                                          <p:stCondLst>
-                                            <p:cond delay="0"/>
-                                          </p:stCondLst>
-                                        </p:cTn>
-                                        <p:tgtEl>
-                                          <p:spTgt spid="11"/>
-                                        </p:tgtEl>
-                                        <p:attrNameLst>
-                                          <p:attrName>style.visibility</p:attrName>
-                                        </p:attrNameLst>
-                                      </p:cBhvr>
-                                      <p:to>
-                                        <p:strVal val="visible"/>
-                                      </p:to>
-                                    </p:set>
-                                    <p:animEffect transition="in" filter="fade">
-                                      <p:cBhvr>
-                                        <p:cTn id="17" dur="1"/>
-                                        <p:tgtEl>
-                                          <p:spTgt spid="11"/>
-                                        </p:tgtEl>
-                                      </p:cBhvr>
-                                    </p:animEffect>
-                                  </p:childTnLst>
-                                </p:cTn>
-                              </p:par>
-                              <p:par>
-                                <p:cTn id="23" presetID="10" presetClass="entr" presetSubtype="0" fill="hold" grpId="0" nodeType="clickEffect">
-                                  <p:stCondLst>
-                                    <p:cond delay="0"/>
-                                  </p:stCondLst>
-                                  <p:childTnLst>
-                                    <p:set>
-                                      <p:cBhvr>
-                                        <p:cTn id="21" dur="1" fill="hold">
+                                        <p:cTn id="33" dur="1" fill="hold">
                                           <p:stCondLst>
                                             <p:cond delay="0"/>
                                           </p:stCondLst>
@@ -6519,203 +6710,9 @@
                                     </p:set>
                                     <p:animEffect transition="in" filter="fade">
                                       <p:cBhvr>
-                                        <p:cTn id="22" dur="1"/>
+                                        <p:cTn id="34" dur="1"/>
                                         <p:tgtEl>
                                           <p:spTgt spid="17"/>
-                                        </p:tgtEl>
-                                      </p:cBhvr>
-                                    </p:animEffect>
-                                  </p:childTnLst>
-                                </p:cTn>
-                              </p:par>
-                            </p:childTnLst>
-                          </p:cTn>
-                        </p:par>
-                      </p:childTnLst>
-                    </p:cTn>
-                  </p:par>
-                  <p:par>
-                    <p:cTn id="27" fill="hold">
-                      <p:stCondLst>
-                        <p:cond delay="indefinite"/>
-                      </p:stCondLst>
-                      <p:childTnLst>
-                        <p:par>
-                          <p:cTn id="28" fill="hold">
-                            <p:stCondLst>
-                              <p:cond delay="0"/>
-                            </p:stCondLst>
-                            <p:childTnLst>
-                              <p:par>
-                                <p:cTn id="26" presetID="10" presetClass="entr" presetSubtype="0" fill="hold" grpId="0" nodeType="clickEffect">
-                                  <p:stCondLst>
-                                    <p:cond delay="0"/>
-                                  </p:stCondLst>
-                                  <p:childTnLst>
-                                    <p:set>
-                                      <p:cBhvr>
-                                        <p:cTn id="24" dur="1" fill="hold">
-                                          <p:stCondLst>
-                                            <p:cond delay="0"/>
-                                          </p:stCondLst>
-                                        </p:cTn>
-                                        <p:tgtEl>
-                                          <p:spTgt spid="18"/>
-                                        </p:tgtEl>
-                                        <p:attrNameLst>
-                                          <p:attrName>style.visibility</p:attrName>
-                                        </p:attrNameLst>
-                                      </p:cBhvr>
-                                      <p:to>
-                                        <p:strVal val="visible"/>
-                                      </p:to>
-                                    </p:set>
-                                    <p:animEffect transition="in" filter="fade">
-                                      <p:cBhvr>
-                                        <p:cTn id="25" dur="1"/>
-                                        <p:tgtEl>
-                                          <p:spTgt spid="18"/>
-                                        </p:tgtEl>
-                                      </p:cBhvr>
-                                    </p:animEffect>
-                                  </p:childTnLst>
-                                </p:cTn>
-                              </p:par>
-                              <p:par>
-                                <p:cTn id="31" presetID="10" presetClass="entr" presetSubtype="0" fill="hold" grpId="0" nodeType="clickEffect">
-                                  <p:stCondLst>
-                                    <p:cond delay="0"/>
-                                  </p:stCondLst>
-                                  <p:childTnLst>
-                                    <p:set>
-                                      <p:cBhvr>
-                                        <p:cTn id="29" dur="1" fill="hold">
-                                          <p:stCondLst>
-                                            <p:cond delay="0"/>
-                                          </p:stCondLst>
-                                        </p:cTn>
-                                        <p:tgtEl>
-                                          <p:spTgt spid="19"/>
-                                        </p:tgtEl>
-                                        <p:attrNameLst>
-                                          <p:attrName>style.visibility</p:attrName>
-                                        </p:attrNameLst>
-                                      </p:cBhvr>
-                                      <p:to>
-                                        <p:strVal val="visible"/>
-                                      </p:to>
-                                    </p:set>
-                                    <p:animEffect transition="in" filter="fade">
-                                      <p:cBhvr>
-                                        <p:cTn id="30" dur="1"/>
-                                        <p:tgtEl>
-                                          <p:spTgt spid="19"/>
-                                        </p:tgtEl>
-                                      </p:cBhvr>
-                                    </p:animEffect>
-                                  </p:childTnLst>
-                                </p:cTn>
-                              </p:par>
-                            </p:childTnLst>
-                          </p:cTn>
-                        </p:par>
-                      </p:childTnLst>
-                    </p:cTn>
-                  </p:par>
-                  <p:par>
-                    <p:cTn id="35" fill="hold">
-                      <p:stCondLst>
-                        <p:cond delay="indefinite"/>
-                      </p:stCondLst>
-                      <p:childTnLst>
-                        <p:par>
-                          <p:cTn id="36" fill="hold">
-                            <p:stCondLst>
-                              <p:cond delay="0"/>
-                            </p:stCondLst>
-                            <p:childTnLst>
-                              <p:par>
-                                <p:cTn id="34" presetID="10" presetClass="entr" presetSubtype="0" fill="hold" grpId="0" nodeType="clickEffect">
-                                  <p:stCondLst>
-                                    <p:cond delay="0"/>
-                                  </p:stCondLst>
-                                  <p:childTnLst>
-                                    <p:set>
-                                      <p:cBhvr>
-                                        <p:cTn id="32" dur="1" fill="hold">
-                                          <p:stCondLst>
-                                            <p:cond delay="0"/>
-                                          </p:stCondLst>
-                                        </p:cTn>
-                                        <p:tgtEl>
-                                          <p:spTgt spid="14"/>
-                                        </p:tgtEl>
-                                        <p:attrNameLst>
-                                          <p:attrName>style.visibility</p:attrName>
-                                        </p:attrNameLst>
-                                      </p:cBhvr>
-                                      <p:to>
-                                        <p:strVal val="visible"/>
-                                      </p:to>
-                                    </p:set>
-                                    <p:animEffect transition="in" filter="fade">
-                                      <p:cBhvr>
-                                        <p:cTn id="33" dur="300"/>
-                                        <p:tgtEl>
-                                          <p:spTgt spid="14"/>
-                                        </p:tgtEl>
-                                      </p:cBhvr>
-                                    </p:animEffect>
-                                  </p:childTnLst>
-                                </p:cTn>
-                              </p:par>
-                            </p:childTnLst>
-                          </p:cTn>
-                        </p:par>
-                      </p:childTnLst>
-                    </p:cTn>
-                  </p:par>
-                  <p:par>
-                    <p:cTn id="40" fill="hold">
-                      <p:stCondLst>
-                        <p:cond delay="indefinite"/>
-                      </p:stCondLst>
-                      <p:childTnLst>
-                        <p:par>
-                          <p:cTn id="41" fill="hold">
-                            <p:stCondLst>
-                              <p:cond delay="0"/>
-                            </p:stCondLst>
-                            <p:childTnLst>
-                              <p:par>
-                                <p:cTn id="39" presetID="22" presetClass="entr" presetSubtype="0" fill="hold" grpId="0" nodeType="clickEffect">
-                                  <p:stCondLst>
-                                    <p:cond delay="0"/>
-                                  </p:stCondLst>
-                                  <p:childTnLst>
-                                    <p:set>
-                                      <p:cBhvr>
-                                        <p:cTn id="37" dur="1" fill="hold">
-                                          <p:stCondLst>
-                                            <p:cond delay="0"/>
-                                          </p:stCondLst>
-                                        </p:cTn>
-                                        <p:tgtEl>
-                                          <p:spTgt spid="20"/>
-                                        </p:tgtEl>
-                                        <p:attrNameLst>
-                                          <p:attrName>style.visibility</p:attrName>
-                                        </p:attrNameLst>
-                                      </p:cBhvr>
-                                      <p:to>
-                                        <p:strVal val="visible"/>
-                                      </p:to>
-                                    </p:set>
-                                    <p:animEffect transition="in" filter="wipe(left)">
-                                      <p:cBhvr>
-                                        <p:cTn id="38" dur="500"/>
-                                        <p:tgtEl>
-                                          <p:spTgt spid="20"/>
                                         </p:tgtEl>
                                       </p:cBhvr>
                                     </p:animEffect>
@@ -6752,13 +6749,11 @@
     <p:bldLst>
       <p:bldP spid="9" grpId="0" animBg="1"/>
       <p:bldP spid="10" grpId="0" animBg="1"/>
+      <p:bldP spid="14" grpId="0" animBg="1"/>
+      <p:bldP spid="11" grpId="0" animBg="1"/>
+      <p:bldP spid="15" grpId="0" animBg="1"/>
       <p:bldP spid="16" grpId="0" animBg="1"/>
-      <p:bldP spid="11" grpId="0" animBg="1"/>
       <p:bldP spid="17" grpId="0" animBg="1"/>
-      <p:bldP spid="18" grpId="0" animBg="1"/>
-      <p:bldP spid="19" grpId="0" animBg="1"/>
-      <p:bldP spid="14" grpId="0" animBg="1"/>
-      <p:bldP spid="20" grpId="0" animBg="1"/>
     </p:bldLst>
   </p:timing>
 </p:sld>
@@ -7861,136 +7856,15 @@
           </p:txBody>
         </p:sp>
       </p:grpSp>
-      <p:pic>
-        <p:nvPicPr>
-          <p:cNvPr id="8" name="图片2">
-            <a:extLst>
-              <a:ext uri="{FF2B5EF4-FFF2-40B4-BE49-F238E27FC236}">
-                <a16:creationId xmlns:a16="http://schemas.microsoft.com/office/drawing/2014/main" id="{69ED34C6-1862-8A8A-03F9-2D1EFC8C3215}"/>
-              </a:ext>
-            </a:extLst>
-          </p:cNvPr>
-          <p:cNvPicPr>
-            <a:picLocks noChangeAspect="1"/>
-          </p:cNvPicPr>
-          <p:nvPr/>
-        </p:nvPicPr>
-        <p:blipFill>
-          <a:blip r:embed="rId3"/>
-          <a:stretch>
-            <a:fillRect/>
-          </a:stretch>
-        </p:blipFill>
-        <p:spPr>
-          <a:xfrm>
-            <a:off x="8945454" y="836712"/>
-            <a:ext cx="1903074" cy="2045185"/>
-          </a:xfrm>
-          <a:prstGeom prst="rect">
-            <a:avLst/>
-          </a:prstGeom>
-        </p:spPr>
-      </p:pic>
       <p:grpSp>
         <p:nvGrpSpPr>
-          <p:cNvPr id="9" name="组合2"/>
+          <p:cNvPr id="8" name="组合3"/>
           <p:cNvGrpSpPr/>
           <p:nvPr/>
         </p:nvGrpSpPr>
         <p:grpSpPr>
           <a:xfrm>
-            <a:off x="4082945" y="983700"/>
-            <a:ext cx="4949056" cy="729134"/>
-            <a:chOff x="0" y="0"/>
-            <a:chExt cx="4949056" cy="729134"/>
-          </a:xfrm>
-        </p:grpSpPr>
-        <p:sp>
-          <p:nvSpPr>
-            <p:cNvPr id="10" name="形状3"/>
-            <p:cNvSpPr txBox="1"/>
-            <p:nvPr/>
-          </p:nvSpPr>
-          <p:spPr>
-            <a:xfrm>
-              <a:off x="0" y="17979"/>
-              <a:ext cx="4949056" cy="646331"/>
-            </a:xfrm>
-            <a:prstGeom prst="wedgeRoundRectCallout"/>
-            <a:solidFill>
-              <a:srgbClr val="FFFFFF">
-                <a:alpha val="100000"/>
-              </a:srgbClr>
-            </a:solidFill>
-            <a:ln w="19050">
-              <a:solidFill>
-                <a:srgbClr val="3399FF">
-                  <a:alpha val="100000"/>
-                </a:srgbClr>
-              </a:solidFill>
-              <a:prstDash val="solid"/>
-              <a:headEnd type="none" w="med" len="med"/>
-              <a:tailEnd type="none" w="med" len="med"/>
-            </a:ln>
-          </p:spPr>
-          <p:txBody>
-            <a:bodyPr anchor="ctr"/>
-            <a:lstStyle/>
-            <a:p>
-              <a:pPr marL="0" algn="ctr"/>
-            </a:p>
-          </p:txBody>
-        </p:sp>
-        <p:sp>
-          <p:nvSpPr>
-            <p:cNvPr id="11" name="文本2"/>
-            <p:cNvSpPr txBox="1"/>
-            <p:nvPr/>
-          </p:nvSpPr>
-          <p:spPr>
-            <a:xfrm>
-              <a:off x="27741" y="0"/>
-              <a:ext cx="4885953" cy="729134"/>
-            </a:xfrm>
-            <a:prstGeom prst="rect">
-              <a:avLst/>
-            </a:prstGeom>
-            <a:noFill/>
-          </p:spPr>
-          <p:txBody>
-            <a:bodyPr anchor="t"/>
-            <a:lstStyle/>
-            <a:p>
-              <a:pPr marL="0" algn="l">
-                <a:lnSpc>
-                  <a:spcPts val="4200"/>
-                </a:lnSpc>
-              </a:pPr>
-              <a:r>
-                <a:rPr lang="zh-CN" altLang="en-US" sz="3200" b="1" i="0" dirty="0">
-                  <a:solidFill>
-                    <a:srgbClr val="000000">
-                      <a:alpha val="100000"/>
-                    </a:srgbClr>
-                  </a:solidFill>
-                  <a:latin typeface="楷体"/>
-                  <a:ea typeface="楷体"/>
-                </a:rPr>
-                <a:t>从哪里入手会比较好填？</a:t>
-              </a:r>
-            </a:p>
-          </p:txBody>
-        </p:sp>
-      </p:grpSp>
-      <p:grpSp>
-        <p:nvGrpSpPr>
-          <p:cNvPr id="12" name="组合3"/>
-          <p:cNvGrpSpPr/>
-          <p:nvPr/>
-        </p:nvGrpSpPr>
-        <p:grpSpPr>
-          <a:xfrm>
-            <a:off x="4872186" y="3496191"/>
+            <a:off x="4552026" y="2164280"/>
             <a:ext cx="6480720" cy="2360130"/>
             <a:chOff x="0" y="0"/>
             <a:chExt cx="6480720" cy="2360130"/>
@@ -7998,7 +7872,7 @@
         </p:grpSpPr>
         <p:sp>
           <p:nvSpPr>
-            <p:cNvPr id="13" name="形状4"/>
+            <p:cNvPr id="9" name="形状3"/>
             <p:cNvSpPr txBox="1"/>
             <p:nvPr/>
           </p:nvSpPr>
@@ -8034,14 +7908,14 @@
         </p:sp>
         <p:sp>
           <p:nvSpPr>
-            <p:cNvPr id="14" name="文本3"/>
+            <p:cNvPr id="10" name="文本2"/>
             <p:cNvSpPr txBox="1"/>
             <p:nvPr/>
           </p:nvSpPr>
           <p:spPr>
             <a:xfrm>
               <a:off x="111400" y="65680"/>
-              <a:ext cx="6250301" cy="2129711"/>
+              <a:ext cx="6250301" cy="1637348"/>
             </a:xfrm>
             <a:prstGeom prst="rect">
               <a:avLst/>
@@ -8052,58 +7926,46 @@
             <a:bodyPr anchor="ctr"/>
             <a:lstStyle/>
             <a:p>
-              <a:pPr marL="0" algn="l">
-                <a:lnSpc>
-                  <a:spcPts val="4600"/>
-                </a:lnSpc>
-              </a:pPr>
+              <a:pPr marL="0" algn="l"/>
               <a:r>
-                <a:rPr lang="zh-CN" altLang="en-US" sz="3200" b="1" i="0" dirty="0">
+                <a:rPr lang="zh-CN" altLang="en-US" sz="3099" b="1" i="0" dirty="0">
                   <a:solidFill>
                     <a:srgbClr val="3333CC">
                       <a:alpha val="100000"/>
                     </a:srgbClr>
                   </a:solidFill>
-                  <a:latin typeface="等线"/>
-                  <a:ea typeface="等线"/>
+                  <a:latin typeface="Aa偷吃可爱长大的"/>
+                  <a:ea typeface="Aa偷吃可爱长大的"/>
                 </a:rPr>
                 <a:t>活动要求：</a:t>
               </a:r>
             </a:p>
             <a:p>
-              <a:pPr marL="0" algn="l">
-                <a:lnSpc>
-                  <a:spcPts val="4600"/>
-                </a:lnSpc>
-              </a:pPr>
+              <a:pPr marL="0" algn="l"/>
               <a:r>
-                <a:rPr lang="zh-CN" altLang="en-US" sz="3200" b="1" i="0" dirty="0">
+                <a:rPr lang="zh-CN" altLang="en-US" sz="3099" b="1" i="0" dirty="0">
                   <a:solidFill>
                     <a:srgbClr val="3333CC">
                       <a:alpha val="100000"/>
                     </a:srgbClr>
                   </a:solidFill>
-                  <a:latin typeface="等线"/>
-                  <a:ea typeface="等线"/>
+                  <a:latin typeface="Aa偷吃可爱长大的"/>
+                  <a:ea typeface="Aa偷吃可爱长大的"/>
                 </a:rPr>
                 <a:t>用你的方法尝试推理，填一填。</a:t>
               </a:r>
             </a:p>
             <a:p>
-              <a:pPr marL="0" algn="l">
-                <a:lnSpc>
-                  <a:spcPts val="4600"/>
-                </a:lnSpc>
-              </a:pPr>
+              <a:pPr marL="0" algn="l"/>
               <a:r>
-                <a:rPr lang="zh-CN" altLang="en-US" sz="3200" b="1" i="0" dirty="0">
+                <a:rPr lang="zh-CN" altLang="en-US" sz="3099" b="1" i="0" dirty="0">
                   <a:solidFill>
                     <a:srgbClr val="3333CC">
                       <a:alpha val="100000"/>
                     </a:srgbClr>
                   </a:solidFill>
-                  <a:latin typeface="等线"/>
-                  <a:ea typeface="等线"/>
+                  <a:latin typeface="Aa偷吃可爱长大的"/>
+                  <a:ea typeface="Aa偷吃可爱长大的"/>
                 </a:rPr>
                 <a:t>注意黑板上的规则和方法</a:t>
               </a:r>
@@ -8142,7 +8004,7 @@
                             </p:stCondLst>
                             <p:childTnLst>
                               <p:par>
-                                <p:cTn id="5" presetID="22" presetClass="entr" presetSubtype="0" fill="hold" grpId="0" nodeType="clickEffect">
+                                <p:cTn id="5" presetID="10" presetClass="entr" presetSubtype="0" fill="hold" grpId="0" nodeType="clickEffect">
                                   <p:stCondLst>
                                     <p:cond delay="0"/>
                                   </p:stCondLst>
@@ -8155,60 +8017,7 @@
                                           </p:stCondLst>
                                         </p:cTn>
                                         <p:tgtEl>
-                                          <p:spTgt spid="9"/>
-                                        </p:tgtEl>
-                                        <p:attrNameLst>
-                                          <p:attrName>style.visibility</p:attrName>
-                                        </p:attrNameLst>
-                                      </p:cBhvr>
-                                      <p:to>
-                                        <p:strVal val="visible"/>
-                                      </p:to>
-                                    </p:set>
-                                    <p:animEffect transition="in" filter="wipe(right)">
-                                      <p:cBhvr>
-                                        <p:cTn id="4" dur="500"/>
-                                        <p:tgtEl>
-                                          <p:spTgt spid="9"/>
-                                        </p:tgtEl>
-                                      </p:cBhvr>
-                                    </p:animEffect>
-                                  </p:childTnLst>
-                                </p:cTn>
-                              </p:par>
-                            </p:childTnLst>
-                          </p:cTn>
-                        </p:par>
-                      </p:childTnLst>
-                    </p:cTn>
-                  </p:par>
-                  <p:par>
-                    <p:cTn id="11" fill="hold">
-                      <p:stCondLst>
-                        <p:cond delay="indefinite"/>
-                      </p:stCondLst>
-                      <p:childTnLst>
-                        <p:par>
-                          <p:cTn id="12" fill="hold">
-                            <p:stCondLst>
-                              <p:cond delay="0"/>
-                            </p:stCondLst>
-                            <p:childTnLst>
-                              <p:par>
-                                <p:cTn id="10" presetID="10" presetClass="entr" presetSubtype="0" fill="hold" grpId="0" nodeType="clickEffect">
-                                  <p:stCondLst>
-                                    <p:cond delay="0"/>
-                                  </p:stCondLst>
-                                  <p:childTnLst>
-                                    <p:set>
-                                      <p:cBhvr>
-                                        <p:cTn id="8" dur="1" fill="hold">
-                                          <p:stCondLst>
-                                            <p:cond delay="0"/>
-                                          </p:stCondLst>
-                                        </p:cTn>
-                                        <p:tgtEl>
-                                          <p:spTgt spid="12"/>
+                                          <p:spTgt spid="8"/>
                                         </p:tgtEl>
                                         <p:attrNameLst>
                                           <p:attrName>style.visibility</p:attrName>
@@ -8220,9 +8029,9 @@
                                     </p:set>
                                     <p:animEffect transition="in" filter="fade">
                                       <p:cBhvr>
-                                        <p:cTn id="9" dur="1"/>
+                                        <p:cTn id="4" dur="1"/>
                                         <p:tgtEl>
-                                          <p:spTgt spid="12"/>
+                                          <p:spTgt spid="8"/>
                                         </p:tgtEl>
                                       </p:cBhvr>
                                     </p:animEffect>
@@ -8257,1124 +8066,13 @@
       </p:par>
     </p:tnLst>
     <p:bldLst>
-      <p:bldP spid="9" grpId="0" animBg="1"/>
-      <p:bldP spid="12" grpId="0" animBg="1"/>
+      <p:bldP spid="8" grpId="0" animBg="1"/>
     </p:bldLst>
   </p:timing>
 </p:sld>
 </file>
 
 <file path=ppt/slides/slide6.xml><?xml version="1.0" encoding="utf-8"?>
-<p:sld xmlns:p14="http://schemas.microsoft.com/office/powerpoint/2010/main" xmlns:a="http://schemas.openxmlformats.org/drawingml/2006/main" xmlns:r="http://schemas.openxmlformats.org/officeDocument/2006/relationships" xmlns:p="http://schemas.openxmlformats.org/presentationml/2006/main">
-  <p:cSld>
-    <p:bg>
-      <p:bgPr>
-        <a:solidFill>
-          <a:srgbClr val="FFFFFF">
-            <a:alpha val="100000"/>
-          </a:srgbClr>
-        </a:solidFill>
-      </p:bgPr>
-    </p:bg>
-    <p:spTree>
-      <p:nvGrpSpPr>
-        <p:cNvPr id="1" name=""/>
-        <p:cNvGrpSpPr/>
-        <p:nvPr/>
-      </p:nvGrpSpPr>
-      <p:grpSpPr>
-        <a:xfrm>
-          <a:off x="0" y="0"/>
-          <a:ext cx="0" cy="0"/>
-          <a:chOff x="0" y="0"/>
-          <a:chExt cx="0" cy="0"/>
-        </a:xfrm>
-      </p:grpSpPr>
-      <p:sp>
-        <p:nvSpPr>
-          <p:cNvPr id="2" name="形状1"/>
-          <p:cNvSpPr txBox="1"/>
-          <p:nvPr/>
-        </p:nvSpPr>
-        <p:spPr>
-          <a:xfrm>
-            <a:off x="0" y="4233"/>
-            <a:ext cx="12192000" cy="6858000"/>
-          </a:xfrm>
-          <a:prstGeom prst="rect"/>
-          <a:solidFill>
-            <a:srgbClr val="22C0C4">
-              <a:alpha val="100000"/>
-            </a:srgbClr>
-          </a:solidFill>
-          <a:ln w="9525">
-            <a:solidFill>
-              <a:srgbClr val="FFFFFF">
-                <a:alpha val="0"/>
-              </a:srgbClr>
-            </a:solidFill>
-          </a:ln>
-        </p:spPr>
-        <p:txBody>
-          <a:bodyPr anchor="ctr"/>
-          <a:lstStyle/>
-          <a:p>
-            <a:pPr marL="0" algn="ctr"/>
-          </a:p>
-        </p:txBody>
-      </p:sp>
-      <p:pic>
-        <p:nvPicPr>
-          <p:cNvPr id="3" name="图片1">
-            <a:extLst>
-              <a:ext uri="{FF2B5EF4-FFF2-40B4-BE49-F238E27FC236}">
-                <a16:creationId xmlns:a16="http://schemas.microsoft.com/office/drawing/2014/main" id="{69ED34C6-1862-8A8A-03F9-2D1EFC8C3215}"/>
-              </a:ext>
-            </a:extLst>
-          </p:cNvPr>
-          <p:cNvPicPr>
-            <a:picLocks noChangeAspect="1"/>
-          </p:cNvPicPr>
-          <p:nvPr/>
-        </p:nvPicPr>
-        <p:blipFill>
-          <a:blip r:embed="rId2"/>
-          <a:stretch>
-            <a:fillRect/>
-          </a:stretch>
-        </p:blipFill>
-        <p:spPr>
-          <a:xfrm>
-            <a:off x="95252" y="-162984"/>
-            <a:ext cx="12323233" cy="7217835"/>
-          </a:xfrm>
-          <a:prstGeom prst="rect">
-            <a:avLst/>
-          </a:prstGeom>
-        </p:spPr>
-      </p:pic>
-      <p:grpSp>
-        <p:nvGrpSpPr>
-          <p:cNvPr id="4" name="组合1"/>
-          <p:cNvGrpSpPr/>
-          <p:nvPr/>
-        </p:nvGrpSpPr>
-        <p:grpSpPr>
-          <a:xfrm>
-            <a:off x="372170" y="620526"/>
-            <a:ext cx="2539835" cy="867026"/>
-            <a:chOff x="0" y="0"/>
-            <a:chExt cx="2539835" cy="867026"/>
-          </a:xfrm>
-        </p:grpSpPr>
-        <p:sp>
-          <p:nvSpPr>
-            <p:cNvPr id="5" name="形状2"/>
-            <p:cNvSpPr txBox="1"/>
-            <p:nvPr/>
-          </p:nvSpPr>
-          <p:spPr>
-            <a:xfrm>
-              <a:off x="89602" y="34775"/>
-              <a:ext cx="2450233" cy="832251"/>
-            </a:xfrm>
-            <a:prstGeom prst="roundRect"/>
-            <a:solidFill>
-              <a:srgbClr val="FAE7A0">
-                <a:alpha val="100000"/>
-              </a:srgbClr>
-            </a:solidFill>
-            <a:ln w="9525">
-              <a:solidFill>
-                <a:srgbClr val="FFFFFF">
-                  <a:alpha val="0"/>
-                </a:srgbClr>
-              </a:solidFill>
-            </a:ln>
-          </p:spPr>
-          <p:txBody>
-            <a:bodyPr anchor="ctr"/>
-            <a:lstStyle/>
-            <a:p>
-              <a:pPr marL="0" algn="ctr"/>
-            </a:p>
-          </p:txBody>
-        </p:sp>
-        <p:sp>
-          <p:nvSpPr>
-            <p:cNvPr id="6" name="文本1"/>
-            <p:cNvSpPr txBox="1"/>
-            <p:nvPr/>
-          </p:nvSpPr>
-          <p:spPr>
-            <a:xfrm>
-              <a:off x="0" y="0"/>
-              <a:ext cx="2450233" cy="802742"/>
-            </a:xfrm>
-            <a:prstGeom prst="rect">
-              <a:avLst/>
-            </a:prstGeom>
-            <a:noFill/>
-          </p:spPr>
-          <p:txBody>
-            <a:bodyPr anchor="ctr"/>
-            <a:lstStyle/>
-            <a:p>
-              <a:pPr marL="0" algn="ctr">
-                <a:lnSpc>
-                  <a:spcPts val="4800"/>
-                </a:lnSpc>
-              </a:pPr>
-              <a:r>
-                <a:rPr lang="zh-CN" altLang="en-US" sz="4000" b="1" i="0" dirty="0">
-                  <a:solidFill>
-                    <a:srgbClr val="037FB7">
-                      <a:alpha val="100000"/>
-                    </a:srgbClr>
-                  </a:solidFill>
-                  <a:latin typeface="宋体"/>
-                  <a:ea typeface="宋体"/>
-                </a:rPr>
-                <a:t>试一试</a:t>
-              </a:r>
-            </a:p>
-          </p:txBody>
-        </p:sp>
-      </p:grpSp>
-      <p:graphicFrame>
-        <p:nvGraphicFramePr>
-          <p:cNvPr id="7" name="表格1">
-            <a:extLst>
-              <a:ext uri="{FF2B5EF4-FFF2-40B4-BE49-F238E27FC236}">
-                <a16:creationId xmlns:a16="http://schemas.microsoft.com/office/drawing/2014/main" id="{62B2FBE6-5C8C-E811-489E-1440CA960B7D}"/>
-              </a:ext>
-            </a:extLst>
-          </p:cNvPr>
-          <p:cNvGraphicFramePr>
-            <a:graphicFrameLocks noGrp="1"/>
-          </p:cNvGraphicFramePr>
-          <p:nvPr>
-            <p:extLst>
-              <p:ext uri="{D42A27DB-BD31-4B8C-83A1-F6EECF244321}">
-                <p14:modId xmlns:p14="http://schemas.microsoft.com/office/powerpoint/2010/main" val="3345567701"/>
-              </p:ext>
-            </p:extLst>
-          </p:nvPr>
-        </p:nvGraphicFramePr>
-        <p:xfrm>
-          <a:off x="4537805" y="2254701"/>
-          <a:ext cx="3118123" cy="3118523"/>
-        </p:xfrm>
-        <a:graphic>
-          <a:graphicData uri="http://schemas.openxmlformats.org/drawingml/2006/table">
-            <a:tbl>
-              <a:tblPr firstRow="1" bandRow="1">
-                <a:tableStyleId>{5C22544A-7EE6-4342-B048-85BDC9FD1C3A}</a:tableStyleId>
-              </a:tblPr>
-              <a:tblGrid>
-                <a:gridCol w="779531">
-                  <a:extLst>
-                    <a:ext uri="{9D8B030D-6E8A-4147-A177-3AD203B41FA5}">
-                      <a16:colId xmlns:a16="http://schemas.microsoft.com/office/drawing/2014/main" val="2854172943"/>
-                    </a:ext>
-                  </a:extLst>
-                </a:gridCol>
-                <a:gridCol w="779531">
-                  <a:extLst>
-                    <a:ext uri="{9D8B030D-6E8A-4147-A177-3AD203B41FA5}">
-                      <a16:colId xmlns:a16="http://schemas.microsoft.com/office/drawing/2014/main" val="2854172943"/>
-                    </a:ext>
-                  </a:extLst>
-                </a:gridCol>
-                <a:gridCol w="779531">
-                  <a:extLst>
-                    <a:ext uri="{9D8B030D-6E8A-4147-A177-3AD203B41FA5}">
-                      <a16:colId xmlns:a16="http://schemas.microsoft.com/office/drawing/2014/main" val="2854172943"/>
-                    </a:ext>
-                  </a:extLst>
-                </a:gridCol>
-                <a:gridCol w="779531">
-                  <a:extLst>
-                    <a:ext uri="{9D8B030D-6E8A-4147-A177-3AD203B41FA5}">
-                      <a16:colId xmlns:a16="http://schemas.microsoft.com/office/drawing/2014/main" val="2854172943"/>
-                    </a:ext>
-                  </a:extLst>
-                </a:gridCol>
-              </a:tblGrid>
-              <a:tr h="779631">
-                <a:tc rowSpan="1" gridSpan="1">
-                  <a:txBody>
-                    <a:bodyPr anchor="ctr"/>
-                    <a:lstStyle/>
-                    <a:p>
-                      <a:pPr marL="0" algn="ctr">
-                        <a:lnSpc>
-                          <a:spcPts val="4300"/>
-                        </a:lnSpc>
-                      </a:pPr>
-                      <a:r>
-                        <a:rPr lang="zh-CN" altLang="en-US" sz="3600" b="1" i="0" dirty="0">
-                          <a:solidFill>
-                            <a:srgbClr val="000000">
-                              <a:alpha val="100000"/>
-                            </a:srgbClr>
-                          </a:solidFill>
-                          <a:latin typeface="Times New Roman"/>
-                          <a:ea typeface="Times New Roman"/>
-                        </a:rPr>
-                        <a:t>1</a:t>
-                      </a:r>
-                    </a:p>
-                  </a:txBody>
-                  <a:tcPr anchor="ctr">
-                    <a:lnL w="28575" cap="flat">
-                      <a:solidFill>
-                        <a:srgbClr val="000000">
-                          <a:alpha val="100000"/>
-                        </a:srgbClr>
-                      </a:solidFill>
-                    </a:lnL>
-                    <a:lnR w="12700" cap="flat">
-                      <a:solidFill>
-                        <a:srgbClr val="000000">
-                          <a:alpha val="100000"/>
-                        </a:srgbClr>
-                      </a:solidFill>
-                    </a:lnR>
-                    <a:lnT w="28575" cap="flat">
-                      <a:solidFill>
-                        <a:srgbClr val="000000">
-                          <a:alpha val="100000"/>
-                        </a:srgbClr>
-                      </a:solidFill>
-                    </a:lnT>
-                    <a:lnB w="12700" cap="flat">
-                      <a:solidFill>
-                        <a:srgbClr val="000000">
-                          <a:alpha val="100000"/>
-                        </a:srgbClr>
-                      </a:solidFill>
-                    </a:lnB>
-                    <a:solidFill>
-                      <a:srgbClr val="FFFFFF">
-                        <a:alpha val="100000"/>
-                      </a:srgbClr>
-                    </a:solidFill>
-                  </a:tcPr>
-                  <a:extLst>
-                    <a:ext uri="{0D108BD9-81ED-4DB2-BD59-A6C34878D82A}">
-                      <a16:rowId xmlns:a16="http://schemas.microsoft.com/office/drawing/2014/main" val="2661222183"/>
-                    </a:ext>
-                  </a:extLst>
-                </a:tc>
-                <a:tc rowSpan="1" gridSpan="1">
-                  <a:txBody>
-                    <a:bodyPr anchor="t"/>
-                    <a:lstStyle/>
-                    <a:p>
-                      <a:pPr marL="0" algn="l"/>
-                    </a:p>
-                  </a:txBody>
-                  <a:tcPr anchor="t">
-                    <a:lnL w="12700" cap="flat">
-                      <a:solidFill>
-                        <a:srgbClr val="000000">
-                          <a:alpha val="100000"/>
-                        </a:srgbClr>
-                      </a:solidFill>
-                    </a:lnL>
-                    <a:lnR w="28575" cap="flat">
-                      <a:solidFill>
-                        <a:srgbClr val="000000">
-                          <a:alpha val="100000"/>
-                        </a:srgbClr>
-                      </a:solidFill>
-                    </a:lnR>
-                    <a:lnT w="28575" cap="flat">
-                      <a:solidFill>
-                        <a:srgbClr val="000000">
-                          <a:alpha val="100000"/>
-                        </a:srgbClr>
-                      </a:solidFill>
-                    </a:lnT>
-                    <a:lnB w="12700" cap="flat">
-                      <a:solidFill>
-                        <a:srgbClr val="000000">
-                          <a:alpha val="100000"/>
-                        </a:srgbClr>
-                      </a:solidFill>
-                    </a:lnB>
-                    <a:solidFill>
-                      <a:srgbClr val="FFFFFF">
-                        <a:alpha val="100000"/>
-                      </a:srgbClr>
-                    </a:solidFill>
-                  </a:tcPr>
-                  <a:extLst>
-                    <a:ext uri="{0D108BD9-81ED-4DB2-BD59-A6C34878D82A}">
-                      <a16:rowId xmlns:a16="http://schemas.microsoft.com/office/drawing/2014/main" val="2661222183"/>
-                    </a:ext>
-                  </a:extLst>
-                </a:tc>
-                <a:tc rowSpan="1" gridSpan="1">
-                  <a:txBody>
-                    <a:bodyPr anchor="t"/>
-                    <a:lstStyle/>
-                    <a:p>
-                      <a:pPr marL="0" algn="l"/>
-                    </a:p>
-                  </a:txBody>
-                  <a:tcPr anchor="t">
-                    <a:lnL w="28575" cap="flat">
-                      <a:solidFill>
-                        <a:srgbClr val="000000">
-                          <a:alpha val="100000"/>
-                        </a:srgbClr>
-                      </a:solidFill>
-                    </a:lnL>
-                    <a:lnR w="12700" cap="flat">
-                      <a:solidFill>
-                        <a:srgbClr val="000000">
-                          <a:alpha val="100000"/>
-                        </a:srgbClr>
-                      </a:solidFill>
-                    </a:lnR>
-                    <a:lnT w="28575" cap="flat">
-                      <a:solidFill>
-                        <a:srgbClr val="000000">
-                          <a:alpha val="100000"/>
-                        </a:srgbClr>
-                      </a:solidFill>
-                    </a:lnT>
-                    <a:lnB w="12700" cap="flat">
-                      <a:solidFill>
-                        <a:srgbClr val="000000">
-                          <a:alpha val="100000"/>
-                        </a:srgbClr>
-                      </a:solidFill>
-                    </a:lnB>
-                    <a:solidFill>
-                      <a:srgbClr val="FFFFFF">
-                        <a:alpha val="100000"/>
-                      </a:srgbClr>
-                    </a:solidFill>
-                  </a:tcPr>
-                  <a:extLst>
-                    <a:ext uri="{0D108BD9-81ED-4DB2-BD59-A6C34878D82A}">
-                      <a16:rowId xmlns:a16="http://schemas.microsoft.com/office/drawing/2014/main" val="2661222183"/>
-                    </a:ext>
-                  </a:extLst>
-                </a:tc>
-                <a:tc rowSpan="1" gridSpan="1">
-                  <a:txBody>
-                    <a:bodyPr anchor="t"/>
-                    <a:lstStyle/>
-                    <a:p>
-                      <a:pPr marL="0" algn="l"/>
-                    </a:p>
-                  </a:txBody>
-                  <a:tcPr anchor="t">
-                    <a:lnL w="12700" cap="flat">
-                      <a:solidFill>
-                        <a:srgbClr val="000000">
-                          <a:alpha val="100000"/>
-                        </a:srgbClr>
-                      </a:solidFill>
-                    </a:lnL>
-                    <a:lnR w="28575" cap="flat">
-                      <a:solidFill>
-                        <a:srgbClr val="000000">
-                          <a:alpha val="100000"/>
-                        </a:srgbClr>
-                      </a:solidFill>
-                    </a:lnR>
-                    <a:lnT w="28575" cap="flat">
-                      <a:solidFill>
-                        <a:srgbClr val="000000">
-                          <a:alpha val="100000"/>
-                        </a:srgbClr>
-                      </a:solidFill>
-                    </a:lnT>
-                    <a:lnB w="12700" cap="flat">
-                      <a:solidFill>
-                        <a:srgbClr val="000000">
-                          <a:alpha val="100000"/>
-                        </a:srgbClr>
-                      </a:solidFill>
-                    </a:lnB>
-                    <a:solidFill>
-                      <a:srgbClr val="FFFFFF">
-                        <a:alpha val="100000"/>
-                      </a:srgbClr>
-                    </a:solidFill>
-                  </a:tcPr>
-                  <a:extLst>
-                    <a:ext uri="{0D108BD9-81ED-4DB2-BD59-A6C34878D82A}">
-                      <a16:rowId xmlns:a16="http://schemas.microsoft.com/office/drawing/2014/main" val="2661222183"/>
-                    </a:ext>
-                  </a:extLst>
-                </a:tc>
-              </a:tr>
-              <a:tr h="779630">
-                <a:tc rowSpan="1" gridSpan="1">
-                  <a:txBody>
-                    <a:bodyPr anchor="t"/>
-                    <a:lstStyle/>
-                    <a:p>
-                      <a:pPr marL="0" algn="ctr"/>
-                    </a:p>
-                  </a:txBody>
-                  <a:tcPr anchor="t">
-                    <a:lnL w="28575" cap="flat">
-                      <a:solidFill>
-                        <a:srgbClr val="000000">
-                          <a:alpha val="100000"/>
-                        </a:srgbClr>
-                      </a:solidFill>
-                    </a:lnL>
-                    <a:lnR w="12700" cap="flat">
-                      <a:solidFill>
-                        <a:srgbClr val="000000">
-                          <a:alpha val="100000"/>
-                        </a:srgbClr>
-                      </a:solidFill>
-                    </a:lnR>
-                    <a:lnT w="12700" cap="flat">
-                      <a:solidFill>
-                        <a:srgbClr val="000000">
-                          <a:alpha val="100000"/>
-                        </a:srgbClr>
-                      </a:solidFill>
-                    </a:lnT>
-                    <a:lnB w="28575" cap="flat">
-                      <a:solidFill>
-                        <a:srgbClr val="000000">
-                          <a:alpha val="100000"/>
-                        </a:srgbClr>
-                      </a:solidFill>
-                    </a:lnB>
-                    <a:solidFill>
-                      <a:srgbClr val="FFFFFF">
-                        <a:alpha val="100000"/>
-                      </a:srgbClr>
-                    </a:solidFill>
-                  </a:tcPr>
-                  <a:extLst>
-                    <a:ext uri="{0D108BD9-81ED-4DB2-BD59-A6C34878D82A}">
-                      <a16:rowId xmlns:a16="http://schemas.microsoft.com/office/drawing/2014/main" val="2661222183"/>
-                    </a:ext>
-                  </a:extLst>
-                </a:tc>
-                <a:tc rowSpan="1" gridSpan="1">
-                  <a:txBody>
-                    <a:bodyPr anchor="t"/>
-                    <a:lstStyle/>
-                    <a:p>
-                      <a:pPr marL="0" algn="l"/>
-                    </a:p>
-                  </a:txBody>
-                  <a:tcPr anchor="t">
-                    <a:lnL w="12700" cap="flat">
-                      <a:solidFill>
-                        <a:srgbClr val="000000">
-                          <a:alpha val="100000"/>
-                        </a:srgbClr>
-                      </a:solidFill>
-                    </a:lnL>
-                    <a:lnR w="28575" cap="flat">
-                      <a:solidFill>
-                        <a:srgbClr val="000000">
-                          <a:alpha val="100000"/>
-                        </a:srgbClr>
-                      </a:solidFill>
-                    </a:lnR>
-                    <a:lnT w="12700" cap="flat">
-                      <a:solidFill>
-                        <a:srgbClr val="000000">
-                          <a:alpha val="100000"/>
-                        </a:srgbClr>
-                      </a:solidFill>
-                    </a:lnT>
-                    <a:lnB w="28575" cap="flat">
-                      <a:solidFill>
-                        <a:srgbClr val="000000">
-                          <a:alpha val="100000"/>
-                        </a:srgbClr>
-                      </a:solidFill>
-                    </a:lnB>
-                    <a:solidFill>
-                      <a:srgbClr val="FFFFFF">
-                        <a:alpha val="100000"/>
-                      </a:srgbClr>
-                    </a:solidFill>
-                  </a:tcPr>
-                  <a:extLst>
-                    <a:ext uri="{0D108BD9-81ED-4DB2-BD59-A6C34878D82A}">
-                      <a16:rowId xmlns:a16="http://schemas.microsoft.com/office/drawing/2014/main" val="2661222183"/>
-                    </a:ext>
-                  </a:extLst>
-                </a:tc>
-                <a:tc rowSpan="1" gridSpan="1">
-                  <a:txBody>
-                    <a:bodyPr anchor="t"/>
-                    <a:lstStyle/>
-                    <a:p>
-                      <a:pPr marL="0" algn="l"/>
-                    </a:p>
-                  </a:txBody>
-                  <a:tcPr anchor="t">
-                    <a:lnL w="28575" cap="flat">
-                      <a:solidFill>
-                        <a:srgbClr val="000000">
-                          <a:alpha val="100000"/>
-                        </a:srgbClr>
-                      </a:solidFill>
-                    </a:lnL>
-                    <a:lnR w="12700" cap="flat">
-                      <a:solidFill>
-                        <a:srgbClr val="000000">
-                          <a:alpha val="100000"/>
-                        </a:srgbClr>
-                      </a:solidFill>
-                    </a:lnR>
-                    <a:lnT w="12700" cap="flat">
-                      <a:solidFill>
-                        <a:srgbClr val="000000">
-                          <a:alpha val="100000"/>
-                        </a:srgbClr>
-                      </a:solidFill>
-                    </a:lnT>
-                    <a:lnB w="28575" cap="flat">
-                      <a:solidFill>
-                        <a:srgbClr val="000000">
-                          <a:alpha val="100000"/>
-                        </a:srgbClr>
-                      </a:solidFill>
-                    </a:lnB>
-                    <a:solidFill>
-                      <a:srgbClr val="FFFFFF">
-                        <a:alpha val="100000"/>
-                      </a:srgbClr>
-                    </a:solidFill>
-                  </a:tcPr>
-                  <a:extLst>
-                    <a:ext uri="{0D108BD9-81ED-4DB2-BD59-A6C34878D82A}">
-                      <a16:rowId xmlns:a16="http://schemas.microsoft.com/office/drawing/2014/main" val="2661222183"/>
-                    </a:ext>
-                  </a:extLst>
-                </a:tc>
-                <a:tc rowSpan="1" gridSpan="1">
-                  <a:txBody>
-                    <a:bodyPr anchor="ctr"/>
-                    <a:lstStyle/>
-                    <a:p>
-                      <a:pPr marL="0" algn="ctr">
-                        <a:lnSpc>
-                          <a:spcPts val="4300"/>
-                        </a:lnSpc>
-                      </a:pPr>
-                      <a:r>
-                        <a:rPr lang="zh-CN" altLang="en-US" sz="3600" b="1" i="0" dirty="0">
-                          <a:solidFill>
-                            <a:srgbClr val="000000">
-                              <a:alpha val="100000"/>
-                            </a:srgbClr>
-                          </a:solidFill>
-                          <a:latin typeface="Times New Roman"/>
-                          <a:ea typeface="Times New Roman"/>
-                        </a:rPr>
-                        <a:t>4</a:t>
-                      </a:r>
-                    </a:p>
-                  </a:txBody>
-                  <a:tcPr anchor="ctr">
-                    <a:lnL w="12700" cap="flat">
-                      <a:solidFill>
-                        <a:srgbClr val="000000">
-                          <a:alpha val="100000"/>
-                        </a:srgbClr>
-                      </a:solidFill>
-                    </a:lnL>
-                    <a:lnR w="28575" cap="flat">
-                      <a:solidFill>
-                        <a:srgbClr val="000000">
-                          <a:alpha val="100000"/>
-                        </a:srgbClr>
-                      </a:solidFill>
-                    </a:lnR>
-                    <a:lnT w="12700" cap="flat">
-                      <a:solidFill>
-                        <a:srgbClr val="000000">
-                          <a:alpha val="100000"/>
-                        </a:srgbClr>
-                      </a:solidFill>
-                    </a:lnT>
-                    <a:lnB w="28575" cap="flat">
-                      <a:solidFill>
-                        <a:srgbClr val="000000">
-                          <a:alpha val="100000"/>
-                        </a:srgbClr>
-                      </a:solidFill>
-                    </a:lnB>
-                    <a:solidFill>
-                      <a:srgbClr val="FFFFFF">
-                        <a:alpha val="100000"/>
-                      </a:srgbClr>
-                    </a:solidFill>
-                  </a:tcPr>
-                  <a:extLst>
-                    <a:ext uri="{0D108BD9-81ED-4DB2-BD59-A6C34878D82A}">
-                      <a16:rowId xmlns:a16="http://schemas.microsoft.com/office/drawing/2014/main" val="2661222183"/>
-                    </a:ext>
-                  </a:extLst>
-                </a:tc>
-              </a:tr>
-              <a:tr h="779631">
-                <a:tc rowSpan="1" gridSpan="1">
-                  <a:txBody>
-                    <a:bodyPr anchor="ctr"/>
-                    <a:lstStyle/>
-                    <a:p>
-                      <a:pPr marL="0" algn="ctr">
-                        <a:lnSpc>
-                          <a:spcPts val="4300"/>
-                        </a:lnSpc>
-                      </a:pPr>
-                      <a:r>
-                        <a:rPr lang="zh-CN" altLang="en-US" sz="3600" b="1" i="0" dirty="0">
-                          <a:solidFill>
-                            <a:srgbClr val="000000">
-                              <a:alpha val="100000"/>
-                            </a:srgbClr>
-                          </a:solidFill>
-                          <a:latin typeface="Times New Roman"/>
-                          <a:ea typeface="Times New Roman"/>
-                        </a:rPr>
-                        <a:t>3</a:t>
-                      </a:r>
-                    </a:p>
-                  </a:txBody>
-                  <a:tcPr anchor="ctr">
-                    <a:lnL w="28575" cap="flat">
-                      <a:solidFill>
-                        <a:srgbClr val="000000">
-                          <a:alpha val="100000"/>
-                        </a:srgbClr>
-                      </a:solidFill>
-                    </a:lnL>
-                    <a:lnR w="12700" cap="flat">
-                      <a:solidFill>
-                        <a:srgbClr val="000000">
-                          <a:alpha val="100000"/>
-                        </a:srgbClr>
-                      </a:solidFill>
-                    </a:lnR>
-                    <a:lnT w="28575" cap="flat">
-                      <a:solidFill>
-                        <a:srgbClr val="000000">
-                          <a:alpha val="100000"/>
-                        </a:srgbClr>
-                      </a:solidFill>
-                    </a:lnT>
-                    <a:lnB w="12700" cap="flat">
-                      <a:solidFill>
-                        <a:srgbClr val="000000">
-                          <a:alpha val="100000"/>
-                        </a:srgbClr>
-                      </a:solidFill>
-                    </a:lnB>
-                    <a:solidFill>
-                      <a:srgbClr val="FFFFFF">
-                        <a:alpha val="100000"/>
-                      </a:srgbClr>
-                    </a:solidFill>
-                  </a:tcPr>
-                  <a:extLst>
-                    <a:ext uri="{0D108BD9-81ED-4DB2-BD59-A6C34878D82A}">
-                      <a16:rowId xmlns:a16="http://schemas.microsoft.com/office/drawing/2014/main" val="2661222183"/>
-                    </a:ext>
-                  </a:extLst>
-                </a:tc>
-                <a:tc rowSpan="1" gridSpan="1">
-                  <a:txBody>
-                    <a:bodyPr anchor="t"/>
-                    <a:lstStyle/>
-                    <a:p>
-                      <a:pPr marL="0" algn="l"/>
-                    </a:p>
-                  </a:txBody>
-                  <a:tcPr anchor="t">
-                    <a:lnL w="12700" cap="flat">
-                      <a:solidFill>
-                        <a:srgbClr val="000000">
-                          <a:alpha val="100000"/>
-                        </a:srgbClr>
-                      </a:solidFill>
-                    </a:lnL>
-                    <a:lnR w="28575" cap="flat">
-                      <a:solidFill>
-                        <a:srgbClr val="000000">
-                          <a:alpha val="100000"/>
-                        </a:srgbClr>
-                      </a:solidFill>
-                    </a:lnR>
-                    <a:lnT w="28575" cap="flat">
-                      <a:solidFill>
-                        <a:srgbClr val="000000">
-                          <a:alpha val="100000"/>
-                        </a:srgbClr>
-                      </a:solidFill>
-                    </a:lnT>
-                    <a:lnB w="12700" cap="flat">
-                      <a:solidFill>
-                        <a:srgbClr val="000000">
-                          <a:alpha val="100000"/>
-                        </a:srgbClr>
-                      </a:solidFill>
-                    </a:lnB>
-                    <a:solidFill>
-                      <a:srgbClr val="FFFFFF">
-                        <a:alpha val="100000"/>
-                      </a:srgbClr>
-                    </a:solidFill>
-                  </a:tcPr>
-                  <a:extLst>
-                    <a:ext uri="{0D108BD9-81ED-4DB2-BD59-A6C34878D82A}">
-                      <a16:rowId xmlns:a16="http://schemas.microsoft.com/office/drawing/2014/main" val="2661222183"/>
-                    </a:ext>
-                  </a:extLst>
-                </a:tc>
-                <a:tc rowSpan="1" gridSpan="1">
-                  <a:txBody>
-                    <a:bodyPr anchor="t"/>
-                    <a:lstStyle/>
-                    <a:p>
-                      <a:pPr marL="0" algn="l"/>
-                    </a:p>
-                  </a:txBody>
-                  <a:tcPr anchor="t">
-                    <a:lnL w="28575" cap="flat">
-                      <a:solidFill>
-                        <a:srgbClr val="000000">
-                          <a:alpha val="100000"/>
-                        </a:srgbClr>
-                      </a:solidFill>
-                    </a:lnL>
-                    <a:lnR w="12700" cap="flat">
-                      <a:solidFill>
-                        <a:srgbClr val="000000">
-                          <a:alpha val="100000"/>
-                        </a:srgbClr>
-                      </a:solidFill>
-                    </a:lnR>
-                    <a:lnT w="28575" cap="flat">
-                      <a:solidFill>
-                        <a:srgbClr val="000000">
-                          <a:alpha val="100000"/>
-                        </a:srgbClr>
-                      </a:solidFill>
-                    </a:lnT>
-                    <a:lnB w="12700" cap="flat">
-                      <a:solidFill>
-                        <a:srgbClr val="000000">
-                          <a:alpha val="100000"/>
-                        </a:srgbClr>
-                      </a:solidFill>
-                    </a:lnB>
-                    <a:solidFill>
-                      <a:srgbClr val="FFFFFF">
-                        <a:alpha val="100000"/>
-                      </a:srgbClr>
-                    </a:solidFill>
-                  </a:tcPr>
-                  <a:extLst>
-                    <a:ext uri="{0D108BD9-81ED-4DB2-BD59-A6C34878D82A}">
-                      <a16:rowId xmlns:a16="http://schemas.microsoft.com/office/drawing/2014/main" val="2661222183"/>
-                    </a:ext>
-                  </a:extLst>
-                </a:tc>
-                <a:tc rowSpan="1" gridSpan="1">
-                  <a:txBody>
-                    <a:bodyPr anchor="t"/>
-                    <a:lstStyle/>
-                    <a:p>
-                      <a:pPr marL="0" algn="l"/>
-                    </a:p>
-                  </a:txBody>
-                  <a:tcPr anchor="t">
-                    <a:lnL w="12700" cap="flat">
-                      <a:solidFill>
-                        <a:srgbClr val="000000">
-                          <a:alpha val="100000"/>
-                        </a:srgbClr>
-                      </a:solidFill>
-                    </a:lnL>
-                    <a:lnR w="28575" cap="flat">
-                      <a:solidFill>
-                        <a:srgbClr val="000000">
-                          <a:alpha val="100000"/>
-                        </a:srgbClr>
-                      </a:solidFill>
-                    </a:lnR>
-                    <a:lnT w="28575" cap="flat">
-                      <a:solidFill>
-                        <a:srgbClr val="000000">
-                          <a:alpha val="100000"/>
-                        </a:srgbClr>
-                      </a:solidFill>
-                    </a:lnT>
-                    <a:lnB w="12700" cap="flat">
-                      <a:solidFill>
-                        <a:srgbClr val="000000">
-                          <a:alpha val="100000"/>
-                        </a:srgbClr>
-                      </a:solidFill>
-                    </a:lnB>
-                    <a:solidFill>
-                      <a:srgbClr val="FFFFFF">
-                        <a:alpha val="100000"/>
-                      </a:srgbClr>
-                    </a:solidFill>
-                  </a:tcPr>
-                  <a:extLst>
-                    <a:ext uri="{0D108BD9-81ED-4DB2-BD59-A6C34878D82A}">
-                      <a16:rowId xmlns:a16="http://schemas.microsoft.com/office/drawing/2014/main" val="2661222183"/>
-                    </a:ext>
-                  </a:extLst>
-                </a:tc>
-              </a:tr>
-              <a:tr h="779631">
-                <a:tc rowSpan="1" gridSpan="1">
-                  <a:txBody>
-                    <a:bodyPr anchor="t"/>
-                    <a:lstStyle/>
-                    <a:p>
-                      <a:pPr marL="0" algn="l"/>
-                    </a:p>
-                  </a:txBody>
-                  <a:tcPr anchor="t">
-                    <a:lnL w="28575" cap="flat">
-                      <a:solidFill>
-                        <a:srgbClr val="000000">
-                          <a:alpha val="100000"/>
-                        </a:srgbClr>
-                      </a:solidFill>
-                    </a:lnL>
-                    <a:lnR w="12700" cap="flat">
-                      <a:solidFill>
-                        <a:srgbClr val="000000">
-                          <a:alpha val="100000"/>
-                        </a:srgbClr>
-                      </a:solidFill>
-                    </a:lnR>
-                    <a:lnT w="12700" cap="flat">
-                      <a:solidFill>
-                        <a:srgbClr val="000000">
-                          <a:alpha val="100000"/>
-                        </a:srgbClr>
-                      </a:solidFill>
-                    </a:lnT>
-                    <a:lnB w="28575" cap="flat">
-                      <a:solidFill>
-                        <a:srgbClr val="000000">
-                          <a:alpha val="100000"/>
-                        </a:srgbClr>
-                      </a:solidFill>
-                    </a:lnB>
-                    <a:solidFill>
-                      <a:srgbClr val="FFFFFF">
-                        <a:alpha val="100000"/>
-                      </a:srgbClr>
-                    </a:solidFill>
-                  </a:tcPr>
-                  <a:extLst>
-                    <a:ext uri="{0D108BD9-81ED-4DB2-BD59-A6C34878D82A}">
-                      <a16:rowId xmlns:a16="http://schemas.microsoft.com/office/drawing/2014/main" val="2661222183"/>
-                    </a:ext>
-                  </a:extLst>
-                </a:tc>
-                <a:tc rowSpan="1" gridSpan="1">
-                  <a:txBody>
-                    <a:bodyPr anchor="t"/>
-                    <a:lstStyle/>
-                    <a:p>
-                      <a:pPr marL="0" algn="l"/>
-                    </a:p>
-                  </a:txBody>
-                  <a:tcPr anchor="t">
-                    <a:lnL w="12700" cap="flat">
-                      <a:solidFill>
-                        <a:srgbClr val="000000">
-                          <a:alpha val="100000"/>
-                        </a:srgbClr>
-                      </a:solidFill>
-                    </a:lnL>
-                    <a:lnR w="28575" cap="flat">
-                      <a:solidFill>
-                        <a:srgbClr val="000000">
-                          <a:alpha val="100000"/>
-                        </a:srgbClr>
-                      </a:solidFill>
-                    </a:lnR>
-                    <a:lnT w="12700" cap="flat">
-                      <a:solidFill>
-                        <a:srgbClr val="000000">
-                          <a:alpha val="100000"/>
-                        </a:srgbClr>
-                      </a:solidFill>
-                    </a:lnT>
-                    <a:lnB w="28575" cap="flat">
-                      <a:solidFill>
-                        <a:srgbClr val="000000">
-                          <a:alpha val="100000"/>
-                        </a:srgbClr>
-                      </a:solidFill>
-                    </a:lnB>
-                    <a:solidFill>
-                      <a:srgbClr val="FFFFFF">
-                        <a:alpha val="100000"/>
-                      </a:srgbClr>
-                    </a:solidFill>
-                  </a:tcPr>
-                  <a:extLst>
-                    <a:ext uri="{0D108BD9-81ED-4DB2-BD59-A6C34878D82A}">
-                      <a16:rowId xmlns:a16="http://schemas.microsoft.com/office/drawing/2014/main" val="2661222183"/>
-                    </a:ext>
-                  </a:extLst>
-                </a:tc>
-                <a:tc rowSpan="1" gridSpan="1">
-                  <a:txBody>
-                    <a:bodyPr anchor="t"/>
-                    <a:lstStyle/>
-                    <a:p>
-                      <a:pPr marL="0" algn="l"/>
-                    </a:p>
-                  </a:txBody>
-                  <a:tcPr anchor="t">
-                    <a:lnL w="28575" cap="flat">
-                      <a:solidFill>
-                        <a:srgbClr val="000000">
-                          <a:alpha val="100000"/>
-                        </a:srgbClr>
-                      </a:solidFill>
-                    </a:lnL>
-                    <a:lnR w="12700" cap="flat">
-                      <a:solidFill>
-                        <a:srgbClr val="000000">
-                          <a:alpha val="100000"/>
-                        </a:srgbClr>
-                      </a:solidFill>
-                    </a:lnR>
-                    <a:lnT w="12700" cap="flat">
-                      <a:solidFill>
-                        <a:srgbClr val="000000">
-                          <a:alpha val="100000"/>
-                        </a:srgbClr>
-                      </a:solidFill>
-                    </a:lnT>
-                    <a:lnB w="28575" cap="flat">
-                      <a:solidFill>
-                        <a:srgbClr val="000000">
-                          <a:alpha val="100000"/>
-                        </a:srgbClr>
-                      </a:solidFill>
-                    </a:lnB>
-                    <a:solidFill>
-                      <a:srgbClr val="FFFFFF">
-                        <a:alpha val="100000"/>
-                      </a:srgbClr>
-                    </a:solidFill>
-                  </a:tcPr>
-                  <a:extLst>
-                    <a:ext uri="{0D108BD9-81ED-4DB2-BD59-A6C34878D82A}">
-                      <a16:rowId xmlns:a16="http://schemas.microsoft.com/office/drawing/2014/main" val="2661222183"/>
-                    </a:ext>
-                  </a:extLst>
-                </a:tc>
-                <a:tc rowSpan="1" gridSpan="1">
-                  <a:txBody>
-                    <a:bodyPr anchor="ctr"/>
-                    <a:lstStyle/>
-                    <a:p>
-                      <a:pPr marL="0" algn="ctr">
-                        <a:lnSpc>
-                          <a:spcPts val="4300"/>
-                        </a:lnSpc>
-                      </a:pPr>
-                      <a:r>
-                        <a:rPr lang="zh-CN" altLang="en-US" sz="3600" b="1" i="0" dirty="0">
-                          <a:solidFill>
-                            <a:srgbClr val="000000">
-                              <a:alpha val="100000"/>
-                            </a:srgbClr>
-                          </a:solidFill>
-                          <a:latin typeface="Times New Roman"/>
-                          <a:ea typeface="Times New Roman"/>
-                        </a:rPr>
-                        <a:t>2</a:t>
-                      </a:r>
-                    </a:p>
-                  </a:txBody>
-                  <a:tcPr anchor="ctr">
-                    <a:lnL w="12700" cap="flat">
-                      <a:solidFill>
-                        <a:srgbClr val="000000">
-                          <a:alpha val="100000"/>
-                        </a:srgbClr>
-                      </a:solidFill>
-                    </a:lnL>
-                    <a:lnR w="28575" cap="flat">
-                      <a:solidFill>
-                        <a:srgbClr val="000000">
-                          <a:alpha val="100000"/>
-                        </a:srgbClr>
-                      </a:solidFill>
-                    </a:lnR>
-                    <a:lnT w="12700" cap="flat">
-                      <a:solidFill>
-                        <a:srgbClr val="000000">
-                          <a:alpha val="100000"/>
-                        </a:srgbClr>
-                      </a:solidFill>
-                    </a:lnT>
-                    <a:lnB w="28575" cap="flat">
-                      <a:solidFill>
-                        <a:srgbClr val="000000">
-                          <a:alpha val="100000"/>
-                        </a:srgbClr>
-                      </a:solidFill>
-                    </a:lnB>
-                    <a:solidFill>
-                      <a:srgbClr val="FFFFFF">
-                        <a:alpha val="100000"/>
-                      </a:srgbClr>
-                    </a:solidFill>
-                  </a:tcPr>
-                  <a:extLst>
-                    <a:ext uri="{0D108BD9-81ED-4DB2-BD59-A6C34878D82A}">
-                      <a16:rowId xmlns:a16="http://schemas.microsoft.com/office/drawing/2014/main" val="2661222183"/>
-                    </a:ext>
-                  </a:extLst>
-                </a:tc>
-              </a:tr>
-            </a:tbl>
-          </a:graphicData>
-        </a:graphic>
-      </p:graphicFrame>
-    </p:spTree>
-    <p:extLst>
-      <p:ext uri="{BB962C8B-B14F-4D97-AF65-F5344CB8AC3E}">
-        <p14:creationId xmlns:p14="http://schemas.microsoft.com/office/powerpoint/2010/main" val="840519474"/>
-      </p:ext>
-    </p:extLst>
-  </p:cSld>
-  <p:clrMapOvr>
-    <a:masterClrMapping/>
-  </p:clrMapOvr>
-</p:sld>
-</file>
-
-<file path=ppt/slides/slide7.xml><?xml version="1.0" encoding="utf-8"?>
 <p:sld xmlns:p14="http://schemas.microsoft.com/office/powerpoint/2010/main" xmlns:a16="http://schemas.microsoft.com/office/drawing/2014/main" xmlns:a="http://schemas.openxmlformats.org/drawingml/2006/main" xmlns:r="http://schemas.openxmlformats.org/officeDocument/2006/relationships" xmlns:p="http://schemas.openxmlformats.org/presentationml/2006/main">
   <p:cSld>
     <p:bg>
@@ -9631,7 +8329,7 @@
           <a:p>
             <a:pPr marL="0" algn="ctr">
               <a:lnSpc>
-                <a:spcPts val="4800"/>
+                <a:spcPts val="4400"/>
               </a:lnSpc>
             </a:pPr>
             <a:r>
@@ -9641,8 +8339,8 @@
                     <a:alpha val="100000"/>
                   </a:srgbClr>
                 </a:solidFill>
-                <a:latin typeface="微软雅黑"/>
-                <a:ea typeface="微软雅黑"/>
+                <a:latin typeface="Aa偷吃可爱长大的"/>
+                <a:ea typeface="Aa偷吃可爱长大的"/>
               </a:rPr>
               <a:t>拓展练习</a:t>
             </a:r>
@@ -9705,7 +8403,7 @@
           <p:spPr>
             <a:xfrm>
               <a:off x="118069" y="0"/>
-              <a:ext cx="3168352" cy="802742"/>
+              <a:ext cx="3168352" cy="848031"/>
             </a:xfrm>
             <a:prstGeom prst="rect">
               <a:avLst/>
@@ -9718,7 +8416,7 @@
             <a:p>
               <a:pPr marL="0" algn="ctr">
                 <a:lnSpc>
-                  <a:spcPts val="4800"/>
+                  <a:spcPts val="5100"/>
                 </a:lnSpc>
               </a:pPr>
               <a:r>
@@ -9728,8 +8426,8 @@
                       <a:alpha val="100000"/>
                     </a:srgbClr>
                   </a:solidFill>
-                  <a:latin typeface="宋体"/>
-                  <a:ea typeface="宋体"/>
+                  <a:latin typeface="Aa偷吃可爱长大的"/>
+                  <a:ea typeface="Aa偷吃可爱长大的"/>
                 </a:rPr>
                 <a:t>挑战自我</a:t>
               </a:r>
@@ -10679,7 +9377,7 @@
           <a:p>
             <a:pPr marL="0" algn="l">
               <a:lnSpc>
-                <a:spcPts val="4300"/>
+                <a:spcPts val="4600"/>
               </a:lnSpc>
             </a:pPr>
             <a:r>
@@ -10689,22 +9387,10 @@
                     <a:alpha val="100000"/>
                   </a:srgbClr>
                 </a:solidFill>
-                <a:latin typeface="Times New Roman"/>
-                <a:ea typeface="Times New Roman"/>
+                <a:latin typeface="Aa偷吃可爱长大的"/>
+                <a:ea typeface="Aa偷吃可爱长大的"/>
               </a:rPr>
-              <a:t>1.</a:t>
-            </a:r>
-            <a:r>
-              <a:rPr lang="zh-CN" altLang="en-US" sz="3600" b="1" i="0" dirty="0">
-                <a:solidFill>
-                  <a:srgbClr val="231F20">
-                    <a:alpha val="100000"/>
-                  </a:srgbClr>
-                </a:solidFill>
-                <a:latin typeface="楷体"/>
-                <a:ea typeface="楷体"/>
-              </a:rPr>
-              <a:t>完成下面的数独游戏。</a:t>
+              <a:t>1.完成下面的数独游戏。</a:t>
             </a:r>
           </a:p>
         </p:txBody>
@@ -10730,7 +9416,7 @@
           </p:nvPr>
         </p:nvGraphicFramePr>
         <p:xfrm>
-          <a:off x="4656001" y="2709520"/>
+          <a:off x="4716572" y="2709520"/>
           <a:ext cx="2880000" cy="2880000"/>
         </p:xfrm>
         <a:graphic>
@@ -13129,7 +11815,7 @@
 </p:sld>
 </file>
 
-<file path=ppt/slides/slide8.xml><?xml version="1.0" encoding="utf-8"?>
+<file path=ppt/slides/slide7.xml><?xml version="1.0" encoding="utf-8"?>
 <p:sld xmlns:p14="http://schemas.microsoft.com/office/powerpoint/2010/main" xmlns:a="http://schemas.openxmlformats.org/drawingml/2006/main" xmlns:r="http://schemas.openxmlformats.org/officeDocument/2006/relationships" xmlns:p="http://schemas.openxmlformats.org/presentationml/2006/main">
   <p:cSld>
     <p:bg>
@@ -13372,8 +12058,8 @@
         </p:nvSpPr>
         <p:spPr>
           <a:xfrm>
-            <a:off x="639038" y="1003206"/>
-            <a:ext cx="8451964" cy="836831"/>
+            <a:off x="1961940" y="2872245"/>
+            <a:ext cx="8451964" cy="782278"/>
           </a:xfrm>
           <a:prstGeom prst="rect">
             <a:avLst/>
@@ -13386,7 +12072,7 @@
           <a:p>
             <a:pPr marL="0" algn="l">
               <a:lnSpc>
-                <a:spcPts val="4300"/>
+                <a:spcPts val="4600"/>
               </a:lnSpc>
             </a:pPr>
             <a:r>
@@ -13396,8 +12082,8 @@
                     <a:alpha val="100000"/>
                   </a:srgbClr>
                 </a:solidFill>
-                <a:latin typeface="黑体"/>
-                <a:ea typeface="黑体"/>
+                <a:latin typeface="Aa偷吃可爱长大的"/>
+                <a:ea typeface="Aa偷吃可爱长大的"/>
               </a:rPr>
               <a:t>通过这节课的学习，你有什么收获？</a:t>
             </a:r>
@@ -13444,1218 +12130,6 @@
           </a:p>
         </p:txBody>
       </p:sp>
-      <p:graphicFrame>
-        <p:nvGraphicFramePr>
-          <p:cNvPr id="11" name="表格1">
-            <a:extLst>
-              <a:ext uri="{FF2B5EF4-FFF2-40B4-BE49-F238E27FC236}">
-                <a16:creationId xmlns:a16="http://schemas.microsoft.com/office/drawing/2014/main" id="{62B2FBE6-5C8C-E811-489E-1440CA960B7D}"/>
-              </a:ext>
-            </a:extLst>
-          </p:cNvPr>
-          <p:cNvGraphicFramePr>
-            <a:graphicFrameLocks noGrp="1"/>
-          </p:cNvGraphicFramePr>
-          <p:nvPr>
-            <p:extLst>
-              <p:ext uri="{D42A27DB-BD31-4B8C-83A1-F6EECF244321}">
-                <p14:modId xmlns:p14="http://schemas.microsoft.com/office/powerpoint/2010/main" val="3345567701"/>
-              </p:ext>
-            </p:extLst>
-          </p:nvPr>
-        </p:nvGraphicFramePr>
-        <p:xfrm>
-          <a:off x="4656000" y="1880117"/>
-          <a:ext cx="2880000" cy="2880000"/>
-        </p:xfrm>
-        <a:graphic>
-          <a:graphicData uri="http://schemas.openxmlformats.org/drawingml/2006/table">
-            <a:tbl>
-              <a:tblPr firstRow="1" bandRow="1">
-                <a:tableStyleId>{5C22544A-7EE6-4342-B048-85BDC9FD1C3A}</a:tableStyleId>
-              </a:tblPr>
-              <a:tblGrid>
-                <a:gridCol w="720000">
-                  <a:extLst>
-                    <a:ext uri="{9D8B030D-6E8A-4147-A177-3AD203B41FA5}">
-                      <a16:colId xmlns:a16="http://schemas.microsoft.com/office/drawing/2014/main" val="2854172943"/>
-                    </a:ext>
-                  </a:extLst>
-                </a:gridCol>
-                <a:gridCol w="720000">
-                  <a:extLst>
-                    <a:ext uri="{9D8B030D-6E8A-4147-A177-3AD203B41FA5}">
-                      <a16:colId xmlns:a16="http://schemas.microsoft.com/office/drawing/2014/main" val="2854172943"/>
-                    </a:ext>
-                  </a:extLst>
-                </a:gridCol>
-                <a:gridCol w="720000">
-                  <a:extLst>
-                    <a:ext uri="{9D8B030D-6E8A-4147-A177-3AD203B41FA5}">
-                      <a16:colId xmlns:a16="http://schemas.microsoft.com/office/drawing/2014/main" val="2854172943"/>
-                    </a:ext>
-                  </a:extLst>
-                </a:gridCol>
-                <a:gridCol w="720000">
-                  <a:extLst>
-                    <a:ext uri="{9D8B030D-6E8A-4147-A177-3AD203B41FA5}">
-                      <a16:colId xmlns:a16="http://schemas.microsoft.com/office/drawing/2014/main" val="2854172943"/>
-                    </a:ext>
-                  </a:extLst>
-                </a:gridCol>
-              </a:tblGrid>
-              <a:tr h="720000">
-                <a:tc rowSpan="1" gridSpan="1">
-                  <a:txBody>
-                    <a:bodyPr anchor="ctr"/>
-                    <a:lstStyle/>
-                    <a:p>
-                      <a:pPr marL="0" algn="ctr">
-                        <a:lnSpc>
-                          <a:spcPts val="4300"/>
-                        </a:lnSpc>
-                      </a:pPr>
-                      <a:r>
-                        <a:rPr lang="zh-CN" altLang="en-US" sz="3600" b="1" i="0" dirty="0">
-                          <a:solidFill>
-                            <a:srgbClr val="000000">
-                              <a:alpha val="100000"/>
-                            </a:srgbClr>
-                          </a:solidFill>
-                          <a:latin typeface="Times New Roman"/>
-                          <a:ea typeface="Times New Roman"/>
-                        </a:rPr>
-                        <a:t>1</a:t>
-                      </a:r>
-                    </a:p>
-                  </a:txBody>
-                  <a:tcPr anchor="ctr">
-                    <a:lnL w="28575" cap="flat">
-                      <a:solidFill>
-                        <a:srgbClr val="000000">
-                          <a:alpha val="100000"/>
-                        </a:srgbClr>
-                      </a:solidFill>
-                    </a:lnL>
-                    <a:lnR w="12700" cap="flat">
-                      <a:solidFill>
-                        <a:srgbClr val="000000">
-                          <a:alpha val="100000"/>
-                        </a:srgbClr>
-                      </a:solidFill>
-                    </a:lnR>
-                    <a:lnT w="28575" cap="flat">
-                      <a:solidFill>
-                        <a:srgbClr val="000000">
-                          <a:alpha val="100000"/>
-                        </a:srgbClr>
-                      </a:solidFill>
-                    </a:lnT>
-                    <a:lnB w="12700" cap="flat">
-                      <a:solidFill>
-                        <a:srgbClr val="000000">
-                          <a:alpha val="100000"/>
-                        </a:srgbClr>
-                      </a:solidFill>
-                    </a:lnB>
-                    <a:solidFill>
-                      <a:srgbClr val="FFFFFF">
-                        <a:alpha val="100000"/>
-                      </a:srgbClr>
-                    </a:solidFill>
-                  </a:tcPr>
-                  <a:extLst>
-                    <a:ext uri="{0D108BD9-81ED-4DB2-BD59-A6C34878D82A}">
-                      <a16:rowId xmlns:a16="http://schemas.microsoft.com/office/drawing/2014/main" val="2661222183"/>
-                    </a:ext>
-                  </a:extLst>
-                </a:tc>
-                <a:tc rowSpan="1" gridSpan="1">
-                  <a:txBody>
-                    <a:bodyPr anchor="ctr"/>
-                    <a:lstStyle/>
-                    <a:p>
-                      <a:pPr marL="0" algn="ctr">
-                        <a:lnSpc>
-                          <a:spcPts val="4300"/>
-                        </a:lnSpc>
-                      </a:pPr>
-                      <a:r>
-                        <a:rPr lang="zh-CN" altLang="en-US" sz="3600" b="1" i="0" dirty="0">
-                          <a:solidFill>
-                            <a:srgbClr val="F00C08">
-                              <a:alpha val="100000"/>
-                            </a:srgbClr>
-                          </a:solidFill>
-                          <a:latin typeface="Times New Roman"/>
-                          <a:ea typeface="Times New Roman"/>
-                        </a:rPr>
-                        <a:t>4</a:t>
-                      </a:r>
-                    </a:p>
-                  </a:txBody>
-                  <a:tcPr anchor="ctr">
-                    <a:lnL w="12700" cap="flat">
-                      <a:solidFill>
-                        <a:srgbClr val="000000">
-                          <a:alpha val="100000"/>
-                        </a:srgbClr>
-                      </a:solidFill>
-                    </a:lnL>
-                    <a:lnR w="28575" cap="flat">
-                      <a:solidFill>
-                        <a:srgbClr val="000000">
-                          <a:alpha val="100000"/>
-                        </a:srgbClr>
-                      </a:solidFill>
-                    </a:lnR>
-                    <a:lnT w="28575" cap="flat">
-                      <a:solidFill>
-                        <a:srgbClr val="000000">
-                          <a:alpha val="100000"/>
-                        </a:srgbClr>
-                      </a:solidFill>
-                    </a:lnT>
-                    <a:lnB w="12700" cap="flat">
-                      <a:solidFill>
-                        <a:srgbClr val="000000">
-                          <a:alpha val="100000"/>
-                        </a:srgbClr>
-                      </a:solidFill>
-                    </a:lnB>
-                    <a:solidFill>
-                      <a:srgbClr val="FFFFFF">
-                        <a:alpha val="100000"/>
-                      </a:srgbClr>
-                    </a:solidFill>
-                  </a:tcPr>
-                  <a:extLst>
-                    <a:ext uri="{0D108BD9-81ED-4DB2-BD59-A6C34878D82A}">
-                      <a16:rowId xmlns:a16="http://schemas.microsoft.com/office/drawing/2014/main" val="2661222183"/>
-                    </a:ext>
-                  </a:extLst>
-                </a:tc>
-                <a:tc rowSpan="1" gridSpan="1">
-                  <a:txBody>
-                    <a:bodyPr anchor="ctr"/>
-                    <a:lstStyle/>
-                    <a:p>
-                      <a:pPr marL="0" algn="ctr">
-                        <a:lnSpc>
-                          <a:spcPts val="4300"/>
-                        </a:lnSpc>
-                      </a:pPr>
-                      <a:r>
-                        <a:rPr lang="zh-CN" altLang="en-US" sz="3600" b="1" i="0" dirty="0">
-                          <a:solidFill>
-                            <a:srgbClr val="F00C08">
-                              <a:alpha val="100000"/>
-                            </a:srgbClr>
-                          </a:solidFill>
-                          <a:latin typeface="Times New Roman"/>
-                          <a:ea typeface="Times New Roman"/>
-                        </a:rPr>
-                        <a:t>2</a:t>
-                      </a:r>
-                    </a:p>
-                  </a:txBody>
-                  <a:tcPr anchor="ctr">
-                    <a:lnL w="28575" cap="flat">
-                      <a:solidFill>
-                        <a:srgbClr val="000000">
-                          <a:alpha val="100000"/>
-                        </a:srgbClr>
-                      </a:solidFill>
-                    </a:lnL>
-                    <a:lnR w="12700" cap="flat">
-                      <a:solidFill>
-                        <a:srgbClr val="000000">
-                          <a:alpha val="100000"/>
-                        </a:srgbClr>
-                      </a:solidFill>
-                    </a:lnR>
-                    <a:lnT w="28575" cap="flat">
-                      <a:solidFill>
-                        <a:srgbClr val="000000">
-                          <a:alpha val="100000"/>
-                        </a:srgbClr>
-                      </a:solidFill>
-                    </a:lnT>
-                    <a:lnB w="12700" cap="flat">
-                      <a:solidFill>
-                        <a:srgbClr val="000000">
-                          <a:alpha val="100000"/>
-                        </a:srgbClr>
-                      </a:solidFill>
-                    </a:lnB>
-                    <a:solidFill>
-                      <a:srgbClr val="FFFFFF">
-                        <a:alpha val="100000"/>
-                      </a:srgbClr>
-                    </a:solidFill>
-                  </a:tcPr>
-                  <a:extLst>
-                    <a:ext uri="{0D108BD9-81ED-4DB2-BD59-A6C34878D82A}">
-                      <a16:rowId xmlns:a16="http://schemas.microsoft.com/office/drawing/2014/main" val="2661222183"/>
-                    </a:ext>
-                  </a:extLst>
-                </a:tc>
-                <a:tc rowSpan="1" gridSpan="1">
-                  <a:txBody>
-                    <a:bodyPr anchor="ctr"/>
-                    <a:lstStyle/>
-                    <a:p>
-                      <a:pPr marL="0" algn="ctr">
-                        <a:lnSpc>
-                          <a:spcPts val="4300"/>
-                        </a:lnSpc>
-                      </a:pPr>
-                      <a:r>
-                        <a:rPr lang="zh-CN" altLang="en-US" sz="3600" b="1" i="0" dirty="0">
-                          <a:solidFill>
-                            <a:srgbClr val="F00C08">
-                              <a:alpha val="100000"/>
-                            </a:srgbClr>
-                          </a:solidFill>
-                          <a:latin typeface="Times New Roman"/>
-                          <a:ea typeface="Times New Roman"/>
-                        </a:rPr>
-                        <a:t>3</a:t>
-                      </a:r>
-                    </a:p>
-                  </a:txBody>
-                  <a:tcPr anchor="ctr">
-                    <a:lnL w="12700" cap="flat">
-                      <a:solidFill>
-                        <a:srgbClr val="000000">
-                          <a:alpha val="100000"/>
-                        </a:srgbClr>
-                      </a:solidFill>
-                    </a:lnL>
-                    <a:lnR w="28575" cap="flat">
-                      <a:solidFill>
-                        <a:srgbClr val="000000">
-                          <a:alpha val="100000"/>
-                        </a:srgbClr>
-                      </a:solidFill>
-                    </a:lnR>
-                    <a:lnT w="28575" cap="flat">
-                      <a:solidFill>
-                        <a:srgbClr val="000000">
-                          <a:alpha val="100000"/>
-                        </a:srgbClr>
-                      </a:solidFill>
-                    </a:lnT>
-                    <a:lnB w="12700" cap="flat">
-                      <a:solidFill>
-                        <a:srgbClr val="000000">
-                          <a:alpha val="100000"/>
-                        </a:srgbClr>
-                      </a:solidFill>
-                    </a:lnB>
-                    <a:solidFill>
-                      <a:srgbClr val="FFFFFF">
-                        <a:alpha val="100000"/>
-                      </a:srgbClr>
-                    </a:solidFill>
-                  </a:tcPr>
-                  <a:extLst>
-                    <a:ext uri="{0D108BD9-81ED-4DB2-BD59-A6C34878D82A}">
-                      <a16:rowId xmlns:a16="http://schemas.microsoft.com/office/drawing/2014/main" val="2661222183"/>
-                    </a:ext>
-                  </a:extLst>
-                </a:tc>
-              </a:tr>
-              <a:tr h="720000">
-                <a:tc rowSpan="1" gridSpan="1">
-                  <a:txBody>
-                    <a:bodyPr anchor="ctr"/>
-                    <a:lstStyle/>
-                    <a:p>
-                      <a:pPr marL="0" algn="ctr">
-                        <a:lnSpc>
-                          <a:spcPts val="4300"/>
-                        </a:lnSpc>
-                      </a:pPr>
-                      <a:r>
-                        <a:rPr lang="zh-CN" altLang="en-US" sz="3600" b="1" i="0" dirty="0">
-                          <a:solidFill>
-                            <a:srgbClr val="F00C08">
-                              <a:alpha val="100000"/>
-                            </a:srgbClr>
-                          </a:solidFill>
-                          <a:latin typeface="Times New Roman"/>
-                          <a:ea typeface="Times New Roman"/>
-                        </a:rPr>
-                        <a:t>2</a:t>
-                      </a:r>
-                    </a:p>
-                  </a:txBody>
-                  <a:tcPr anchor="ctr">
-                    <a:lnL w="28575" cap="flat">
-                      <a:solidFill>
-                        <a:srgbClr val="000000">
-                          <a:alpha val="100000"/>
-                        </a:srgbClr>
-                      </a:solidFill>
-                    </a:lnL>
-                    <a:lnR w="12700" cap="flat">
-                      <a:solidFill>
-                        <a:srgbClr val="000000">
-                          <a:alpha val="100000"/>
-                        </a:srgbClr>
-                      </a:solidFill>
-                    </a:lnR>
-                    <a:lnT w="12700" cap="flat">
-                      <a:solidFill>
-                        <a:srgbClr val="000000">
-                          <a:alpha val="100000"/>
-                        </a:srgbClr>
-                      </a:solidFill>
-                    </a:lnT>
-                    <a:lnB w="28575" cap="flat">
-                      <a:solidFill>
-                        <a:srgbClr val="000000">
-                          <a:alpha val="100000"/>
-                        </a:srgbClr>
-                      </a:solidFill>
-                    </a:lnB>
-                    <a:solidFill>
-                      <a:srgbClr val="FFFFFF">
-                        <a:alpha val="100000"/>
-                      </a:srgbClr>
-                    </a:solidFill>
-                  </a:tcPr>
-                  <a:extLst>
-                    <a:ext uri="{0D108BD9-81ED-4DB2-BD59-A6C34878D82A}">
-                      <a16:rowId xmlns:a16="http://schemas.microsoft.com/office/drawing/2014/main" val="2661222183"/>
-                    </a:ext>
-                  </a:extLst>
-                </a:tc>
-                <a:tc rowSpan="1" gridSpan="1">
-                  <a:txBody>
-                    <a:bodyPr anchor="ctr"/>
-                    <a:lstStyle/>
-                    <a:p>
-                      <a:pPr marL="0" algn="ctr">
-                        <a:lnSpc>
-                          <a:spcPts val="4300"/>
-                        </a:lnSpc>
-                      </a:pPr>
-                      <a:r>
-                        <a:rPr lang="zh-CN" altLang="en-US" sz="3600" b="1" i="0" dirty="0">
-                          <a:solidFill>
-                            <a:srgbClr val="F00C08">
-                              <a:alpha val="100000"/>
-                            </a:srgbClr>
-                          </a:solidFill>
-                          <a:latin typeface="Times New Roman"/>
-                          <a:ea typeface="Times New Roman"/>
-                        </a:rPr>
-                        <a:t>3</a:t>
-                      </a:r>
-                    </a:p>
-                  </a:txBody>
-                  <a:tcPr anchor="ctr">
-                    <a:lnL w="12700" cap="flat">
-                      <a:solidFill>
-                        <a:srgbClr val="000000">
-                          <a:alpha val="100000"/>
-                        </a:srgbClr>
-                      </a:solidFill>
-                    </a:lnL>
-                    <a:lnR w="28575" cap="flat">
-                      <a:solidFill>
-                        <a:srgbClr val="000000">
-                          <a:alpha val="100000"/>
-                        </a:srgbClr>
-                      </a:solidFill>
-                    </a:lnR>
-                    <a:lnT w="12700" cap="flat">
-                      <a:solidFill>
-                        <a:srgbClr val="000000">
-                          <a:alpha val="100000"/>
-                        </a:srgbClr>
-                      </a:solidFill>
-                    </a:lnT>
-                    <a:lnB w="28575" cap="flat">
-                      <a:solidFill>
-                        <a:srgbClr val="000000">
-                          <a:alpha val="100000"/>
-                        </a:srgbClr>
-                      </a:solidFill>
-                    </a:lnB>
-                    <a:solidFill>
-                      <a:srgbClr val="FFFFFF">
-                        <a:alpha val="100000"/>
-                      </a:srgbClr>
-                    </a:solidFill>
-                  </a:tcPr>
-                  <a:extLst>
-                    <a:ext uri="{0D108BD9-81ED-4DB2-BD59-A6C34878D82A}">
-                      <a16:rowId xmlns:a16="http://schemas.microsoft.com/office/drawing/2014/main" val="2661222183"/>
-                    </a:ext>
-                  </a:extLst>
-                </a:tc>
-                <a:tc rowSpan="1" gridSpan="1">
-                  <a:txBody>
-                    <a:bodyPr anchor="ctr"/>
-                    <a:lstStyle/>
-                    <a:p>
-                      <a:pPr marL="0" algn="ctr">
-                        <a:lnSpc>
-                          <a:spcPts val="4300"/>
-                        </a:lnSpc>
-                      </a:pPr>
-                      <a:r>
-                        <a:rPr lang="zh-CN" altLang="en-US" sz="3600" b="1" i="0" dirty="0">
-                          <a:solidFill>
-                            <a:srgbClr val="F00C08">
-                              <a:alpha val="100000"/>
-                            </a:srgbClr>
-                          </a:solidFill>
-                          <a:latin typeface="Times New Roman"/>
-                          <a:ea typeface="Times New Roman"/>
-                        </a:rPr>
-                        <a:t>1</a:t>
-                      </a:r>
-                    </a:p>
-                  </a:txBody>
-                  <a:tcPr anchor="ctr">
-                    <a:lnL w="28575" cap="flat">
-                      <a:solidFill>
-                        <a:srgbClr val="000000">
-                          <a:alpha val="100000"/>
-                        </a:srgbClr>
-                      </a:solidFill>
-                    </a:lnL>
-                    <a:lnR w="12700" cap="flat">
-                      <a:solidFill>
-                        <a:srgbClr val="000000">
-                          <a:alpha val="100000"/>
-                        </a:srgbClr>
-                      </a:solidFill>
-                    </a:lnR>
-                    <a:lnT w="12700" cap="flat">
-                      <a:solidFill>
-                        <a:srgbClr val="000000">
-                          <a:alpha val="100000"/>
-                        </a:srgbClr>
-                      </a:solidFill>
-                    </a:lnT>
-                    <a:lnB w="28575" cap="flat">
-                      <a:solidFill>
-                        <a:srgbClr val="000000">
-                          <a:alpha val="100000"/>
-                        </a:srgbClr>
-                      </a:solidFill>
-                    </a:lnB>
-                    <a:solidFill>
-                      <a:srgbClr val="FFFFFF">
-                        <a:alpha val="100000"/>
-                      </a:srgbClr>
-                    </a:solidFill>
-                  </a:tcPr>
-                  <a:extLst>
-                    <a:ext uri="{0D108BD9-81ED-4DB2-BD59-A6C34878D82A}">
-                      <a16:rowId xmlns:a16="http://schemas.microsoft.com/office/drawing/2014/main" val="2661222183"/>
-                    </a:ext>
-                  </a:extLst>
-                </a:tc>
-                <a:tc rowSpan="1" gridSpan="1">
-                  <a:txBody>
-                    <a:bodyPr anchor="ctr"/>
-                    <a:lstStyle/>
-                    <a:p>
-                      <a:pPr marL="0" algn="ctr">
-                        <a:lnSpc>
-                          <a:spcPts val="4300"/>
-                        </a:lnSpc>
-                      </a:pPr>
-                      <a:r>
-                        <a:rPr lang="zh-CN" altLang="en-US" sz="3600" b="1" i="0" dirty="0">
-                          <a:solidFill>
-                            <a:srgbClr val="000000">
-                              <a:alpha val="100000"/>
-                            </a:srgbClr>
-                          </a:solidFill>
-                          <a:latin typeface="Times New Roman"/>
-                          <a:ea typeface="Times New Roman"/>
-                        </a:rPr>
-                        <a:t>4</a:t>
-                      </a:r>
-                    </a:p>
-                  </a:txBody>
-                  <a:tcPr anchor="ctr">
-                    <a:lnL w="12700" cap="flat">
-                      <a:solidFill>
-                        <a:srgbClr val="000000">
-                          <a:alpha val="100000"/>
-                        </a:srgbClr>
-                      </a:solidFill>
-                    </a:lnL>
-                    <a:lnR w="28575" cap="flat">
-                      <a:solidFill>
-                        <a:srgbClr val="000000">
-                          <a:alpha val="100000"/>
-                        </a:srgbClr>
-                      </a:solidFill>
-                    </a:lnR>
-                    <a:lnT w="12700" cap="flat">
-                      <a:solidFill>
-                        <a:srgbClr val="000000">
-                          <a:alpha val="100000"/>
-                        </a:srgbClr>
-                      </a:solidFill>
-                    </a:lnT>
-                    <a:lnB w="28575" cap="flat">
-                      <a:solidFill>
-                        <a:srgbClr val="000000">
-                          <a:alpha val="100000"/>
-                        </a:srgbClr>
-                      </a:solidFill>
-                    </a:lnB>
-                    <a:solidFill>
-                      <a:srgbClr val="FFFFFF">
-                        <a:alpha val="100000"/>
-                      </a:srgbClr>
-                    </a:solidFill>
-                  </a:tcPr>
-                  <a:extLst>
-                    <a:ext uri="{0D108BD9-81ED-4DB2-BD59-A6C34878D82A}">
-                      <a16:rowId xmlns:a16="http://schemas.microsoft.com/office/drawing/2014/main" val="2661222183"/>
-                    </a:ext>
-                  </a:extLst>
-                </a:tc>
-              </a:tr>
-              <a:tr h="720000">
-                <a:tc rowSpan="1" gridSpan="1">
-                  <a:txBody>
-                    <a:bodyPr anchor="ctr"/>
-                    <a:lstStyle/>
-                    <a:p>
-                      <a:pPr marL="0" algn="ctr">
-                        <a:lnSpc>
-                          <a:spcPts val="4300"/>
-                        </a:lnSpc>
-                      </a:pPr>
-                      <a:r>
-                        <a:rPr lang="zh-CN" altLang="en-US" sz="3600" b="1" i="0" dirty="0">
-                          <a:solidFill>
-                            <a:srgbClr val="000000">
-                              <a:alpha val="100000"/>
-                            </a:srgbClr>
-                          </a:solidFill>
-                          <a:latin typeface="Times New Roman"/>
-                          <a:ea typeface="Times New Roman"/>
-                        </a:rPr>
-                        <a:t>3</a:t>
-                      </a:r>
-                    </a:p>
-                  </a:txBody>
-                  <a:tcPr anchor="ctr">
-                    <a:lnL w="28575" cap="flat">
-                      <a:solidFill>
-                        <a:srgbClr val="000000">
-                          <a:alpha val="100000"/>
-                        </a:srgbClr>
-                      </a:solidFill>
-                    </a:lnL>
-                    <a:lnR w="12700" cap="flat">
-                      <a:solidFill>
-                        <a:srgbClr val="000000">
-                          <a:alpha val="100000"/>
-                        </a:srgbClr>
-                      </a:solidFill>
-                    </a:lnR>
-                    <a:lnT w="28575" cap="flat">
-                      <a:solidFill>
-                        <a:srgbClr val="000000">
-                          <a:alpha val="100000"/>
-                        </a:srgbClr>
-                      </a:solidFill>
-                    </a:lnT>
-                    <a:lnB w="12700" cap="flat">
-                      <a:solidFill>
-                        <a:srgbClr val="000000">
-                          <a:alpha val="100000"/>
-                        </a:srgbClr>
-                      </a:solidFill>
-                    </a:lnB>
-                    <a:solidFill>
-                      <a:srgbClr val="FFFFFF">
-                        <a:alpha val="100000"/>
-                      </a:srgbClr>
-                    </a:solidFill>
-                  </a:tcPr>
-                  <a:extLst>
-                    <a:ext uri="{0D108BD9-81ED-4DB2-BD59-A6C34878D82A}">
-                      <a16:rowId xmlns:a16="http://schemas.microsoft.com/office/drawing/2014/main" val="2661222183"/>
-                    </a:ext>
-                  </a:extLst>
-                </a:tc>
-                <a:tc rowSpan="1" gridSpan="1">
-                  <a:txBody>
-                    <a:bodyPr anchor="ctr"/>
-                    <a:lstStyle/>
-                    <a:p>
-                      <a:pPr marL="0" algn="ctr">
-                        <a:lnSpc>
-                          <a:spcPts val="4300"/>
-                        </a:lnSpc>
-                      </a:pPr>
-                      <a:r>
-                        <a:rPr lang="zh-CN" altLang="en-US" sz="3600" b="1" i="0" dirty="0">
-                          <a:solidFill>
-                            <a:srgbClr val="F00C08">
-                              <a:alpha val="100000"/>
-                            </a:srgbClr>
-                          </a:solidFill>
-                          <a:latin typeface="Times New Roman"/>
-                          <a:ea typeface="Times New Roman"/>
-                        </a:rPr>
-                        <a:t>2</a:t>
-                      </a:r>
-                    </a:p>
-                  </a:txBody>
-                  <a:tcPr anchor="ctr">
-                    <a:lnL w="12700" cap="flat">
-                      <a:solidFill>
-                        <a:srgbClr val="000000">
-                          <a:alpha val="100000"/>
-                        </a:srgbClr>
-                      </a:solidFill>
-                    </a:lnL>
-                    <a:lnR w="28575" cap="flat">
-                      <a:solidFill>
-                        <a:srgbClr val="000000">
-                          <a:alpha val="100000"/>
-                        </a:srgbClr>
-                      </a:solidFill>
-                    </a:lnR>
-                    <a:lnT w="28575" cap="flat">
-                      <a:solidFill>
-                        <a:srgbClr val="000000">
-                          <a:alpha val="100000"/>
-                        </a:srgbClr>
-                      </a:solidFill>
-                    </a:lnT>
-                    <a:lnB w="12700" cap="flat">
-                      <a:solidFill>
-                        <a:srgbClr val="000000">
-                          <a:alpha val="100000"/>
-                        </a:srgbClr>
-                      </a:solidFill>
-                    </a:lnB>
-                    <a:solidFill>
-                      <a:srgbClr val="FFFFFF">
-                        <a:alpha val="100000"/>
-                      </a:srgbClr>
-                    </a:solidFill>
-                  </a:tcPr>
-                  <a:extLst>
-                    <a:ext uri="{0D108BD9-81ED-4DB2-BD59-A6C34878D82A}">
-                      <a16:rowId xmlns:a16="http://schemas.microsoft.com/office/drawing/2014/main" val="2661222183"/>
-                    </a:ext>
-                  </a:extLst>
-                </a:tc>
-                <a:tc rowSpan="1" gridSpan="1">
-                  <a:txBody>
-                    <a:bodyPr anchor="ctr"/>
-                    <a:lstStyle/>
-                    <a:p>
-                      <a:pPr marL="0" algn="ctr">
-                        <a:lnSpc>
-                          <a:spcPts val="4300"/>
-                        </a:lnSpc>
-                      </a:pPr>
-                      <a:r>
-                        <a:rPr lang="zh-CN" altLang="en-US" sz="3600" b="1" i="0" dirty="0">
-                          <a:solidFill>
-                            <a:srgbClr val="F00C08">
-                              <a:alpha val="100000"/>
-                            </a:srgbClr>
-                          </a:solidFill>
-                          <a:latin typeface="Times New Roman"/>
-                          <a:ea typeface="Times New Roman"/>
-                        </a:rPr>
-                        <a:t>4</a:t>
-                      </a:r>
-                    </a:p>
-                  </a:txBody>
-                  <a:tcPr anchor="ctr">
-                    <a:lnL w="28575" cap="flat">
-                      <a:solidFill>
-                        <a:srgbClr val="000000">
-                          <a:alpha val="100000"/>
-                        </a:srgbClr>
-                      </a:solidFill>
-                    </a:lnL>
-                    <a:lnR w="12700" cap="flat">
-                      <a:solidFill>
-                        <a:srgbClr val="000000">
-                          <a:alpha val="100000"/>
-                        </a:srgbClr>
-                      </a:solidFill>
-                    </a:lnR>
-                    <a:lnT w="28575" cap="flat">
-                      <a:solidFill>
-                        <a:srgbClr val="000000">
-                          <a:alpha val="100000"/>
-                        </a:srgbClr>
-                      </a:solidFill>
-                    </a:lnT>
-                    <a:lnB w="12700" cap="flat">
-                      <a:solidFill>
-                        <a:srgbClr val="000000">
-                          <a:alpha val="100000"/>
-                        </a:srgbClr>
-                      </a:solidFill>
-                    </a:lnB>
-                    <a:solidFill>
-                      <a:srgbClr val="FFFFFF">
-                        <a:alpha val="100000"/>
-                      </a:srgbClr>
-                    </a:solidFill>
-                  </a:tcPr>
-                  <a:extLst>
-                    <a:ext uri="{0D108BD9-81ED-4DB2-BD59-A6C34878D82A}">
-                      <a16:rowId xmlns:a16="http://schemas.microsoft.com/office/drawing/2014/main" val="2661222183"/>
-                    </a:ext>
-                  </a:extLst>
-                </a:tc>
-                <a:tc rowSpan="1" gridSpan="1">
-                  <a:txBody>
-                    <a:bodyPr anchor="ctr"/>
-                    <a:lstStyle/>
-                    <a:p>
-                      <a:pPr marL="0" algn="ctr">
-                        <a:lnSpc>
-                          <a:spcPts val="4300"/>
-                        </a:lnSpc>
-                      </a:pPr>
-                      <a:r>
-                        <a:rPr lang="zh-CN" altLang="en-US" sz="3600" b="1" i="0" dirty="0">
-                          <a:solidFill>
-                            <a:srgbClr val="F00C08">
-                              <a:alpha val="100000"/>
-                            </a:srgbClr>
-                          </a:solidFill>
-                          <a:latin typeface="Times New Roman"/>
-                          <a:ea typeface="Times New Roman"/>
-                        </a:rPr>
-                        <a:t>1</a:t>
-                      </a:r>
-                    </a:p>
-                  </a:txBody>
-                  <a:tcPr anchor="ctr">
-                    <a:lnL w="12700" cap="flat">
-                      <a:solidFill>
-                        <a:srgbClr val="000000">
-                          <a:alpha val="100000"/>
-                        </a:srgbClr>
-                      </a:solidFill>
-                    </a:lnL>
-                    <a:lnR w="28575" cap="flat">
-                      <a:solidFill>
-                        <a:srgbClr val="000000">
-                          <a:alpha val="100000"/>
-                        </a:srgbClr>
-                      </a:solidFill>
-                    </a:lnR>
-                    <a:lnT w="28575" cap="flat">
-                      <a:solidFill>
-                        <a:srgbClr val="000000">
-                          <a:alpha val="100000"/>
-                        </a:srgbClr>
-                      </a:solidFill>
-                    </a:lnT>
-                    <a:lnB w="12700" cap="flat">
-                      <a:solidFill>
-                        <a:srgbClr val="000000">
-                          <a:alpha val="100000"/>
-                        </a:srgbClr>
-                      </a:solidFill>
-                    </a:lnB>
-                    <a:solidFill>
-                      <a:srgbClr val="FFFFFF">
-                        <a:alpha val="100000"/>
-                      </a:srgbClr>
-                    </a:solidFill>
-                  </a:tcPr>
-                  <a:extLst>
-                    <a:ext uri="{0D108BD9-81ED-4DB2-BD59-A6C34878D82A}">
-                      <a16:rowId xmlns:a16="http://schemas.microsoft.com/office/drawing/2014/main" val="2661222183"/>
-                    </a:ext>
-                  </a:extLst>
-                </a:tc>
-              </a:tr>
-              <a:tr h="720000">
-                <a:tc rowSpan="1" gridSpan="1">
-                  <a:txBody>
-                    <a:bodyPr anchor="ctr"/>
-                    <a:lstStyle/>
-                    <a:p>
-                      <a:pPr marL="0" algn="ctr">
-                        <a:lnSpc>
-                          <a:spcPts val="4300"/>
-                        </a:lnSpc>
-                      </a:pPr>
-                      <a:r>
-                        <a:rPr lang="zh-CN" altLang="en-US" sz="3600" b="1" i="0" dirty="0">
-                          <a:solidFill>
-                            <a:srgbClr val="F00C08">
-                              <a:alpha val="100000"/>
-                            </a:srgbClr>
-                          </a:solidFill>
-                          <a:latin typeface="Times New Roman"/>
-                          <a:ea typeface="Times New Roman"/>
-                        </a:rPr>
-                        <a:t>4</a:t>
-                      </a:r>
-                    </a:p>
-                  </a:txBody>
-                  <a:tcPr anchor="ctr">
-                    <a:lnL w="28575" cap="flat">
-                      <a:solidFill>
-                        <a:srgbClr val="000000">
-                          <a:alpha val="100000"/>
-                        </a:srgbClr>
-                      </a:solidFill>
-                    </a:lnL>
-                    <a:lnR w="12700" cap="flat">
-                      <a:solidFill>
-                        <a:srgbClr val="000000">
-                          <a:alpha val="100000"/>
-                        </a:srgbClr>
-                      </a:solidFill>
-                    </a:lnR>
-                    <a:lnT w="12700" cap="flat">
-                      <a:solidFill>
-                        <a:srgbClr val="000000">
-                          <a:alpha val="100000"/>
-                        </a:srgbClr>
-                      </a:solidFill>
-                    </a:lnT>
-                    <a:lnB w="28575" cap="flat">
-                      <a:solidFill>
-                        <a:srgbClr val="000000">
-                          <a:alpha val="100000"/>
-                        </a:srgbClr>
-                      </a:solidFill>
-                    </a:lnB>
-                    <a:solidFill>
-                      <a:srgbClr val="FFFFFF">
-                        <a:alpha val="100000"/>
-                      </a:srgbClr>
-                    </a:solidFill>
-                  </a:tcPr>
-                  <a:extLst>
-                    <a:ext uri="{0D108BD9-81ED-4DB2-BD59-A6C34878D82A}">
-                      <a16:rowId xmlns:a16="http://schemas.microsoft.com/office/drawing/2014/main" val="2661222183"/>
-                    </a:ext>
-                  </a:extLst>
-                </a:tc>
-                <a:tc rowSpan="1" gridSpan="1">
-                  <a:txBody>
-                    <a:bodyPr anchor="ctr"/>
-                    <a:lstStyle/>
-                    <a:p>
-                      <a:pPr marL="0" algn="ctr">
-                        <a:lnSpc>
-                          <a:spcPts val="4300"/>
-                        </a:lnSpc>
-                      </a:pPr>
-                      <a:r>
-                        <a:rPr lang="zh-CN" altLang="en-US" sz="3600" b="1" i="0" dirty="0">
-                          <a:solidFill>
-                            <a:srgbClr val="F00C08">
-                              <a:alpha val="100000"/>
-                            </a:srgbClr>
-                          </a:solidFill>
-                          <a:latin typeface="Times New Roman"/>
-                          <a:ea typeface="Times New Roman"/>
-                        </a:rPr>
-                        <a:t>1</a:t>
-                      </a:r>
-                    </a:p>
-                  </a:txBody>
-                  <a:tcPr anchor="ctr">
-                    <a:lnL w="12700" cap="flat">
-                      <a:solidFill>
-                        <a:srgbClr val="000000">
-                          <a:alpha val="100000"/>
-                        </a:srgbClr>
-                      </a:solidFill>
-                    </a:lnL>
-                    <a:lnR w="28575" cap="flat">
-                      <a:solidFill>
-                        <a:srgbClr val="000000">
-                          <a:alpha val="100000"/>
-                        </a:srgbClr>
-                      </a:solidFill>
-                    </a:lnR>
-                    <a:lnT w="12700" cap="flat">
-                      <a:solidFill>
-                        <a:srgbClr val="000000">
-                          <a:alpha val="100000"/>
-                        </a:srgbClr>
-                      </a:solidFill>
-                    </a:lnT>
-                    <a:lnB w="28575" cap="flat">
-                      <a:solidFill>
-                        <a:srgbClr val="000000">
-                          <a:alpha val="100000"/>
-                        </a:srgbClr>
-                      </a:solidFill>
-                    </a:lnB>
-                    <a:solidFill>
-                      <a:srgbClr val="FFFFFF">
-                        <a:alpha val="100000"/>
-                      </a:srgbClr>
-                    </a:solidFill>
-                  </a:tcPr>
-                  <a:extLst>
-                    <a:ext uri="{0D108BD9-81ED-4DB2-BD59-A6C34878D82A}">
-                      <a16:rowId xmlns:a16="http://schemas.microsoft.com/office/drawing/2014/main" val="2661222183"/>
-                    </a:ext>
-                  </a:extLst>
-                </a:tc>
-                <a:tc rowSpan="1" gridSpan="1">
-                  <a:txBody>
-                    <a:bodyPr anchor="ctr"/>
-                    <a:lstStyle/>
-                    <a:p>
-                      <a:pPr marL="0" algn="ctr">
-                        <a:lnSpc>
-                          <a:spcPts val="4300"/>
-                        </a:lnSpc>
-                      </a:pPr>
-                      <a:r>
-                        <a:rPr lang="zh-CN" altLang="en-US" sz="3600" b="1" i="0" dirty="0">
-                          <a:solidFill>
-                            <a:srgbClr val="F00C08">
-                              <a:alpha val="100000"/>
-                            </a:srgbClr>
-                          </a:solidFill>
-                          <a:latin typeface="Times New Roman"/>
-                          <a:ea typeface="Times New Roman"/>
-                        </a:rPr>
-                        <a:t>3</a:t>
-                      </a:r>
-                    </a:p>
-                  </a:txBody>
-                  <a:tcPr anchor="ctr">
-                    <a:lnL w="28575" cap="flat">
-                      <a:solidFill>
-                        <a:srgbClr val="000000">
-                          <a:alpha val="100000"/>
-                        </a:srgbClr>
-                      </a:solidFill>
-                    </a:lnL>
-                    <a:lnR w="12700" cap="flat">
-                      <a:solidFill>
-                        <a:srgbClr val="000000">
-                          <a:alpha val="100000"/>
-                        </a:srgbClr>
-                      </a:solidFill>
-                    </a:lnR>
-                    <a:lnT w="12700" cap="flat">
-                      <a:solidFill>
-                        <a:srgbClr val="000000">
-                          <a:alpha val="100000"/>
-                        </a:srgbClr>
-                      </a:solidFill>
-                    </a:lnT>
-                    <a:lnB w="28575" cap="flat">
-                      <a:solidFill>
-                        <a:srgbClr val="000000">
-                          <a:alpha val="100000"/>
-                        </a:srgbClr>
-                      </a:solidFill>
-                    </a:lnB>
-                    <a:solidFill>
-                      <a:srgbClr val="FFFFFF">
-                        <a:alpha val="100000"/>
-                      </a:srgbClr>
-                    </a:solidFill>
-                  </a:tcPr>
-                  <a:extLst>
-                    <a:ext uri="{0D108BD9-81ED-4DB2-BD59-A6C34878D82A}">
-                      <a16:rowId xmlns:a16="http://schemas.microsoft.com/office/drawing/2014/main" val="2661222183"/>
-                    </a:ext>
-                  </a:extLst>
-                </a:tc>
-                <a:tc rowSpan="1" gridSpan="1">
-                  <a:txBody>
-                    <a:bodyPr anchor="ctr"/>
-                    <a:lstStyle/>
-                    <a:p>
-                      <a:pPr marL="0" algn="ctr">
-                        <a:lnSpc>
-                          <a:spcPts val="4300"/>
-                        </a:lnSpc>
-                      </a:pPr>
-                      <a:r>
-                        <a:rPr lang="zh-CN" altLang="en-US" sz="3600" b="1" i="0" dirty="0">
-                          <a:solidFill>
-                            <a:srgbClr val="000000">
-                              <a:alpha val="100000"/>
-                            </a:srgbClr>
-                          </a:solidFill>
-                          <a:latin typeface="Times New Roman"/>
-                          <a:ea typeface="Times New Roman"/>
-                        </a:rPr>
-                        <a:t>2</a:t>
-                      </a:r>
-                    </a:p>
-                  </a:txBody>
-                  <a:tcPr anchor="ctr">
-                    <a:lnL w="12700" cap="flat">
-                      <a:solidFill>
-                        <a:srgbClr val="000000">
-                          <a:alpha val="100000"/>
-                        </a:srgbClr>
-                      </a:solidFill>
-                    </a:lnL>
-                    <a:lnR w="28575" cap="flat">
-                      <a:solidFill>
-                        <a:srgbClr val="000000">
-                          <a:alpha val="100000"/>
-                        </a:srgbClr>
-                      </a:solidFill>
-                    </a:lnR>
-                    <a:lnT w="12700" cap="flat">
-                      <a:solidFill>
-                        <a:srgbClr val="000000">
-                          <a:alpha val="100000"/>
-                        </a:srgbClr>
-                      </a:solidFill>
-                    </a:lnT>
-                    <a:lnB w="28575" cap="flat">
-                      <a:solidFill>
-                        <a:srgbClr val="000000">
-                          <a:alpha val="100000"/>
-                        </a:srgbClr>
-                      </a:solidFill>
-                    </a:lnB>
-                    <a:solidFill>
-                      <a:srgbClr val="FFFFFF">
-                        <a:alpha val="100000"/>
-                      </a:srgbClr>
-                    </a:solidFill>
-                  </a:tcPr>
-                  <a:extLst>
-                    <a:ext uri="{0D108BD9-81ED-4DB2-BD59-A6C34878D82A}">
-                      <a16:rowId xmlns:a16="http://schemas.microsoft.com/office/drawing/2014/main" val="2661222183"/>
-                    </a:ext>
-                  </a:extLst>
-                </a:tc>
-              </a:tr>
-            </a:tbl>
-          </a:graphicData>
-        </a:graphic>
-      </p:graphicFrame>
-      <p:grpSp>
-        <p:nvGrpSpPr>
-          <p:cNvPr id="12" name="组合2"/>
-          <p:cNvGrpSpPr/>
-          <p:nvPr/>
-        </p:nvGrpSpPr>
-        <p:grpSpPr>
-          <a:xfrm>
-            <a:off x="763598" y="4891638"/>
-            <a:ext cx="10660994" cy="1367768"/>
-            <a:chOff x="0" y="0"/>
-            <a:chExt cx="10660994" cy="1367768"/>
-          </a:xfrm>
-        </p:grpSpPr>
-        <p:sp>
-          <p:nvSpPr>
-            <p:cNvPr id="13" name="形状5"/>
-            <p:cNvSpPr txBox="1"/>
-            <p:nvPr/>
-          </p:nvSpPr>
-          <p:spPr>
-            <a:xfrm>
-              <a:off x="3810" y="49530"/>
-              <a:ext cx="10657184" cy="1236044"/>
-            </a:xfrm>
-            <a:prstGeom prst="rect"/>
-            <a:solidFill>
-              <a:srgbClr val="FBE5D6">
-                <a:alpha val="100000"/>
-              </a:srgbClr>
-            </a:solidFill>
-            <a:ln w="9525">
-              <a:solidFill>
-                <a:srgbClr val="FFFFFF">
-                  <a:alpha val="0"/>
-                </a:srgbClr>
-              </a:solidFill>
-            </a:ln>
-          </p:spPr>
-          <p:txBody>
-            <a:bodyPr anchor="ctr"/>
-            <a:lstStyle/>
-            <a:p>
-              <a:pPr marL="0" algn="ctr"/>
-            </a:p>
-          </p:txBody>
-        </p:sp>
-        <p:sp>
-          <p:nvSpPr>
-            <p:cNvPr id="14" name="文本3"/>
-            <p:cNvSpPr txBox="1"/>
-            <p:nvPr/>
-          </p:nvSpPr>
-          <p:spPr>
-            <a:xfrm>
-              <a:off x="0" y="0"/>
-              <a:ext cx="10657184" cy="1367768"/>
-            </a:xfrm>
-            <a:prstGeom prst="rect">
-              <a:avLst/>
-            </a:prstGeom>
-            <a:noFill/>
-          </p:spPr>
-          <p:txBody>
-            <a:bodyPr anchor="t"/>
-            <a:lstStyle/>
-            <a:p>
-              <a:pPr marL="0" algn="l">
-                <a:lnSpc>
-                  <a:spcPts val="4600"/>
-                </a:lnSpc>
-              </a:pPr>
-              <a:r>
-                <a:rPr lang="zh-CN" altLang="en-US" sz="3200" b="1" i="0" dirty="0">
-                  <a:solidFill>
-                    <a:srgbClr val="3333CC">
-                      <a:alpha val="100000"/>
-                    </a:srgbClr>
-                  </a:solidFill>
-                  <a:latin typeface="Times New Roman"/>
-                  <a:ea typeface="Times New Roman"/>
-                </a:rPr>
-                <a:t>        </a:t>
-              </a:r>
-              <a:r>
-                <a:rPr lang="zh-CN" altLang="en-US" sz="3200" b="1" i="0" dirty="0">
-                  <a:solidFill>
-                    <a:srgbClr val="3333CC">
-                      <a:alpha val="100000"/>
-                    </a:srgbClr>
-                  </a:solidFill>
-                  <a:latin typeface="楷体"/>
-                  <a:ea typeface="楷体"/>
-                </a:rPr>
-                <a:t>可以根据方格排除数，还可以根据数排除方格。同时结合行、列、宫进行观察，可以更快地进行判断。</a:t>
-              </a:r>
-            </a:p>
-          </p:txBody>
-        </p:sp>
-      </p:grpSp>
     </p:spTree>
     <p:extLst>
       <p:ext uri="{BB962C8B-B14F-4D97-AF65-F5344CB8AC3E}">
@@ -14666,128 +12140,6 @@
   <p:clrMapOvr>
     <a:masterClrMapping/>
   </p:clrMapOvr>
-  <p:timing>
-    <p:tnLst>
-      <p:par>
-        <p:cTn id="1" dur="indefinite" restart="never" nodeType="tmRoot">
-          <p:childTnLst>
-            <p:seq concurrent="1" nextAc="seek">
-              <p:cTn id="2" dur="indefinite" nodeType="mainSeq">
-                <p:childTnLst>
-                  <p:par>
-                    <p:cTn id="6" fill="hold">
-                      <p:stCondLst>
-                        <p:cond delay="indefinite"/>
-                      </p:stCondLst>
-                      <p:childTnLst>
-                        <p:par>
-                          <p:cTn id="7" fill="hold">
-                            <p:stCondLst>
-                              <p:cond delay="0"/>
-                            </p:stCondLst>
-                            <p:childTnLst>
-                              <p:par>
-                                <p:cTn id="5" presetID="10" presetClass="entr" presetSubtype="0" fill="hold" grpId="0" nodeType="clickEffect">
-                                  <p:stCondLst>
-                                    <p:cond delay="0"/>
-                                  </p:stCondLst>
-                                  <p:childTnLst>
-                                    <p:set>
-                                      <p:cBhvr>
-                                        <p:cTn id="3" dur="1" fill="hold">
-                                          <p:stCondLst>
-                                            <p:cond delay="0"/>
-                                          </p:stCondLst>
-                                        </p:cTn>
-                                        <p:tgtEl>
-                                          <p:spTgt spid="11"/>
-                                        </p:tgtEl>
-                                        <p:attrNameLst>
-                                          <p:attrName>style.visibility</p:attrName>
-                                        </p:attrNameLst>
-                                      </p:cBhvr>
-                                      <p:to>
-                                        <p:strVal val="visible"/>
-                                      </p:to>
-                                    </p:set>
-                                    <p:animEffect transition="in" filter="fade">
-                                      <p:cBhvr>
-                                        <p:cTn id="4" dur="1"/>
-                                        <p:tgtEl>
-                                          <p:spTgt spid="11"/>
-                                        </p:tgtEl>
-                                      </p:cBhvr>
-                                    </p:animEffect>
-                                  </p:childTnLst>
-                                </p:cTn>
-                              </p:par>
-                              <p:par>
-                                <p:cTn id="10" presetID="10" presetClass="entr" presetSubtype="0" fill="hold" grpId="0" nodeType="clickEffect">
-                                  <p:stCondLst>
-                                    <p:cond delay="0"/>
-                                  </p:stCondLst>
-                                  <p:childTnLst>
-                                    <p:set>
-                                      <p:cBhvr>
-                                        <p:cTn id="8" dur="1" fill="hold">
-                                          <p:stCondLst>
-                                            <p:cond delay="0"/>
-                                          </p:stCondLst>
-                                        </p:cTn>
-                                        <p:tgtEl>
-                                          <p:spTgt spid="12"/>
-                                        </p:tgtEl>
-                                        <p:attrNameLst>
-                                          <p:attrName>style.visibility</p:attrName>
-                                        </p:attrNameLst>
-                                      </p:cBhvr>
-                                      <p:to>
-                                        <p:strVal val="visible"/>
-                                      </p:to>
-                                    </p:set>
-                                    <p:animEffect transition="in" filter="fade">
-                                      <p:cBhvr>
-                                        <p:cTn id="9" dur="1"/>
-                                        <p:tgtEl>
-                                          <p:spTgt spid="12"/>
-                                        </p:tgtEl>
-                                      </p:cBhvr>
-                                    </p:animEffect>
-                                  </p:childTnLst>
-                                </p:cTn>
-                              </p:par>
-                            </p:childTnLst>
-                          </p:cTn>
-                        </p:par>
-                      </p:childTnLst>
-                    </p:cTn>
-                  </p:par>
-                </p:childTnLst>
-              </p:cTn>
-              <p:prevCondLst>
-                <p:cond evt="onPrev" delay="0">
-                  <p:tgtEl>
-                    <p:sldTgt/>
-                  </p:tgtEl>
-                </p:cond>
-              </p:prevCondLst>
-              <p:nextCondLst>
-                <p:cond evt="onNext" delay="0">
-                  <p:tgtEl>
-                    <p:sldTgt/>
-                  </p:tgtEl>
-                </p:cond>
-              </p:nextCondLst>
-            </p:seq>
-          </p:childTnLst>
-        </p:cTn>
-      </p:par>
-    </p:tnLst>
-    <p:bldLst>
-      <p:bldP spid="11" grpId="0" animBg="1"/>
-      <p:bldP spid="12" grpId="0" animBg="1"/>
-    </p:bldLst>
-  </p:timing>
 </p:sld>
 </file>
 
